--- a/docs/briefing/huochai-briefing.pptx
+++ b/docs/briefing/huochai-briefing.pptx
@@ -19,9 +19,10 @@
     <p:sldId id="267" r:id="rId13"/>
     <p:sldId id="268" r:id="rId14"/>
     <p:sldId id="269" r:id="rId15"/>
+    <p:sldId id="270" r:id="rId16"/>
   </p:sldIdLst>
   <p:notesMasterIdLst>
-    <p:notesMasterId r:id="rId16"/>
+    <p:notesMasterId r:id="rId17"/>
   </p:notesMasterIdLst>
   <p:sldSz cx="9144000" cy="5143500"/>
   <p:notesSz cx="5143500" cy="9144000"/>
@@ -120,38 +121,39 @@
   <p:extLst>
     <p:ext uri="{521415D9-36F7-43E2-AB2F-B90AF26B5E84}">
       <p14:sectionLst xmlns:p14="http://schemas.microsoft.com/office/powerpoint/2010/main">
-        <p14:section name="開場" id="{7f256e43-a31e-5a57-3176-130f8eafe094}">
+        <p14:section name="開場" id="{768dc3d8-b964-953a-2a8f-d895e74d34b2}">
           <p14:sldIdLst>
             <p14:sldId id="256"/>
             <p14:sldId id="257"/>
           </p14:sldIdLst>
         </p14:section>
-        <p14:section name="邀約怎麼運作" id="{a6cdbbf1-252c-286f-4d8a-bda2b1a5b43e}">
+        <p14:section name="邀約怎麼運作" id="{8f903521-ded6-517d-757f-04cc46faa325}">
           <p14:sldIdLst>
             <p14:sldId id="258"/>
             <p14:sldId id="259"/>
             <p14:sldId id="260"/>
             <p14:sldId id="261"/>
             <p14:sldId id="262"/>
+            <p14:sldId id="263"/>
           </p14:sldIdLst>
         </p14:section>
-        <p14:section name="火柴與系統的默契" id="{c0b44308-742b-53a7-c44f-9e10a1575de0}">
+        <p14:section name="火柴與系統的默契" id="{ba231a1b-8678-0c93-cb29-a1d09b1630c4}">
           <p14:sldIdLst>
-            <p14:sldId id="263"/>
             <p14:sldId id="264"/>
             <p14:sldId id="265"/>
+            <p14:sldId id="266"/>
           </p14:sldIdLst>
         </p14:section>
-        <p14:section name="取消、通知與看得到什麼" id="{b78ab6b2-1231-f471-416f-3064b113d100}">
+        <p14:section name="取消、通知與看得到什麼" id="{3515bce9-cd1f-8f1f-333d-c55e3454f566}">
           <p14:sldIdLst>
-            <p14:sldId id="266"/>
             <p14:sldId id="267"/>
             <p14:sldId id="268"/>
+            <p14:sldId id="269"/>
           </p14:sldIdLst>
         </p14:section>
-        <p14:section name="結尾" id="{d2476887-ec71-a8a9-6538-1eb9f00ed890}">
+        <p14:section name="結尾" id="{c223c021-5c08-879e-d25f-732554c459b9}">
           <p14:sldIdLst>
-            <p14:sldId id="269"/>
+            <p14:sldId id="270"/>
           </p14:sldIdLst>
         </p14:section>
       </p14:sectionLst>
@@ -647,9 +649,9 @@
           <a:p>
             <a:r>
               <a:rPr lang="en-US" dirty="0"/>
-              <a:t>所有變動都在「我的火柴」→ 選案件 →「修改案件」。
-代班要找火柴用「替換」，不要自己私下換，這樣月曆、時薪和月報才會對。
-每次修改都有紀錄（誰、什麼時候、改了什麼）。</a:t>
+              <a:t>這些是說明書第 5 章的重點整理。
+缺人提醒是系統「機器人」用 LINE 發給火柴的，只提醒不自動改急件，因為順位是火柴的判斷。
+候補用完還沒滿，也會通知火柴加人（只通知一次）。</a:t>
             </a:r>
             <a:endParaRPr lang="en-US" dirty="0"/>
           </a:p>
@@ -737,8 +739,9 @@
           <a:p>
             <a:r>
               <a:rPr lang="en-US" dirty="0"/>
-              <a:t>點燃很自由，不一定要等客戶付款；先把人約好，談案更有底氣。但被你邀請的人，是替你空出了一天。
-取消不需要火柴同意、沒有懲罰：加入時已經把關過，取消本身就會降低信任，有分寸的夥伴不會輕易這麼做。</a:t>
+              <a:t>所有變動都在「我的火柴」→ 選案件 →「修改案件」。
+代班要找火柴用「替換」，不要自己私下換，這樣月曆、時薪和月報才會對。
+每次修改都有紀錄（誰、什麼時候、改了什麼）。</a:t>
             </a:r>
             <a:endParaRPr lang="en-US" dirty="0"/>
           </a:p>
@@ -826,8 +829,8 @@
           <a:p>
             <a:r>
               <a:rPr lang="en-US" dirty="0"/>
-              <a:t>先講給大家安心：野放是只有「找你的火柴」看得到，其他人只看到沒空。
-時薪其他夥伴看不到，管理者看得到是為了月底報表。</a:t>
+              <a:t>點燃很自由，不一定要等客戶付款；先把人約好，談案更有底氣。但被你邀請的人，是替你空出了一天。
+取消不需要火柴同意、沒有懲罰：加入時已經把關過，取消本身就會降低信任，有分寸的夥伴不會輕易這麼做。</a:t>
             </a:r>
             <a:endParaRPr lang="en-US" dirty="0"/>
           </a:p>
@@ -915,8 +918,8 @@
           <a:p>
             <a:r>
               <a:rPr lang="en-US" dirty="0"/>
-              <a:t>點 LINE 裡的連結會打開小火柴並自動登入。
-訊息量接近上限時，非邀請類通知改用網頁推播（第二版）。</a:t>
+              <a:t>先講給大家安心：野放是只有「找你的火柴」看得到，其他人只看到沒空。
+時薪其他夥伴看不到，管理者看得到是為了月底報表。</a:t>
             </a:r>
             <a:endParaRPr lang="en-US" dirty="0"/>
           </a:p>
@@ -1004,7 +1007,8 @@
           <a:p>
             <a:r>
               <a:rPr lang="en-US" dirty="0"/>
-              <a:t>收尾，開放提問。</a:t>
+              <a:t>點 LINE 裡的連結會打開小火柴並自動登入。
+訊息量接近上限時，非邀請類通知改用網頁推播（第二版）。</a:t>
             </a:r>
             <a:endParaRPr lang="en-US" dirty="0"/>
           </a:p>
@@ -1028,6 +1032,94 @@
             <a:fld id="{F7021451-1387-4CA6-816F-3879F97B5CBC}" type="slidenum">
               <a:rPr lang="en-US"/>
               <a:t>14</a:t>
+            </a:fld>
+            <a:endParaRPr lang="en-US"/>
+          </a:p>
+        </p:txBody>
+      </p:sp>
+    </p:spTree>
+    <p:extLst>
+      <p:ext uri="{BB962C8B-B14F-4D97-AF65-F5344CB8AC3E}">
+        <p14:creationId xmlns:p14="http://schemas.microsoft.com/office/powerpoint/2010/main" val="1024086991"/>
+      </p:ext>
+    </p:extLst>
+  </p:cSld>
+  <p:clrMapOvr>
+    <a:masterClrMapping/>
+  </p:clrMapOvr>
+</p:notes>
+</file>
+
+<file path=ppt/notesSlides/notesSlide15.xml><?xml version="1.0" encoding="utf-8"?>
+<p:notes xmlns:a="http://schemas.openxmlformats.org/drawingml/2006/main" xmlns:r="http://schemas.openxmlformats.org/officeDocument/2006/relationships" xmlns:p="http://schemas.openxmlformats.org/presentationml/2006/main">
+  <p:cSld>
+    <p:spTree>
+      <p:nvGrpSpPr>
+        <p:cNvPr id="1" name=""/>
+        <p:cNvGrpSpPr/>
+        <p:nvPr/>
+      </p:nvGrpSpPr>
+      <p:grpSpPr>
+        <a:xfrm>
+          <a:off x="0" y="0"/>
+          <a:ext cx="0" cy="0"/>
+          <a:chOff x="0" y="0"/>
+          <a:chExt cx="0" cy="0"/>
+        </a:xfrm>
+      </p:grpSpPr>
+      <p:sp>
+        <p:nvSpPr>
+          <p:cNvPr id="2" name="Slide Image Placeholder 1"/>
+          <p:cNvSpPr>
+            <a:spLocks noGrp="1" noRot="1" noChangeAspect="1"/>
+          </p:cNvSpPr>
+          <p:nvPr>
+            <p:ph type="sldImg"/>
+          </p:nvPr>
+        </p:nvSpPr>
+        <p:spPr/>
+      </p:sp>
+      <p:sp>
+        <p:nvSpPr>
+          <p:cNvPr id="3" name="Notes Placeholder 2"/>
+          <p:cNvSpPr>
+            <a:spLocks noGrp="1"/>
+          </p:cNvSpPr>
+          <p:nvPr>
+            <p:ph type="body" idx="1"/>
+          </p:nvPr>
+        </p:nvSpPr>
+        <p:spPr/>
+        <p:txBody>
+          <a:bodyPr/>
+          <a:lstStyle/>
+          <a:p>
+            <a:r>
+              <a:rPr lang="en-US" dirty="0"/>
+              <a:t>收尾，開放提問。</a:t>
+            </a:r>
+            <a:endParaRPr lang="en-US" dirty="0"/>
+          </a:p>
+        </p:txBody>
+      </p:sp>
+      <p:sp>
+        <p:nvSpPr>
+          <p:cNvPr id="4" name="Slide Number Placeholder 3"/>
+          <p:cNvSpPr>
+            <a:spLocks noGrp="1"/>
+          </p:cNvSpPr>
+          <p:nvPr>
+            <p:ph type="sldNum" sz="quarter" idx="10"/>
+          </p:nvPr>
+        </p:nvSpPr>
+        <p:spPr/>
+        <p:txBody>
+          <a:bodyPr/>
+          <a:lstStyle/>
+          <a:p>
+            <a:fld id="{F7021451-1387-4CA6-816F-3879F97B5CBC}" type="slidenum">
+              <a:rPr lang="en-US"/>
+              <a:t>15</a:t>
             </a:fld>
             <a:endParaRPr lang="en-US"/>
           </a:p>
@@ -1271,10 +1363,10 @@
           <a:p>
             <a:r>
               <a:rPr lang="en-US" dirty="0"/>
-              <a:t>順位是火柴的判斷，所以系統只先邀「剛好需要的人數」，後面的候補不會被打擾。
-倒數的用意是不讓案子卡住，不是淘汰人：時間到了，系統同時多問一位，誰先確認誰拿到。
-候補全部用完還沒滿，系統會通知火柴加人（只通知一次）。
-人手急的時候用「急件」：一次邀請全部候補。</a:t>
+              <a:t>每個人都可以是女孩，也可以是火柴，角色是看案子，不是固定的。
+丹哥就算那天沒標有空，子柔一樣邀得到；丹哥也可以婉拒，不用理由，不尷尬。
+小細節：時薪是「這位火柴和這位對象上次合作的金額」自動帶入。子柔第一次邀丹哥，要自己填一次時薪。
+丹哥如果那天自己也有案子（我也出班），就已經有班，子柔選不了他，這時要先跟丹哥那根火柴談。</a:t>
             </a:r>
             <a:endParaRPr lang="en-US" dirty="0"/>
           </a:p>
@@ -1362,9 +1454,10 @@
           <a:p>
             <a:r>
               <a:rPr lang="en-US" dirty="0"/>
-              <a:t>提醒女孩：按下確認，其他火柴會立刻補位，所以想清楚再按。
-婉拒不用理由；取消（答應後反悔）才要選原因。
-同一天不會被兩根火柴同時「約滿」：確認一張，其他自動關。</a:t>
+              <a:t>順位是火柴的判斷，所以系統只先邀「剛好需要的人數」，後面的候補不會被打擾。
+倒數的用意是不讓案子卡住，不是淘汰人：時間到了，系統同時多問一位，誰先確認誰拿到。
+候補全部用完還沒滿，系統會通知火柴加人（只通知一次）。
+人手急的時候用「急件」：一次邀請全部候補。</a:t>
             </a:r>
             <a:endParaRPr lang="en-US" dirty="0"/>
           </a:p>
@@ -1452,8 +1545,9 @@
           <a:p>
             <a:r>
               <a:rPr lang="en-US" dirty="0"/>
-              <a:t>大家本來就會私下談，App 攔不住也不該攔。重點是談好後一步記進來。
-直接加入對方不用再按確認，所以不會有「忘了回」的問題。</a:t>
+              <a:t>提醒女孩：按下確認，其他火柴會立刻補位，所以想清楚再按。
+婉拒不用理由；取消（答應後反悔）才要選原因。
+同一天不會被兩根火柴同時「約滿」：確認一張，其他自動關。</a:t>
             </a:r>
             <a:endParaRPr lang="en-US" dirty="0"/>
           </a:p>
@@ -1541,9 +1635,8 @@
           <a:p>
             <a:r>
               <a:rPr lang="en-US" dirty="0"/>
-              <a:t>倒數是「活躍時間」：晚上 22:00 到早上 08:00 不扣。
-野放的人邀請時，若在 18:00 前收到，倒數從 18:00 才開始，不會因為在忙而錯過。
-急件會用比較多 LINE 訊息，後面會講。</a:t>
+              <a:t>大家本來就會私下談，App 攔不住也不該攔。重點是談好後一步記進來。
+直接加入對方不用再按確認，所以不會有「忘了回」的問題。</a:t>
             </a:r>
             <a:endParaRPr lang="en-US" dirty="0"/>
           </a:p>
@@ -1631,8 +1724,9 @@
           <a:p>
             <a:r>
               <a:rPr lang="en-US" dirty="0"/>
-              <a:t>這是常見誤會：火柴不是「不佔位置」。打開「我也出班」，你那天就有班了。
-如果點燃時撞到自己已答應別人的班，App 會給三個選項：跟客戶改日期／這天只接洽不出班／取消原本的班（要到最後「送出」才真的取消）。</a:t>
+              <a:t>倒數是「活躍時間」：晚上 22:00 到早上 08:00 不扣。
+野放的人邀請時，若在 18:00 前收到，倒數從 18:00 才開始，不會因為在忙而錯過。
+急件會用比較多 LINE 訊息，後面會講。</a:t>
             </a:r>
             <a:endParaRPr lang="en-US" dirty="0"/>
           </a:p>
@@ -1720,9 +1814,8 @@
           <a:p>
             <a:r>
               <a:rPr lang="en-US" dirty="0"/>
-              <a:t>這些是說明書第 5 章的重點整理。
-缺人提醒是系統「機器人」用 LINE 發給火柴的，只提醒不自動改急件，因為順位是火柴的判斷。
-候補用完還沒滿，也會通知火柴加人（只通知一次）。</a:t>
+              <a:t>這是常見誤會：火柴不是「不佔位置」。打開「我也出班」，你那天就有班了。
+如果點燃時撞到自己已答應別人的班，App 會給三個選項：跟客戶改日期／這天只接洽不出班／取消原本的班（要到最後「送出」才真的取消）。</a:t>
             </a:r>
             <a:endParaRPr lang="en-US" dirty="0"/>
           </a:p>
@@ -2516,6 +2609,734 @@
                   <a:schemeClr val="tx1"/>
                 </a:solidFill>
               </a:rPr>
+              <a:t>系統默默在做的事</a:t>
+            </a:r>
+            <a:endParaRPr lang="en-US" sz="2800" dirty="0"/>
+          </a:p>
+        </p:txBody>
+      </p:sp>
+      <p:sp>
+        <p:nvSpPr>
+          <p:cNvPr id="3" name="card"/>
+          <p:cNvSpPr/>
+          <p:nvPr/>
+        </p:nvSpPr>
+        <p:spPr>
+          <a:xfrm>
+            <a:off x="457200" y="1188720"/>
+            <a:ext cx="4023360" cy="1554480"/>
+          </a:xfrm>
+          <a:prstGeom prst="roundRect">
+            <a:avLst>
+              <a:gd name="adj" fmla="val 5882"/>
+            </a:avLst>
+          </a:prstGeom>
+          <a:solidFill>
+            <a:schemeClr val="bg2"/>
+          </a:solidFill>
+          <a:ln w="12700">
+            <a:solidFill>
+              <a:schemeClr val="bg2"/>
+            </a:solidFill>
+            <a:prstDash val="solid"/>
+          </a:ln>
+          <a:effectLst>
+            <a:outerShdw sx="100000" sy="100000" kx="0" ky="0" algn="bl" rotWithShape="0" blurRad="76200" dist="25400" dir="5400000">
+              <a:srgbClr val="000000">
+                <a:alpha val="12000"/>
+              </a:srgbClr>
+            </a:outerShdw>
+          </a:effectLst>
+        </p:spPr>
+      </p:sp>
+      <p:sp>
+        <p:nvSpPr>
+          <p:cNvPr id="4" name="Text 2"/>
+          <p:cNvSpPr txBox="1"/>
+          <p:nvPr/>
+        </p:nvSpPr>
+        <p:spPr>
+          <a:xfrm>
+            <a:off x="640080" y="1371600"/>
+            <a:ext cx="3657600" cy="320040"/>
+          </a:xfrm>
+          <a:prstGeom prst="rect">
+            <a:avLst/>
+          </a:prstGeom>
+          <a:noFill/>
+          <a:ln/>
+        </p:spPr>
+        <p:txBody>
+          <a:bodyPr wrap="square" lIns="0" tIns="0" rIns="0" bIns="0" rtlCol="0" anchor="t"/>
+          <a:lstStyle/>
+          <a:p>
+            <a:pPr indent="0" marL="0">
+              <a:buNone/>
+            </a:pPr>
+            <a:r>
+              <a:rPr lang="en-US" sz="1600" b="1" dirty="0">
+                <a:solidFill>
+                  <a:schemeClr val="tx1"/>
+                </a:solidFill>
+              </a:rPr>
+              <a:t>輪到的候補已有班，直接跳過</a:t>
+            </a:r>
+            <a:endParaRPr lang="en-US" sz="1600" dirty="0"/>
+          </a:p>
+        </p:txBody>
+      </p:sp>
+      <p:sp>
+        <p:nvSpPr>
+          <p:cNvPr id="5" name="Text 3"/>
+          <p:cNvSpPr txBox="1"/>
+          <p:nvPr/>
+        </p:nvSpPr>
+        <p:spPr>
+          <a:xfrm>
+            <a:off x="640080" y="1737360"/>
+            <a:ext cx="3657600" cy="822960"/>
+          </a:xfrm>
+          <a:prstGeom prst="rect">
+            <a:avLst/>
+          </a:prstGeom>
+          <a:noFill/>
+          <a:ln/>
+        </p:spPr>
+        <p:txBody>
+          <a:bodyPr wrap="square" lIns="0" tIns="0" rIns="0" bIns="0" rtlCol="0" anchor="t"/>
+          <a:lstStyle/>
+          <a:p>
+            <a:pPr indent="0" marL="0">
+              <a:buNone/>
+            </a:pPr>
+            <a:r>
+              <a:rPr lang="en-US" sz="1400" dirty="0">
+                <a:solidFill>
+                  <a:schemeClr val="tx1"/>
+                </a:solidFill>
+              </a:rPr>
+              <a:t>或是帳號被暫停的人，都不會被打擾，也不用火柴處理。</a:t>
+            </a:r>
+            <a:endParaRPr lang="en-US" sz="1400" dirty="0"/>
+          </a:p>
+        </p:txBody>
+      </p:sp>
+      <p:sp>
+        <p:nvSpPr>
+          <p:cNvPr id="6" name="icon-circle"/>
+          <p:cNvSpPr/>
+          <p:nvPr/>
+        </p:nvSpPr>
+        <p:spPr>
+          <a:xfrm>
+            <a:off x="3840480" y="1325880"/>
+            <a:ext cx="457200" cy="457200"/>
+          </a:xfrm>
+          <a:prstGeom prst="ellipse">
+            <a:avLst/>
+          </a:prstGeom>
+          <a:solidFill>
+            <a:schemeClr val="accent1"/>
+          </a:solidFill>
+          <a:ln w="12700">
+            <a:solidFill>
+              <a:schemeClr val="accent1"/>
+            </a:solidFill>
+            <a:prstDash val="solid"/>
+          </a:ln>
+        </p:spPr>
+      </p:sp>
+      <p:pic>
+        <p:nvPicPr>
+          <p:cNvPr id="7" name="icon" descr="preencoded.png">    </p:cNvPr>
+          <p:cNvPicPr>
+            <a:picLocks noChangeAspect="1"/>
+          </p:cNvPicPr>
+          <p:nvPr/>
+        </p:nvPicPr>
+        <p:blipFill>
+          <a:blip r:embed="rId1"/>
+          <a:stretch>
+            <a:fillRect/>
+          </a:stretch>
+        </p:blipFill>
+        <p:spPr>
+          <a:xfrm>
+            <a:off x="3950208" y="1435608"/>
+            <a:ext cx="237744" cy="237744"/>
+          </a:xfrm>
+          <a:prstGeom prst="rect">
+            <a:avLst/>
+          </a:prstGeom>
+        </p:spPr>
+      </p:pic>
+      <p:sp>
+        <p:nvSpPr>
+          <p:cNvPr id="8" name="card"/>
+          <p:cNvSpPr/>
+          <p:nvPr/>
+        </p:nvSpPr>
+        <p:spPr>
+          <a:xfrm>
+            <a:off x="4663440" y="1188720"/>
+            <a:ext cx="4023360" cy="1554480"/>
+          </a:xfrm>
+          <a:prstGeom prst="roundRect">
+            <a:avLst>
+              <a:gd name="adj" fmla="val 5882"/>
+            </a:avLst>
+          </a:prstGeom>
+          <a:solidFill>
+            <a:schemeClr val="bg2"/>
+          </a:solidFill>
+          <a:ln w="12700">
+            <a:solidFill>
+              <a:schemeClr val="bg2"/>
+            </a:solidFill>
+            <a:prstDash val="solid"/>
+          </a:ln>
+          <a:effectLst>
+            <a:outerShdw sx="100000" sy="100000" kx="0" ky="0" algn="bl" rotWithShape="0" blurRad="76200" dist="25400" dir="5400000">
+              <a:srgbClr val="000000">
+                <a:alpha val="12000"/>
+              </a:srgbClr>
+            </a:outerShdw>
+          </a:effectLst>
+        </p:spPr>
+      </p:sp>
+      <p:sp>
+        <p:nvSpPr>
+          <p:cNvPr id="9" name="Text 6"/>
+          <p:cNvSpPr txBox="1"/>
+          <p:nvPr/>
+        </p:nvSpPr>
+        <p:spPr>
+          <a:xfrm>
+            <a:off x="4846320" y="1371600"/>
+            <a:ext cx="3657600" cy="320040"/>
+          </a:xfrm>
+          <a:prstGeom prst="rect">
+            <a:avLst/>
+          </a:prstGeom>
+          <a:noFill/>
+          <a:ln/>
+        </p:spPr>
+        <p:txBody>
+          <a:bodyPr wrap="square" lIns="0" tIns="0" rIns="0" bIns="0" rtlCol="0" anchor="t"/>
+          <a:lstStyle/>
+          <a:p>
+            <a:pPr indent="0" marL="0">
+              <a:buNone/>
+            </a:pPr>
+            <a:r>
+              <a:rPr lang="en-US" sz="1600" b="1" dirty="0">
+                <a:solidFill>
+                  <a:schemeClr val="tx1"/>
+                </a:solidFill>
+              </a:rPr>
+              <a:t>有人取消，立刻補位</a:t>
+            </a:r>
+            <a:endParaRPr lang="en-US" sz="1600" dirty="0"/>
+          </a:p>
+        </p:txBody>
+      </p:sp>
+      <p:sp>
+        <p:nvSpPr>
+          <p:cNvPr id="10" name="Text 7"/>
+          <p:cNvSpPr txBox="1"/>
+          <p:nvPr/>
+        </p:nvSpPr>
+        <p:spPr>
+          <a:xfrm>
+            <a:off x="4846320" y="1737360"/>
+            <a:ext cx="3657600" cy="822960"/>
+          </a:xfrm>
+          <a:prstGeom prst="rect">
+            <a:avLst/>
+          </a:prstGeom>
+          <a:noFill/>
+          <a:ln/>
+        </p:spPr>
+        <p:txBody>
+          <a:bodyPr wrap="square" lIns="0" tIns="0" rIns="0" bIns="0" rtlCol="0" anchor="t"/>
+          <a:lstStyle/>
+          <a:p>
+            <a:pPr indent="0" marL="0">
+              <a:buNone/>
+            </a:pPr>
+            <a:r>
+              <a:rPr lang="en-US" sz="1400" dirty="0">
+                <a:solidFill>
+                  <a:schemeClr val="tx1"/>
+                </a:solidFill>
+              </a:rPr>
+              <a:t>火柴馬上收到通知，系統同時邀請下一位。</a:t>
+            </a:r>
+            <a:endParaRPr lang="en-US" sz="1400" dirty="0"/>
+          </a:p>
+        </p:txBody>
+      </p:sp>
+      <p:sp>
+        <p:nvSpPr>
+          <p:cNvPr id="11" name="icon-circle"/>
+          <p:cNvSpPr/>
+          <p:nvPr/>
+        </p:nvSpPr>
+        <p:spPr>
+          <a:xfrm>
+            <a:off x="8046720" y="1325880"/>
+            <a:ext cx="457200" cy="457200"/>
+          </a:xfrm>
+          <a:prstGeom prst="ellipse">
+            <a:avLst/>
+          </a:prstGeom>
+          <a:solidFill>
+            <a:schemeClr val="accent1"/>
+          </a:solidFill>
+          <a:ln w="12700">
+            <a:solidFill>
+              <a:schemeClr val="accent1"/>
+            </a:solidFill>
+            <a:prstDash val="solid"/>
+          </a:ln>
+        </p:spPr>
+      </p:sp>
+      <p:pic>
+        <p:nvPicPr>
+          <p:cNvPr id="12" name="icon" descr="preencoded.png">    </p:cNvPr>
+          <p:cNvPicPr>
+            <a:picLocks noChangeAspect="1"/>
+          </p:cNvPicPr>
+          <p:nvPr/>
+        </p:nvPicPr>
+        <p:blipFill>
+          <a:blip r:embed="rId2"/>
+          <a:stretch>
+            <a:fillRect/>
+          </a:stretch>
+        </p:blipFill>
+        <p:spPr>
+          <a:xfrm>
+            <a:off x="8156448" y="1435608"/>
+            <a:ext cx="237744" cy="237744"/>
+          </a:xfrm>
+          <a:prstGeom prst="rect">
+            <a:avLst/>
+          </a:prstGeom>
+        </p:spPr>
+      </p:pic>
+      <p:sp>
+        <p:nvSpPr>
+          <p:cNvPr id="13" name="card"/>
+          <p:cNvSpPr/>
+          <p:nvPr/>
+        </p:nvSpPr>
+        <p:spPr>
+          <a:xfrm>
+            <a:off x="457200" y="2880360"/>
+            <a:ext cx="4023360" cy="1554480"/>
+          </a:xfrm>
+          <a:prstGeom prst="roundRect">
+            <a:avLst>
+              <a:gd name="adj" fmla="val 5882"/>
+            </a:avLst>
+          </a:prstGeom>
+          <a:solidFill>
+            <a:schemeClr val="bg2"/>
+          </a:solidFill>
+          <a:ln w="12700">
+            <a:solidFill>
+              <a:schemeClr val="bg2"/>
+            </a:solidFill>
+            <a:prstDash val="solid"/>
+          </a:ln>
+          <a:effectLst>
+            <a:outerShdw sx="100000" sy="100000" kx="0" ky="0" algn="bl" rotWithShape="0" blurRad="76200" dist="25400" dir="5400000">
+              <a:srgbClr val="000000">
+                <a:alpha val="12000"/>
+              </a:srgbClr>
+            </a:outerShdw>
+          </a:effectLst>
+        </p:spPr>
+      </p:sp>
+      <p:sp>
+        <p:nvSpPr>
+          <p:cNvPr id="14" name="Text 10"/>
+          <p:cNvSpPr txBox="1"/>
+          <p:nvPr/>
+        </p:nvSpPr>
+        <p:spPr>
+          <a:xfrm>
+            <a:off x="640080" y="3063240"/>
+            <a:ext cx="3657600" cy="320040"/>
+          </a:xfrm>
+          <a:prstGeom prst="rect">
+            <a:avLst/>
+          </a:prstGeom>
+          <a:noFill/>
+          <a:ln/>
+        </p:spPr>
+        <p:txBody>
+          <a:bodyPr wrap="square" lIns="0" tIns="0" rIns="0" bIns="0" rtlCol="0" anchor="t"/>
+          <a:lstStyle/>
+          <a:p>
+            <a:pPr indent="0" marL="0">
+              <a:buNone/>
+            </a:pPr>
+            <a:r>
+              <a:rPr lang="en-US" sz="1600" b="1" dirty="0">
+                <a:solidFill>
+                  <a:schemeClr val="tx1"/>
+                </a:solidFill>
+              </a:rPr>
+              <a:t>缺人只提醒，不替你決定</a:t>
+            </a:r>
+            <a:endParaRPr lang="en-US" sz="1600" dirty="0"/>
+          </a:p>
+        </p:txBody>
+      </p:sp>
+      <p:sp>
+        <p:nvSpPr>
+          <p:cNvPr id="15" name="Text 11"/>
+          <p:cNvSpPr txBox="1"/>
+          <p:nvPr/>
+        </p:nvSpPr>
+        <p:spPr>
+          <a:xfrm>
+            <a:off x="640080" y="3429000"/>
+            <a:ext cx="3657600" cy="822960"/>
+          </a:xfrm>
+          <a:prstGeom prst="rect">
+            <a:avLst/>
+          </a:prstGeom>
+          <a:noFill/>
+          <a:ln/>
+        </p:spPr>
+        <p:txBody>
+          <a:bodyPr wrap="square" lIns="0" tIns="0" rIns="0" bIns="0" rtlCol="0" anchor="t"/>
+          <a:lstStyle/>
+          <a:p>
+            <a:pPr indent="0" marL="0">
+              <a:buNone/>
+            </a:pPr>
+            <a:r>
+              <a:rPr lang="en-US" sz="1400" dirty="0">
+                <a:solidFill>
+                  <a:schemeClr val="tx1"/>
+                </a:solidFill>
+              </a:rPr>
+              <a:t>出班前 3 天內（10:00 起）、前一天 18:00，各提醒一次。提醒附「改成急件」按鈕。</a:t>
+            </a:r>
+            <a:endParaRPr lang="en-US" sz="1400" dirty="0"/>
+          </a:p>
+        </p:txBody>
+      </p:sp>
+      <p:sp>
+        <p:nvSpPr>
+          <p:cNvPr id="16" name="icon-circle"/>
+          <p:cNvSpPr/>
+          <p:nvPr/>
+        </p:nvSpPr>
+        <p:spPr>
+          <a:xfrm>
+            <a:off x="3840480" y="3017520"/>
+            <a:ext cx="457200" cy="457200"/>
+          </a:xfrm>
+          <a:prstGeom prst="ellipse">
+            <a:avLst/>
+          </a:prstGeom>
+          <a:solidFill>
+            <a:schemeClr val="accent1"/>
+          </a:solidFill>
+          <a:ln w="12700">
+            <a:solidFill>
+              <a:schemeClr val="accent1"/>
+            </a:solidFill>
+            <a:prstDash val="solid"/>
+          </a:ln>
+        </p:spPr>
+      </p:sp>
+      <p:pic>
+        <p:nvPicPr>
+          <p:cNvPr id="17" name="icon" descr="preencoded.png">    </p:cNvPr>
+          <p:cNvPicPr>
+            <a:picLocks noChangeAspect="1"/>
+          </p:cNvPicPr>
+          <p:nvPr/>
+        </p:nvPicPr>
+        <p:blipFill>
+          <a:blip r:embed="rId3"/>
+          <a:stretch>
+            <a:fillRect/>
+          </a:stretch>
+        </p:blipFill>
+        <p:spPr>
+          <a:xfrm>
+            <a:off x="3950208" y="3127248"/>
+            <a:ext cx="237744" cy="237744"/>
+          </a:xfrm>
+          <a:prstGeom prst="rect">
+            <a:avLst/>
+          </a:prstGeom>
+        </p:spPr>
+      </p:pic>
+      <p:sp>
+        <p:nvSpPr>
+          <p:cNvPr id="18" name="card"/>
+          <p:cNvSpPr/>
+          <p:nvPr/>
+        </p:nvSpPr>
+        <p:spPr>
+          <a:xfrm>
+            <a:off x="4663440" y="2880360"/>
+            <a:ext cx="4023360" cy="1554480"/>
+          </a:xfrm>
+          <a:prstGeom prst="roundRect">
+            <a:avLst>
+              <a:gd name="adj" fmla="val 5882"/>
+            </a:avLst>
+          </a:prstGeom>
+          <a:solidFill>
+            <a:schemeClr val="bg2"/>
+          </a:solidFill>
+          <a:ln w="12700">
+            <a:solidFill>
+              <a:schemeClr val="bg2"/>
+            </a:solidFill>
+            <a:prstDash val="solid"/>
+          </a:ln>
+          <a:effectLst>
+            <a:outerShdw sx="100000" sy="100000" kx="0" ky="0" algn="bl" rotWithShape="0" blurRad="76200" dist="25400" dir="5400000">
+              <a:srgbClr val="000000">
+                <a:alpha val="12000"/>
+              </a:srgbClr>
+            </a:outerShdw>
+          </a:effectLst>
+        </p:spPr>
+      </p:sp>
+      <p:sp>
+        <p:nvSpPr>
+          <p:cNvPr id="19" name="Text 14"/>
+          <p:cNvSpPr txBox="1"/>
+          <p:nvPr/>
+        </p:nvSpPr>
+        <p:spPr>
+          <a:xfrm>
+            <a:off x="4846320" y="3063240"/>
+            <a:ext cx="3657600" cy="320040"/>
+          </a:xfrm>
+          <a:prstGeom prst="rect">
+            <a:avLst/>
+          </a:prstGeom>
+          <a:noFill/>
+          <a:ln/>
+        </p:spPr>
+        <p:txBody>
+          <a:bodyPr wrap="square" lIns="0" tIns="0" rIns="0" bIns="0" rtlCol="0" anchor="t"/>
+          <a:lstStyle/>
+          <a:p>
+            <a:pPr indent="0" marL="0">
+              <a:buNone/>
+            </a:pPr>
+            <a:r>
+              <a:rPr lang="en-US" sz="1600" b="1" dirty="0">
+                <a:solidFill>
+                  <a:schemeClr val="tx1"/>
+                </a:solidFill>
+              </a:rPr>
+              <a:t>開工時間到就關門</a:t>
+            </a:r>
+            <a:endParaRPr lang="en-US" sz="1600" dirty="0"/>
+          </a:p>
+        </p:txBody>
+      </p:sp>
+      <p:sp>
+        <p:nvSpPr>
+          <p:cNvPr id="20" name="Text 15"/>
+          <p:cNvSpPr txBox="1"/>
+          <p:nvPr/>
+        </p:nvSpPr>
+        <p:spPr>
+          <a:xfrm>
+            <a:off x="4846320" y="3429000"/>
+            <a:ext cx="3657600" cy="822960"/>
+          </a:xfrm>
+          <a:prstGeom prst="rect">
+            <a:avLst/>
+          </a:prstGeom>
+          <a:noFill/>
+          <a:ln/>
+        </p:spPr>
+        <p:txBody>
+          <a:bodyPr wrap="square" lIns="0" tIns="0" rIns="0" bIns="0" rtlCol="0" anchor="t"/>
+          <a:lstStyle/>
+          <a:p>
+            <a:pPr indent="0" marL="0">
+              <a:buNone/>
+            </a:pPr>
+            <a:r>
+              <a:rPr lang="en-US" sz="1400" dirty="0">
+                <a:solidFill>
+                  <a:schemeClr val="tx1"/>
+                </a:solidFill>
+              </a:rPr>
+              <a:t>還沒回覆的邀請全部關閉，那天記下「缺幾人出班」，留在月報。</a:t>
+            </a:r>
+            <a:endParaRPr lang="en-US" sz="1400" dirty="0"/>
+          </a:p>
+        </p:txBody>
+      </p:sp>
+      <p:sp>
+        <p:nvSpPr>
+          <p:cNvPr id="21" name="icon-circle"/>
+          <p:cNvSpPr/>
+          <p:nvPr/>
+        </p:nvSpPr>
+        <p:spPr>
+          <a:xfrm>
+            <a:off x="8046720" y="3017520"/>
+            <a:ext cx="457200" cy="457200"/>
+          </a:xfrm>
+          <a:prstGeom prst="ellipse">
+            <a:avLst/>
+          </a:prstGeom>
+          <a:solidFill>
+            <a:schemeClr val="accent1"/>
+          </a:solidFill>
+          <a:ln w="12700">
+            <a:solidFill>
+              <a:schemeClr val="accent1"/>
+            </a:solidFill>
+            <a:prstDash val="solid"/>
+          </a:ln>
+        </p:spPr>
+      </p:sp>
+      <p:pic>
+        <p:nvPicPr>
+          <p:cNvPr id="22" name="icon" descr="preencoded.png">    </p:cNvPr>
+          <p:cNvPicPr>
+            <a:picLocks noChangeAspect="1"/>
+          </p:cNvPicPr>
+          <p:nvPr/>
+        </p:nvPicPr>
+        <p:blipFill>
+          <a:blip r:embed="rId4"/>
+          <a:stretch>
+            <a:fillRect/>
+          </a:stretch>
+        </p:blipFill>
+        <p:spPr>
+          <a:xfrm>
+            <a:off x="8156448" y="3127248"/>
+            <a:ext cx="237744" cy="237744"/>
+          </a:xfrm>
+          <a:prstGeom prst="rect">
+            <a:avLst/>
+          </a:prstGeom>
+        </p:spPr>
+      </p:pic>
+      <p:sp>
+        <p:nvSpPr>
+          <p:cNvPr id="25" name="Slide Number Placeholder 0"/>
+          <p:cNvSpPr>
+            <a:spLocks noGrp="1"/>
+          </p:cNvSpPr>
+          <p:nvPr>
+            <p:ph type="sldNum" sz="quarter" idx="4294967295"/>
+          </p:nvPr>
+        </p:nvSpPr>
+        <p:spPr>
+          <a:xfrm>
+            <a:off x="8321040" y="4754880"/>
+            <a:ext cx="457200" cy="274320"/>
+          </a:xfrm>
+          <a:prstGeom prst="rect">
+            <a:avLst/>
+          </a:prstGeom>
+          <a:extLst>
+            <a:ext uri="{C572A759-6A51-4108-AA02-DFA0A04FC94B}">
+              <ma14:wrappingTextBoxFlag xmlns:ma14="http://schemas.microsoft.com/office/mac/drawingml/2011/main" val="0"/>
+            </a:ext>
+          </a:extLst>
+        </p:spPr>
+        <p:txBody>
+          <a:bodyPr/>
+          <a:lstStyle>
+            <a:lvl1pPr>
+              <a:defRPr sz="1000">
+                <a:solidFill>
+                  <a:schemeClr val="accent3"/>
+                </a:solidFill>
+              </a:defRPr>
+            </a:lvl1pPr>
+          </a:lstStyle>
+          <a:p>
+            <a:pPr algn="r"/>
+            <a:fld id="{F7021451-1387-4CA6-816F-3879F97B5CBC}" type="slidenum">
+              <a:rPr b="0" lang="en-US"/>
+              <a:t>10</a:t>
+            </a:fld>
+            <a:endParaRPr lang="en-US"/>
+          </a:p>
+        </p:txBody>
+      </p:sp>
+    </p:spTree>
+  </p:cSld>
+  <p:clrMapOvr>
+    <a:masterClrMapping/>
+  </p:clrMapOvr>
+</p:sld>
+</file>
+
+<file path=ppt/slides/slide11.xml><?xml version="1.0" encoding="utf-8"?>
+<p:sld xmlns:a="http://schemas.openxmlformats.org/drawingml/2006/main" xmlns:r="http://schemas.openxmlformats.org/officeDocument/2006/relationships" xmlns:p="http://schemas.openxmlformats.org/presentationml/2006/main">
+  <p:cSld name="Slide 11">
+    <p:spTree>
+      <p:nvGrpSpPr>
+        <p:cNvPr id="1" name=""/>
+        <p:cNvGrpSpPr/>
+        <p:nvPr/>
+      </p:nvGrpSpPr>
+      <p:grpSpPr>
+        <a:xfrm>
+          <a:off x="0" y="0"/>
+          <a:ext cx="0" cy="0"/>
+          <a:chOff x="0" y="0"/>
+          <a:chExt cx="0" cy="0"/>
+        </a:xfrm>
+      </p:grpSpPr>
+      <p:sp>
+        <p:nvSpPr>
+          <p:cNvPr id="2" name="Text 0"/>
+          <p:cNvSpPr/>
+          <p:nvPr>
+            <p:ph idx="100" type="title" hasCustomPrompt="1"/>
+          </p:nvPr>
+        </p:nvSpPr>
+        <p:spPr>
+          <a:xfrm>
+            <a:off x="457200" y="274320"/>
+            <a:ext cx="8229600" cy="731520"/>
+          </a:xfrm>
+          <a:prstGeom prst="rect">
+            <a:avLst/>
+          </a:prstGeom>
+          <a:noFill/>
+          <a:ln/>
+        </p:spPr>
+        <p:txBody>
+          <a:bodyPr wrap="square" lIns="0" tIns="0" rIns="0" bIns="0" rtlCol="0" anchor="ctr"/>
+          <a:lstStyle/>
+          <a:p>
+            <a:pPr algn="l" indent="0" marL="0">
+              <a:buNone/>
+            </a:pPr>
+            <a:r>
+              <a:rPr lang="en-US" sz="2800" b="1" dirty="0">
+                <a:solidFill>
+                  <a:schemeClr val="tx1"/>
+                </a:solidFill>
+              </a:rPr>
               <a:t>客戶改了，會發生什麼事</a:t>
             </a:r>
             <a:endParaRPr lang="en-US" sz="2800" dirty="0"/>
@@ -2524,7 +3345,7 @@
       </p:sp>
       <p:graphicFrame>
         <p:nvGraphicFramePr>
-          <p:cNvPr id="11" name="Table 0"/>
+          <p:cNvPr id="12" name="Table 0"/>
           <p:cNvGraphicFramePr>
             <a:graphicFrameLocks noGrp="1"/>
           </p:cNvGraphicFramePr>
@@ -3335,398 +4156,6 @@
             <a:pPr algn="r"/>
             <a:fld id="{F7021451-1387-4CA6-816F-3879F97B5CBC}" type="slidenum">
               <a:rPr b="0" lang="en-US"/>
-              <a:t>10</a:t>
-            </a:fld>
-            <a:endParaRPr lang="en-US"/>
-          </a:p>
-        </p:txBody>
-      </p:sp>
-    </p:spTree>
-  </p:cSld>
-  <p:clrMapOvr>
-    <a:masterClrMapping/>
-  </p:clrMapOvr>
-</p:sld>
-</file>
-
-<file path=ppt/slides/slide11.xml><?xml version="1.0" encoding="utf-8"?>
-<p:sld xmlns:a="http://schemas.openxmlformats.org/drawingml/2006/main" xmlns:r="http://schemas.openxmlformats.org/officeDocument/2006/relationships" xmlns:p="http://schemas.openxmlformats.org/presentationml/2006/main">
-  <p:cSld name="Slide 11">
-    <p:spTree>
-      <p:nvGrpSpPr>
-        <p:cNvPr id="1" name=""/>
-        <p:cNvGrpSpPr/>
-        <p:nvPr/>
-      </p:nvGrpSpPr>
-      <p:grpSpPr>
-        <a:xfrm>
-          <a:off x="0" y="0"/>
-          <a:ext cx="0" cy="0"/>
-          <a:chOff x="0" y="0"/>
-          <a:chExt cx="0" cy="0"/>
-        </a:xfrm>
-      </p:grpSpPr>
-      <p:sp>
-        <p:nvSpPr>
-          <p:cNvPr id="2" name="Text 0"/>
-          <p:cNvSpPr/>
-          <p:nvPr>
-            <p:ph idx="100" type="title" hasCustomPrompt="1"/>
-          </p:nvPr>
-        </p:nvSpPr>
-        <p:spPr>
-          <a:xfrm>
-            <a:off x="457200" y="274320"/>
-            <a:ext cx="8229600" cy="731520"/>
-          </a:xfrm>
-          <a:prstGeom prst="rect">
-            <a:avLst/>
-          </a:prstGeom>
-          <a:noFill/>
-          <a:ln/>
-        </p:spPr>
-        <p:txBody>
-          <a:bodyPr wrap="square" lIns="0" tIns="0" rIns="0" bIns="0" rtlCol="0" anchor="ctr"/>
-          <a:lstStyle/>
-          <a:p>
-            <a:pPr algn="l" indent="0" marL="0">
-              <a:buNone/>
-            </a:pPr>
-            <a:r>
-              <a:rPr lang="en-US" sz="2800" b="1" dirty="0">
-                <a:solidFill>
-                  <a:schemeClr val="tx1"/>
-                </a:solidFill>
-              </a:rPr>
-              <a:t>婉拒、取消與信任</a:t>
-            </a:r>
-            <a:endParaRPr lang="en-US" sz="2800" dirty="0"/>
-          </a:p>
-        </p:txBody>
-      </p:sp>
-      <p:sp>
-        <p:nvSpPr>
-          <p:cNvPr id="3" name="card"/>
-          <p:cNvSpPr/>
-          <p:nvPr/>
-        </p:nvSpPr>
-        <p:spPr>
-          <a:xfrm>
-            <a:off x="457200" y="1188720"/>
-            <a:ext cx="4023360" cy="2103120"/>
-          </a:xfrm>
-          <a:prstGeom prst="roundRect">
-            <a:avLst>
-              <a:gd name="adj" fmla="val 4348"/>
-            </a:avLst>
-          </a:prstGeom>
-          <a:solidFill>
-            <a:schemeClr val="bg2"/>
-          </a:solidFill>
-          <a:ln w="12700">
-            <a:solidFill>
-              <a:schemeClr val="bg2"/>
-            </a:solidFill>
-            <a:prstDash val="solid"/>
-          </a:ln>
-          <a:effectLst>
-            <a:outerShdw sx="100000" sy="100000" kx="0" ky="0" algn="bl" rotWithShape="0" blurRad="76200" dist="25400" dir="5400000">
-              <a:srgbClr val="000000">
-                <a:alpha val="12000"/>
-              </a:srgbClr>
-            </a:outerShdw>
-          </a:effectLst>
-        </p:spPr>
-      </p:sp>
-      <p:sp>
-        <p:nvSpPr>
-          <p:cNvPr id="4" name="Text 2"/>
-          <p:cNvSpPr txBox="1"/>
-          <p:nvPr/>
-        </p:nvSpPr>
-        <p:spPr>
-          <a:xfrm>
-            <a:off x="640080" y="1371600"/>
-            <a:ext cx="3657600" cy="365760"/>
-          </a:xfrm>
-          <a:prstGeom prst="rect">
-            <a:avLst/>
-          </a:prstGeom>
-          <a:noFill/>
-          <a:ln/>
-        </p:spPr>
-        <p:txBody>
-          <a:bodyPr wrap="square" lIns="0" tIns="0" rIns="0" bIns="0" rtlCol="0" anchor="t"/>
-          <a:lstStyle/>
-          <a:p>
-            <a:pPr indent="0" marL="0">
-              <a:buNone/>
-            </a:pPr>
-            <a:r>
-              <a:rPr lang="en-US" sz="1600" b="1" dirty="0">
-                <a:solidFill>
-                  <a:schemeClr val="tx1"/>
-                </a:solidFill>
-              </a:rPr>
-              <a:t>婉拒（還沒答應）</a:t>
-            </a:r>
-            <a:endParaRPr lang="en-US" sz="1600" dirty="0"/>
-          </a:p>
-        </p:txBody>
-      </p:sp>
-      <p:sp>
-        <p:nvSpPr>
-          <p:cNvPr id="5" name="Text 3"/>
-          <p:cNvSpPr txBox="1"/>
-          <p:nvPr/>
-        </p:nvSpPr>
-        <p:spPr>
-          <a:xfrm>
-            <a:off x="640080" y="1783080"/>
-            <a:ext cx="3657600" cy="1325880"/>
-          </a:xfrm>
-          <a:prstGeom prst="rect">
-            <a:avLst/>
-          </a:prstGeom>
-          <a:noFill/>
-          <a:ln/>
-        </p:spPr>
-        <p:txBody>
-          <a:bodyPr wrap="square" lIns="0" tIns="0" rIns="0" bIns="0" rtlCol="0" anchor="t"/>
-          <a:lstStyle/>
-          <a:p>
-            <a:pPr indent="0" marL="0">
-              <a:buNone/>
-            </a:pPr>
-            <a:r>
-              <a:rPr lang="en-US" sz="1400" dirty="0">
-                <a:solidFill>
-                  <a:schemeClr val="tx1"/>
-                </a:solidFill>
-              </a:rPr>
-              <a:t>不用理由，不欠任何人解釋。系統自動邀下一位。</a:t>
-            </a:r>
-            <a:endParaRPr lang="en-US" sz="1400" dirty="0"/>
-          </a:p>
-        </p:txBody>
-      </p:sp>
-      <p:sp>
-        <p:nvSpPr>
-          <p:cNvPr id="6" name="card"/>
-          <p:cNvSpPr/>
-          <p:nvPr/>
-        </p:nvSpPr>
-        <p:spPr>
-          <a:xfrm>
-            <a:off x="4663440" y="1188720"/>
-            <a:ext cx="4023360" cy="2103120"/>
-          </a:xfrm>
-          <a:prstGeom prst="roundRect">
-            <a:avLst>
-              <a:gd name="adj" fmla="val 4348"/>
-            </a:avLst>
-          </a:prstGeom>
-          <a:solidFill>
-            <a:schemeClr val="accent2"/>
-          </a:solidFill>
-          <a:ln w="12700">
-            <a:solidFill>
-              <a:schemeClr val="accent2"/>
-            </a:solidFill>
-            <a:prstDash val="solid"/>
-          </a:ln>
-          <a:effectLst>
-            <a:outerShdw sx="100000" sy="100000" kx="0" ky="0" algn="bl" rotWithShape="0" blurRad="76200" dist="25400" dir="5400000">
-              <a:srgbClr val="000000">
-                <a:alpha val="12000"/>
-              </a:srgbClr>
-            </a:outerShdw>
-          </a:effectLst>
-        </p:spPr>
-      </p:sp>
-      <p:sp>
-        <p:nvSpPr>
-          <p:cNvPr id="7" name="Text 5"/>
-          <p:cNvSpPr txBox="1"/>
-          <p:nvPr/>
-        </p:nvSpPr>
-        <p:spPr>
-          <a:xfrm>
-            <a:off x="4846320" y="1371600"/>
-            <a:ext cx="3657600" cy="365760"/>
-          </a:xfrm>
-          <a:prstGeom prst="rect">
-            <a:avLst/>
-          </a:prstGeom>
-          <a:noFill/>
-          <a:ln/>
-        </p:spPr>
-        <p:txBody>
-          <a:bodyPr wrap="square" lIns="0" tIns="0" rIns="0" bIns="0" rtlCol="0" anchor="t"/>
-          <a:lstStyle/>
-          <a:p>
-            <a:pPr indent="0" marL="0">
-              <a:buNone/>
-            </a:pPr>
-            <a:r>
-              <a:rPr lang="en-US" sz="1600" b="1" dirty="0">
-                <a:solidFill>
-                  <a:schemeClr val="tx1"/>
-                </a:solidFill>
-              </a:rPr>
-              <a:t>取消（答應後反悔）</a:t>
-            </a:r>
-            <a:endParaRPr lang="en-US" sz="1600" dirty="0"/>
-          </a:p>
-        </p:txBody>
-      </p:sp>
-      <p:sp>
-        <p:nvSpPr>
-          <p:cNvPr id="8" name="Text 6"/>
-          <p:cNvSpPr txBox="1"/>
-          <p:nvPr/>
-        </p:nvSpPr>
-        <p:spPr>
-          <a:xfrm>
-            <a:off x="4846320" y="1783080"/>
-            <a:ext cx="3657600" cy="1325880"/>
-          </a:xfrm>
-          <a:prstGeom prst="rect">
-            <a:avLst/>
-          </a:prstGeom>
-          <a:noFill/>
-          <a:ln/>
-        </p:spPr>
-        <p:txBody>
-          <a:bodyPr wrap="square" lIns="0" tIns="0" rIns="0" bIns="0" rtlCol="0" anchor="t"/>
-          <a:lstStyle/>
-          <a:p>
-            <a:pPr indent="0" marL="0">
-              <a:buNone/>
-            </a:pPr>
-            <a:r>
-              <a:rPr lang="en-US" sz="1400" dirty="0">
-                <a:solidFill>
-                  <a:schemeClr val="tx1"/>
-                </a:solidFill>
-              </a:rPr>
-              <a:t>選一個原因：有更重要的安排，或身體不適。火柴立刻收到通知、系統馬上補位。3 天內取消，畫面會提醒也打給火柴。</a:t>
-            </a:r>
-            <a:endParaRPr lang="en-US" sz="1400" dirty="0"/>
-          </a:p>
-        </p:txBody>
-      </p:sp>
-      <p:sp>
-        <p:nvSpPr>
-          <p:cNvPr id="9" name="Text 7"/>
-          <p:cNvSpPr txBox="1"/>
-          <p:nvPr/>
-        </p:nvSpPr>
-        <p:spPr>
-          <a:xfrm>
-            <a:off x="457200" y="3611880"/>
-            <a:ext cx="8229600" cy="365760"/>
-          </a:xfrm>
-          <a:prstGeom prst="rect">
-            <a:avLst/>
-          </a:prstGeom>
-          <a:noFill/>
-          <a:ln/>
-        </p:spPr>
-        <p:txBody>
-          <a:bodyPr wrap="square" lIns="0" tIns="0" rIns="0" bIns="0" rtlCol="0" anchor="ctr"/>
-          <a:lstStyle/>
-          <a:p>
-            <a:pPr indent="0" marL="0">
-              <a:buNone/>
-            </a:pPr>
-            <a:r>
-              <a:rPr lang="en-US" sz="1800" b="1" dirty="0">
-                <a:solidFill>
-                  <a:schemeClr val="accent1"/>
-                </a:solidFill>
-              </a:rPr>
-              <a:t>每一次熄滅，都代表有人替你空出了一天。</a:t>
-            </a:r>
-            <a:endParaRPr lang="en-US" sz="1800" dirty="0"/>
-          </a:p>
-        </p:txBody>
-      </p:sp>
-      <p:sp>
-        <p:nvSpPr>
-          <p:cNvPr id="10" name="Text 8"/>
-          <p:cNvSpPr txBox="1"/>
-          <p:nvPr/>
-        </p:nvSpPr>
-        <p:spPr>
-          <a:xfrm>
-            <a:off x="457200" y="4160520"/>
-            <a:ext cx="8229600" cy="365760"/>
-          </a:xfrm>
-          <a:prstGeom prst="rect">
-            <a:avLst/>
-          </a:prstGeom>
-          <a:noFill/>
-          <a:ln/>
-        </p:spPr>
-        <p:txBody>
-          <a:bodyPr wrap="square" lIns="0" tIns="0" rIns="0" bIns="0" rtlCol="0" anchor="ctr"/>
-          <a:lstStyle/>
-          <a:p>
-            <a:pPr indent="0" marL="0">
-              <a:buNone/>
-            </a:pPr>
-            <a:r>
-              <a:rPr lang="en-US" sz="1400" dirty="0">
-                <a:solidFill>
-                  <a:schemeClr val="tx1"/>
-                </a:solidFill>
-              </a:rPr>
-              <a:t>沒有罰則，靠彼此的判斷與分寸。</a:t>
-            </a:r>
-            <a:endParaRPr lang="en-US" sz="1400" dirty="0"/>
-          </a:p>
-        </p:txBody>
-      </p:sp>
-      <p:sp>
-        <p:nvSpPr>
-          <p:cNvPr id="25" name="Slide Number Placeholder 0"/>
-          <p:cNvSpPr>
-            <a:spLocks noGrp="1"/>
-          </p:cNvSpPr>
-          <p:nvPr>
-            <p:ph type="sldNum" sz="quarter" idx="4294967295"/>
-          </p:nvPr>
-        </p:nvSpPr>
-        <p:spPr>
-          <a:xfrm>
-            <a:off x="8321040" y="4754880"/>
-            <a:ext cx="457200" cy="274320"/>
-          </a:xfrm>
-          <a:prstGeom prst="rect">
-            <a:avLst/>
-          </a:prstGeom>
-          <a:extLst>
-            <a:ext uri="{C572A759-6A51-4108-AA02-DFA0A04FC94B}">
-              <ma14:wrappingTextBoxFlag xmlns:ma14="http://schemas.microsoft.com/office/mac/drawingml/2011/main" val="0"/>
-            </a:ext>
-          </a:extLst>
-        </p:spPr>
-        <p:txBody>
-          <a:bodyPr/>
-          <a:lstStyle>
-            <a:lvl1pPr>
-              <a:defRPr sz="1000">
-                <a:solidFill>
-                  <a:schemeClr val="accent3"/>
-                </a:solidFill>
-              </a:defRPr>
-            </a:lvl1pPr>
-          </a:lstStyle>
-          <a:p>
-            <a:pPr algn="r"/>
-            <a:fld id="{F7021451-1387-4CA6-816F-3879F97B5CBC}" type="slidenum">
-              <a:rPr b="0" lang="en-US"/>
               <a:t>11</a:t>
             </a:fld>
             <a:endParaRPr lang="en-US"/>
@@ -3790,6 +4219,398 @@
                   <a:schemeClr val="tx1"/>
                 </a:solidFill>
               </a:rPr>
+              <a:t>婉拒、取消與信任</a:t>
+            </a:r>
+            <a:endParaRPr lang="en-US" sz="2800" dirty="0"/>
+          </a:p>
+        </p:txBody>
+      </p:sp>
+      <p:sp>
+        <p:nvSpPr>
+          <p:cNvPr id="3" name="card"/>
+          <p:cNvSpPr/>
+          <p:nvPr/>
+        </p:nvSpPr>
+        <p:spPr>
+          <a:xfrm>
+            <a:off x="457200" y="1188720"/>
+            <a:ext cx="4023360" cy="2103120"/>
+          </a:xfrm>
+          <a:prstGeom prst="roundRect">
+            <a:avLst>
+              <a:gd name="adj" fmla="val 4348"/>
+            </a:avLst>
+          </a:prstGeom>
+          <a:solidFill>
+            <a:schemeClr val="bg2"/>
+          </a:solidFill>
+          <a:ln w="12700">
+            <a:solidFill>
+              <a:schemeClr val="bg2"/>
+            </a:solidFill>
+            <a:prstDash val="solid"/>
+          </a:ln>
+          <a:effectLst>
+            <a:outerShdw sx="100000" sy="100000" kx="0" ky="0" algn="bl" rotWithShape="0" blurRad="76200" dist="25400" dir="5400000">
+              <a:srgbClr val="000000">
+                <a:alpha val="12000"/>
+              </a:srgbClr>
+            </a:outerShdw>
+          </a:effectLst>
+        </p:spPr>
+      </p:sp>
+      <p:sp>
+        <p:nvSpPr>
+          <p:cNvPr id="4" name="Text 2"/>
+          <p:cNvSpPr txBox="1"/>
+          <p:nvPr/>
+        </p:nvSpPr>
+        <p:spPr>
+          <a:xfrm>
+            <a:off x="640080" y="1371600"/>
+            <a:ext cx="3657600" cy="365760"/>
+          </a:xfrm>
+          <a:prstGeom prst="rect">
+            <a:avLst/>
+          </a:prstGeom>
+          <a:noFill/>
+          <a:ln/>
+        </p:spPr>
+        <p:txBody>
+          <a:bodyPr wrap="square" lIns="0" tIns="0" rIns="0" bIns="0" rtlCol="0" anchor="t"/>
+          <a:lstStyle/>
+          <a:p>
+            <a:pPr indent="0" marL="0">
+              <a:buNone/>
+            </a:pPr>
+            <a:r>
+              <a:rPr lang="en-US" sz="1600" b="1" dirty="0">
+                <a:solidFill>
+                  <a:schemeClr val="tx1"/>
+                </a:solidFill>
+              </a:rPr>
+              <a:t>婉拒（還沒答應）</a:t>
+            </a:r>
+            <a:endParaRPr lang="en-US" sz="1600" dirty="0"/>
+          </a:p>
+        </p:txBody>
+      </p:sp>
+      <p:sp>
+        <p:nvSpPr>
+          <p:cNvPr id="5" name="Text 3"/>
+          <p:cNvSpPr txBox="1"/>
+          <p:nvPr/>
+        </p:nvSpPr>
+        <p:spPr>
+          <a:xfrm>
+            <a:off x="640080" y="1783080"/>
+            <a:ext cx="3657600" cy="1325880"/>
+          </a:xfrm>
+          <a:prstGeom prst="rect">
+            <a:avLst/>
+          </a:prstGeom>
+          <a:noFill/>
+          <a:ln/>
+        </p:spPr>
+        <p:txBody>
+          <a:bodyPr wrap="square" lIns="0" tIns="0" rIns="0" bIns="0" rtlCol="0" anchor="t"/>
+          <a:lstStyle/>
+          <a:p>
+            <a:pPr indent="0" marL="0">
+              <a:buNone/>
+            </a:pPr>
+            <a:r>
+              <a:rPr lang="en-US" sz="1400" dirty="0">
+                <a:solidFill>
+                  <a:schemeClr val="tx1"/>
+                </a:solidFill>
+              </a:rPr>
+              <a:t>不用理由，不欠任何人解釋。系統自動邀下一位。</a:t>
+            </a:r>
+            <a:endParaRPr lang="en-US" sz="1400" dirty="0"/>
+          </a:p>
+        </p:txBody>
+      </p:sp>
+      <p:sp>
+        <p:nvSpPr>
+          <p:cNvPr id="6" name="card"/>
+          <p:cNvSpPr/>
+          <p:nvPr/>
+        </p:nvSpPr>
+        <p:spPr>
+          <a:xfrm>
+            <a:off x="4663440" y="1188720"/>
+            <a:ext cx="4023360" cy="2103120"/>
+          </a:xfrm>
+          <a:prstGeom prst="roundRect">
+            <a:avLst>
+              <a:gd name="adj" fmla="val 4348"/>
+            </a:avLst>
+          </a:prstGeom>
+          <a:solidFill>
+            <a:schemeClr val="accent2"/>
+          </a:solidFill>
+          <a:ln w="12700">
+            <a:solidFill>
+              <a:schemeClr val="accent2"/>
+            </a:solidFill>
+            <a:prstDash val="solid"/>
+          </a:ln>
+          <a:effectLst>
+            <a:outerShdw sx="100000" sy="100000" kx="0" ky="0" algn="bl" rotWithShape="0" blurRad="76200" dist="25400" dir="5400000">
+              <a:srgbClr val="000000">
+                <a:alpha val="12000"/>
+              </a:srgbClr>
+            </a:outerShdw>
+          </a:effectLst>
+        </p:spPr>
+      </p:sp>
+      <p:sp>
+        <p:nvSpPr>
+          <p:cNvPr id="7" name="Text 5"/>
+          <p:cNvSpPr txBox="1"/>
+          <p:nvPr/>
+        </p:nvSpPr>
+        <p:spPr>
+          <a:xfrm>
+            <a:off x="4846320" y="1371600"/>
+            <a:ext cx="3657600" cy="365760"/>
+          </a:xfrm>
+          <a:prstGeom prst="rect">
+            <a:avLst/>
+          </a:prstGeom>
+          <a:noFill/>
+          <a:ln/>
+        </p:spPr>
+        <p:txBody>
+          <a:bodyPr wrap="square" lIns="0" tIns="0" rIns="0" bIns="0" rtlCol="0" anchor="t"/>
+          <a:lstStyle/>
+          <a:p>
+            <a:pPr indent="0" marL="0">
+              <a:buNone/>
+            </a:pPr>
+            <a:r>
+              <a:rPr lang="en-US" sz="1600" b="1" dirty="0">
+                <a:solidFill>
+                  <a:schemeClr val="tx1"/>
+                </a:solidFill>
+              </a:rPr>
+              <a:t>取消（答應後反悔）</a:t>
+            </a:r>
+            <a:endParaRPr lang="en-US" sz="1600" dirty="0"/>
+          </a:p>
+        </p:txBody>
+      </p:sp>
+      <p:sp>
+        <p:nvSpPr>
+          <p:cNvPr id="8" name="Text 6"/>
+          <p:cNvSpPr txBox="1"/>
+          <p:nvPr/>
+        </p:nvSpPr>
+        <p:spPr>
+          <a:xfrm>
+            <a:off x="4846320" y="1783080"/>
+            <a:ext cx="3657600" cy="1325880"/>
+          </a:xfrm>
+          <a:prstGeom prst="rect">
+            <a:avLst/>
+          </a:prstGeom>
+          <a:noFill/>
+          <a:ln/>
+        </p:spPr>
+        <p:txBody>
+          <a:bodyPr wrap="square" lIns="0" tIns="0" rIns="0" bIns="0" rtlCol="0" anchor="t"/>
+          <a:lstStyle/>
+          <a:p>
+            <a:pPr indent="0" marL="0">
+              <a:buNone/>
+            </a:pPr>
+            <a:r>
+              <a:rPr lang="en-US" sz="1400" dirty="0">
+                <a:solidFill>
+                  <a:schemeClr val="tx1"/>
+                </a:solidFill>
+              </a:rPr>
+              <a:t>選一個原因：有更重要的安排，或身體不適。火柴立刻收到通知、系統馬上補位。3 天內取消，畫面會提醒也打給火柴。</a:t>
+            </a:r>
+            <a:endParaRPr lang="en-US" sz="1400" dirty="0"/>
+          </a:p>
+        </p:txBody>
+      </p:sp>
+      <p:sp>
+        <p:nvSpPr>
+          <p:cNvPr id="9" name="Text 7"/>
+          <p:cNvSpPr txBox="1"/>
+          <p:nvPr/>
+        </p:nvSpPr>
+        <p:spPr>
+          <a:xfrm>
+            <a:off x="457200" y="3611880"/>
+            <a:ext cx="8229600" cy="365760"/>
+          </a:xfrm>
+          <a:prstGeom prst="rect">
+            <a:avLst/>
+          </a:prstGeom>
+          <a:noFill/>
+          <a:ln/>
+        </p:spPr>
+        <p:txBody>
+          <a:bodyPr wrap="square" lIns="0" tIns="0" rIns="0" bIns="0" rtlCol="0" anchor="ctr"/>
+          <a:lstStyle/>
+          <a:p>
+            <a:pPr indent="0" marL="0">
+              <a:buNone/>
+            </a:pPr>
+            <a:r>
+              <a:rPr lang="en-US" sz="1800" b="1" dirty="0">
+                <a:solidFill>
+                  <a:schemeClr val="accent1"/>
+                </a:solidFill>
+              </a:rPr>
+              <a:t>每一次熄滅，都代表有人替你空出了一天。</a:t>
+            </a:r>
+            <a:endParaRPr lang="en-US" sz="1800" dirty="0"/>
+          </a:p>
+        </p:txBody>
+      </p:sp>
+      <p:sp>
+        <p:nvSpPr>
+          <p:cNvPr id="10" name="Text 8"/>
+          <p:cNvSpPr txBox="1"/>
+          <p:nvPr/>
+        </p:nvSpPr>
+        <p:spPr>
+          <a:xfrm>
+            <a:off x="457200" y="4160520"/>
+            <a:ext cx="8229600" cy="365760"/>
+          </a:xfrm>
+          <a:prstGeom prst="rect">
+            <a:avLst/>
+          </a:prstGeom>
+          <a:noFill/>
+          <a:ln/>
+        </p:spPr>
+        <p:txBody>
+          <a:bodyPr wrap="square" lIns="0" tIns="0" rIns="0" bIns="0" rtlCol="0" anchor="ctr"/>
+          <a:lstStyle/>
+          <a:p>
+            <a:pPr indent="0" marL="0">
+              <a:buNone/>
+            </a:pPr>
+            <a:r>
+              <a:rPr lang="en-US" sz="1400" dirty="0">
+                <a:solidFill>
+                  <a:schemeClr val="tx1"/>
+                </a:solidFill>
+              </a:rPr>
+              <a:t>沒有罰則，靠彼此的判斷與分寸。</a:t>
+            </a:r>
+            <a:endParaRPr lang="en-US" sz="1400" dirty="0"/>
+          </a:p>
+        </p:txBody>
+      </p:sp>
+      <p:sp>
+        <p:nvSpPr>
+          <p:cNvPr id="25" name="Slide Number Placeholder 0"/>
+          <p:cNvSpPr>
+            <a:spLocks noGrp="1"/>
+          </p:cNvSpPr>
+          <p:nvPr>
+            <p:ph type="sldNum" sz="quarter" idx="4294967295"/>
+          </p:nvPr>
+        </p:nvSpPr>
+        <p:spPr>
+          <a:xfrm>
+            <a:off x="8321040" y="4754880"/>
+            <a:ext cx="457200" cy="274320"/>
+          </a:xfrm>
+          <a:prstGeom prst="rect">
+            <a:avLst/>
+          </a:prstGeom>
+          <a:extLst>
+            <a:ext uri="{C572A759-6A51-4108-AA02-DFA0A04FC94B}">
+              <ma14:wrappingTextBoxFlag xmlns:ma14="http://schemas.microsoft.com/office/mac/drawingml/2011/main" val="0"/>
+            </a:ext>
+          </a:extLst>
+        </p:spPr>
+        <p:txBody>
+          <a:bodyPr/>
+          <a:lstStyle>
+            <a:lvl1pPr>
+              <a:defRPr sz="1000">
+                <a:solidFill>
+                  <a:schemeClr val="accent3"/>
+                </a:solidFill>
+              </a:defRPr>
+            </a:lvl1pPr>
+          </a:lstStyle>
+          <a:p>
+            <a:pPr algn="r"/>
+            <a:fld id="{F7021451-1387-4CA6-816F-3879F97B5CBC}" type="slidenum">
+              <a:rPr b="0" lang="en-US"/>
+              <a:t>12</a:t>
+            </a:fld>
+            <a:endParaRPr lang="en-US"/>
+          </a:p>
+        </p:txBody>
+      </p:sp>
+    </p:spTree>
+  </p:cSld>
+  <p:clrMapOvr>
+    <a:masterClrMapping/>
+  </p:clrMapOvr>
+</p:sld>
+</file>
+
+<file path=ppt/slides/slide13.xml><?xml version="1.0" encoding="utf-8"?>
+<p:sld xmlns:a="http://schemas.openxmlformats.org/drawingml/2006/main" xmlns:r="http://schemas.openxmlformats.org/officeDocument/2006/relationships" xmlns:p="http://schemas.openxmlformats.org/presentationml/2006/main">
+  <p:cSld name="Slide 13">
+    <p:spTree>
+      <p:nvGrpSpPr>
+        <p:cNvPr id="1" name=""/>
+        <p:cNvGrpSpPr/>
+        <p:nvPr/>
+      </p:nvGrpSpPr>
+      <p:grpSpPr>
+        <a:xfrm>
+          <a:off x="0" y="0"/>
+          <a:ext cx="0" cy="0"/>
+          <a:chOff x="0" y="0"/>
+          <a:chExt cx="0" cy="0"/>
+        </a:xfrm>
+      </p:grpSpPr>
+      <p:sp>
+        <p:nvSpPr>
+          <p:cNvPr id="2" name="Text 0"/>
+          <p:cNvSpPr/>
+          <p:nvPr>
+            <p:ph idx="100" type="title" hasCustomPrompt="1"/>
+          </p:nvPr>
+        </p:nvSpPr>
+        <p:spPr>
+          <a:xfrm>
+            <a:off x="457200" y="274320"/>
+            <a:ext cx="8229600" cy="731520"/>
+          </a:xfrm>
+          <a:prstGeom prst="rect">
+            <a:avLst/>
+          </a:prstGeom>
+          <a:noFill/>
+          <a:ln/>
+        </p:spPr>
+        <p:txBody>
+          <a:bodyPr wrap="square" lIns="0" tIns="0" rIns="0" bIns="0" rtlCol="0" anchor="ctr"/>
+          <a:lstStyle/>
+          <a:p>
+            <a:pPr algn="l" indent="0" marL="0">
+              <a:buNone/>
+            </a:pPr>
+            <a:r>
+              <a:rPr lang="en-US" sz="2800" b="1" dirty="0">
+                <a:solidFill>
+                  <a:schemeClr val="tx1"/>
+                </a:solidFill>
+              </a:rPr>
               <a:t>誰看得到什麼</a:t>
             </a:r>
             <a:endParaRPr lang="en-US" sz="2800" dirty="0"/>
@@ -3798,7 +4619,7 @@
       </p:sp>
       <p:graphicFrame>
         <p:nvGraphicFramePr>
-          <p:cNvPr id="13" name="Table 0"/>
+          <p:cNvPr id="14" name="Table 0"/>
           <p:cNvGraphicFramePr>
             <a:graphicFrameLocks noGrp="1"/>
           </p:cNvGraphicFramePr>
@@ -4609,579 +5430,6 @@
             <a:pPr algn="r"/>
             <a:fld id="{F7021451-1387-4CA6-816F-3879F97B5CBC}" type="slidenum">
               <a:rPr b="0" lang="en-US"/>
-              <a:t>12</a:t>
-            </a:fld>
-            <a:endParaRPr lang="en-US"/>
-          </a:p>
-        </p:txBody>
-      </p:sp>
-    </p:spTree>
-  </p:cSld>
-  <p:clrMapOvr>
-    <a:masterClrMapping/>
-  </p:clrMapOvr>
-</p:sld>
-</file>
-
-<file path=ppt/slides/slide13.xml><?xml version="1.0" encoding="utf-8"?>
-<p:sld xmlns:a="http://schemas.openxmlformats.org/drawingml/2006/main" xmlns:r="http://schemas.openxmlformats.org/officeDocument/2006/relationships" xmlns:p="http://schemas.openxmlformats.org/presentationml/2006/main">
-  <p:cSld name="Slide 13">
-    <p:spTree>
-      <p:nvGrpSpPr>
-        <p:cNvPr id="1" name=""/>
-        <p:cNvGrpSpPr/>
-        <p:nvPr/>
-      </p:nvGrpSpPr>
-      <p:grpSpPr>
-        <a:xfrm>
-          <a:off x="0" y="0"/>
-          <a:ext cx="0" cy="0"/>
-          <a:chOff x="0" y="0"/>
-          <a:chExt cx="0" cy="0"/>
-        </a:xfrm>
-      </p:grpSpPr>
-      <p:sp>
-        <p:nvSpPr>
-          <p:cNvPr id="2" name="Text 0"/>
-          <p:cNvSpPr/>
-          <p:nvPr>
-            <p:ph idx="100" type="title" hasCustomPrompt="1"/>
-          </p:nvPr>
-        </p:nvSpPr>
-        <p:spPr>
-          <a:xfrm>
-            <a:off x="457200" y="274320"/>
-            <a:ext cx="8229600" cy="731520"/>
-          </a:xfrm>
-          <a:prstGeom prst="rect">
-            <a:avLst/>
-          </a:prstGeom>
-          <a:noFill/>
-          <a:ln/>
-        </p:spPr>
-        <p:txBody>
-          <a:bodyPr wrap="square" lIns="0" tIns="0" rIns="0" bIns="0" rtlCol="0" anchor="ctr"/>
-          <a:lstStyle/>
-          <a:p>
-            <a:pPr algn="l" indent="0" marL="0">
-              <a:buNone/>
-            </a:pPr>
-            <a:r>
-              <a:rPr lang="en-US" sz="2800" b="1" dirty="0">
-                <a:solidFill>
-                  <a:schemeClr val="tx1"/>
-                </a:solidFill>
-              </a:rPr>
-              <a:t>LINE 的限制，先知道</a:t>
-            </a:r>
-            <a:endParaRPr lang="en-US" sz="2800" dirty="0"/>
-          </a:p>
-        </p:txBody>
-      </p:sp>
-      <p:sp>
-        <p:nvSpPr>
-          <p:cNvPr id="3" name="card"/>
-          <p:cNvSpPr/>
-          <p:nvPr/>
-        </p:nvSpPr>
-        <p:spPr>
-          <a:xfrm>
-            <a:off x="457200" y="1280160"/>
-            <a:ext cx="2560320" cy="2651760"/>
-          </a:xfrm>
-          <a:prstGeom prst="roundRect">
-            <a:avLst>
-              <a:gd name="adj" fmla="val 3571"/>
-            </a:avLst>
-          </a:prstGeom>
-          <a:solidFill>
-            <a:schemeClr val="bg2"/>
-          </a:solidFill>
-          <a:ln w="12700">
-            <a:solidFill>
-              <a:schemeClr val="bg2"/>
-            </a:solidFill>
-            <a:prstDash val="solid"/>
-          </a:ln>
-          <a:effectLst>
-            <a:outerShdw sx="100000" sy="100000" kx="0" ky="0" algn="bl" rotWithShape="0" blurRad="76200" dist="25400" dir="5400000">
-              <a:srgbClr val="000000">
-                <a:alpha val="12000"/>
-              </a:srgbClr>
-            </a:outerShdw>
-          </a:effectLst>
-        </p:spPr>
-      </p:sp>
-      <p:sp>
-        <p:nvSpPr>
-          <p:cNvPr id="4" name="icon-circle"/>
-          <p:cNvSpPr/>
-          <p:nvPr/>
-        </p:nvSpPr>
-        <p:spPr>
-          <a:xfrm>
-            <a:off x="640080" y="1463040"/>
-            <a:ext cx="502920" cy="502920"/>
-          </a:xfrm>
-          <a:prstGeom prst="ellipse">
-            <a:avLst/>
-          </a:prstGeom>
-          <a:solidFill>
-            <a:schemeClr val="accent1"/>
-          </a:solidFill>
-          <a:ln w="12700">
-            <a:solidFill>
-              <a:schemeClr val="accent1"/>
-            </a:solidFill>
-            <a:prstDash val="solid"/>
-          </a:ln>
-        </p:spPr>
-      </p:sp>
-      <p:pic>
-        <p:nvPicPr>
-          <p:cNvPr id="5" name="icon" descr="preencoded.png">    </p:cNvPr>
-          <p:cNvPicPr>
-            <a:picLocks noChangeAspect="1"/>
-          </p:cNvPicPr>
-          <p:nvPr/>
-        </p:nvPicPr>
-        <p:blipFill>
-          <a:blip r:embed="rId1"/>
-          <a:stretch>
-            <a:fillRect/>
-          </a:stretch>
-        </p:blipFill>
-        <p:spPr>
-          <a:xfrm>
-            <a:off x="768096" y="1591056"/>
-            <a:ext cx="246888" cy="246888"/>
-          </a:xfrm>
-          <a:prstGeom prst="rect">
-            <a:avLst/>
-          </a:prstGeom>
-        </p:spPr>
-      </p:pic>
-      <p:sp>
-        <p:nvSpPr>
-          <p:cNvPr id="6" name="Text 3"/>
-          <p:cNvSpPr txBox="1"/>
-          <p:nvPr/>
-        </p:nvSpPr>
-        <p:spPr>
-          <a:xfrm>
-            <a:off x="640080" y="2103120"/>
-            <a:ext cx="2194560" cy="548640"/>
-          </a:xfrm>
-          <a:prstGeom prst="rect">
-            <a:avLst/>
-          </a:prstGeom>
-          <a:noFill/>
-          <a:ln/>
-        </p:spPr>
-        <p:txBody>
-          <a:bodyPr wrap="square" lIns="0" tIns="0" rIns="0" bIns="0" rtlCol="0" anchor="t"/>
-          <a:lstStyle/>
-          <a:p>
-            <a:pPr indent="0" marL="0">
-              <a:buNone/>
-            </a:pPr>
-            <a:r>
-              <a:rPr lang="en-US" sz="1600" b="1" dirty="0">
-                <a:solidFill>
-                  <a:schemeClr val="tx1"/>
-                </a:solidFill>
-              </a:rPr>
-              <a:t>布達訊息</a:t>
-            </a:r>
-            <a:endParaRPr lang="en-US" sz="1600" dirty="0"/>
-          </a:p>
-        </p:txBody>
-      </p:sp>
-      <p:sp>
-        <p:nvSpPr>
-          <p:cNvPr id="7" name="Text 4"/>
-          <p:cNvSpPr txBox="1"/>
-          <p:nvPr/>
-        </p:nvSpPr>
-        <p:spPr>
-          <a:xfrm>
-            <a:off x="640080" y="2697480"/>
-            <a:ext cx="2194560" cy="1051560"/>
-          </a:xfrm>
-          <a:prstGeom prst="rect">
-            <a:avLst/>
-          </a:prstGeom>
-          <a:noFill/>
-          <a:ln/>
-        </p:spPr>
-        <p:txBody>
-          <a:bodyPr wrap="square" lIns="0" tIns="0" rIns="0" bIns="0" rtlCol="0" anchor="t"/>
-          <a:lstStyle/>
-          <a:p>
-            <a:pPr indent="0" marL="0">
-              <a:buNone/>
-            </a:pPr>
-            <a:r>
-              <a:rPr lang="en-US" sz="1400" dirty="0">
-                <a:solidFill>
-                  <a:schemeClr val="tx1"/>
-                </a:solidFill>
-              </a:rPr>
-              <a:t>先自己建 LINE 群組，再按「分享布達訊息」選群組傳送。LINE 不允許 App 自動建群。</a:t>
-            </a:r>
-            <a:endParaRPr lang="en-US" sz="1400" dirty="0"/>
-          </a:p>
-        </p:txBody>
-      </p:sp>
-      <p:sp>
-        <p:nvSpPr>
-          <p:cNvPr id="8" name="card"/>
-          <p:cNvSpPr/>
-          <p:nvPr/>
-        </p:nvSpPr>
-        <p:spPr>
-          <a:xfrm>
-            <a:off x="3291840" y="1280160"/>
-            <a:ext cx="2560320" cy="2651760"/>
-          </a:xfrm>
-          <a:prstGeom prst="roundRect">
-            <a:avLst>
-              <a:gd name="adj" fmla="val 3571"/>
-            </a:avLst>
-          </a:prstGeom>
-          <a:solidFill>
-            <a:schemeClr val="bg2"/>
-          </a:solidFill>
-          <a:ln w="12700">
-            <a:solidFill>
-              <a:schemeClr val="bg2"/>
-            </a:solidFill>
-            <a:prstDash val="solid"/>
-          </a:ln>
-          <a:effectLst>
-            <a:outerShdw sx="100000" sy="100000" kx="0" ky="0" algn="bl" rotWithShape="0" blurRad="76200" dist="25400" dir="5400000">
-              <a:srgbClr val="000000">
-                <a:alpha val="12000"/>
-              </a:srgbClr>
-            </a:outerShdw>
-          </a:effectLst>
-        </p:spPr>
-      </p:sp>
-      <p:sp>
-        <p:nvSpPr>
-          <p:cNvPr id="9" name="icon-circle"/>
-          <p:cNvSpPr/>
-          <p:nvPr/>
-        </p:nvSpPr>
-        <p:spPr>
-          <a:xfrm>
-            <a:off x="3474720" y="1463040"/>
-            <a:ext cx="502920" cy="502920"/>
-          </a:xfrm>
-          <a:prstGeom prst="ellipse">
-            <a:avLst/>
-          </a:prstGeom>
-          <a:solidFill>
-            <a:schemeClr val="accent1"/>
-          </a:solidFill>
-          <a:ln w="12700">
-            <a:solidFill>
-              <a:schemeClr val="accent1"/>
-            </a:solidFill>
-            <a:prstDash val="solid"/>
-          </a:ln>
-        </p:spPr>
-      </p:sp>
-      <p:pic>
-        <p:nvPicPr>
-          <p:cNvPr id="10" name="icon" descr="preencoded.png">    </p:cNvPr>
-          <p:cNvPicPr>
-            <a:picLocks noChangeAspect="1"/>
-          </p:cNvPicPr>
-          <p:nvPr/>
-        </p:nvPicPr>
-        <p:blipFill>
-          <a:blip r:embed="rId2"/>
-          <a:stretch>
-            <a:fillRect/>
-          </a:stretch>
-        </p:blipFill>
-        <p:spPr>
-          <a:xfrm>
-            <a:off x="3602736" y="1591056"/>
-            <a:ext cx="246888" cy="246888"/>
-          </a:xfrm>
-          <a:prstGeom prst="rect">
-            <a:avLst/>
-          </a:prstGeom>
-        </p:spPr>
-      </p:pic>
-      <p:sp>
-        <p:nvSpPr>
-          <p:cNvPr id="11" name="Text 7"/>
-          <p:cNvSpPr txBox="1"/>
-          <p:nvPr/>
-        </p:nvSpPr>
-        <p:spPr>
-          <a:xfrm>
-            <a:off x="3474720" y="2103120"/>
-            <a:ext cx="2194560" cy="548640"/>
-          </a:xfrm>
-          <a:prstGeom prst="rect">
-            <a:avLst/>
-          </a:prstGeom>
-          <a:noFill/>
-          <a:ln/>
-        </p:spPr>
-        <p:txBody>
-          <a:bodyPr wrap="square" lIns="0" tIns="0" rIns="0" bIns="0" rtlCol="0" anchor="t"/>
-          <a:lstStyle/>
-          <a:p>
-            <a:pPr indent="0" marL="0">
-              <a:buNone/>
-            </a:pPr>
-            <a:r>
-              <a:rPr lang="en-US" sz="1600" b="1" dirty="0">
-                <a:solidFill>
-                  <a:schemeClr val="tx1"/>
-                </a:solidFill>
-              </a:rPr>
-              <a:t>只有三種走 LINE</a:t>
-            </a:r>
-            <a:endParaRPr lang="en-US" sz="1600" dirty="0"/>
-          </a:p>
-        </p:txBody>
-      </p:sp>
-      <p:sp>
-        <p:nvSpPr>
-          <p:cNvPr id="12" name="Text 8"/>
-          <p:cNvSpPr txBox="1"/>
-          <p:nvPr/>
-        </p:nvSpPr>
-        <p:spPr>
-          <a:xfrm>
-            <a:off x="3474720" y="2697480"/>
-            <a:ext cx="2194560" cy="1051560"/>
-          </a:xfrm>
-          <a:prstGeom prst="rect">
-            <a:avLst/>
-          </a:prstGeom>
-          <a:noFill/>
-          <a:ln/>
-        </p:spPr>
-        <p:txBody>
-          <a:bodyPr wrap="square" lIns="0" tIns="0" rIns="0" bIns="0" rtlCol="0" anchor="t"/>
-          <a:lstStyle/>
-          <a:p>
-            <a:pPr indent="0" marL="0">
-              <a:buNone/>
-            </a:pPr>
-            <a:r>
-              <a:rPr lang="en-US" sz="1400" dirty="0">
-                <a:solidFill>
-                  <a:schemeClr val="tx1"/>
-                </a:solidFill>
-              </a:rPr>
-              <a:t>邀請、時間變更、缺人提醒。其他通知在 App 的鈴鐺。免費方案每月 200 則。</a:t>
-            </a:r>
-            <a:endParaRPr lang="en-US" sz="1400" dirty="0"/>
-          </a:p>
-        </p:txBody>
-      </p:sp>
-      <p:sp>
-        <p:nvSpPr>
-          <p:cNvPr id="13" name="card"/>
-          <p:cNvSpPr/>
-          <p:nvPr/>
-        </p:nvSpPr>
-        <p:spPr>
-          <a:xfrm>
-            <a:off x="6126480" y="1280160"/>
-            <a:ext cx="2560320" cy="2651760"/>
-          </a:xfrm>
-          <a:prstGeom prst="roundRect">
-            <a:avLst>
-              <a:gd name="adj" fmla="val 3571"/>
-            </a:avLst>
-          </a:prstGeom>
-          <a:solidFill>
-            <a:schemeClr val="bg2"/>
-          </a:solidFill>
-          <a:ln w="12700">
-            <a:solidFill>
-              <a:schemeClr val="bg2"/>
-            </a:solidFill>
-            <a:prstDash val="solid"/>
-          </a:ln>
-          <a:effectLst>
-            <a:outerShdw sx="100000" sy="100000" kx="0" ky="0" algn="bl" rotWithShape="0" blurRad="76200" dist="25400" dir="5400000">
-              <a:srgbClr val="000000">
-                <a:alpha val="12000"/>
-              </a:srgbClr>
-            </a:outerShdw>
-          </a:effectLst>
-        </p:spPr>
-      </p:sp>
-      <p:sp>
-        <p:nvSpPr>
-          <p:cNvPr id="14" name="icon-circle"/>
-          <p:cNvSpPr/>
-          <p:nvPr/>
-        </p:nvSpPr>
-        <p:spPr>
-          <a:xfrm>
-            <a:off x="6309360" y="1463040"/>
-            <a:ext cx="502920" cy="502920"/>
-          </a:xfrm>
-          <a:prstGeom prst="ellipse">
-            <a:avLst/>
-          </a:prstGeom>
-          <a:solidFill>
-            <a:schemeClr val="accent1"/>
-          </a:solidFill>
-          <a:ln w="12700">
-            <a:solidFill>
-              <a:schemeClr val="accent1"/>
-            </a:solidFill>
-            <a:prstDash val="solid"/>
-          </a:ln>
-        </p:spPr>
-      </p:sp>
-      <p:pic>
-        <p:nvPicPr>
-          <p:cNvPr id="15" name="icon" descr="preencoded.png">    </p:cNvPr>
-          <p:cNvPicPr>
-            <a:picLocks noChangeAspect="1"/>
-          </p:cNvPicPr>
-          <p:nvPr/>
-        </p:nvPicPr>
-        <p:blipFill>
-          <a:blip r:embed="rId3"/>
-          <a:stretch>
-            <a:fillRect/>
-          </a:stretch>
-        </p:blipFill>
-        <p:spPr>
-          <a:xfrm>
-            <a:off x="6437376" y="1591056"/>
-            <a:ext cx="246888" cy="246888"/>
-          </a:xfrm>
-          <a:prstGeom prst="rect">
-            <a:avLst/>
-          </a:prstGeom>
-        </p:spPr>
-      </p:pic>
-      <p:sp>
-        <p:nvSpPr>
-          <p:cNvPr id="16" name="Text 11"/>
-          <p:cNvSpPr txBox="1"/>
-          <p:nvPr/>
-        </p:nvSpPr>
-        <p:spPr>
-          <a:xfrm>
-            <a:off x="6309360" y="2103120"/>
-            <a:ext cx="2194560" cy="548640"/>
-          </a:xfrm>
-          <a:prstGeom prst="rect">
-            <a:avLst/>
-          </a:prstGeom>
-          <a:noFill/>
-          <a:ln/>
-        </p:spPr>
-        <p:txBody>
-          <a:bodyPr wrap="square" lIns="0" tIns="0" rIns="0" bIns="0" rtlCol="0" anchor="t"/>
-          <a:lstStyle/>
-          <a:p>
-            <a:pPr indent="0" marL="0">
-              <a:buNone/>
-            </a:pPr>
-            <a:r>
-              <a:rPr lang="en-US" sz="1600" b="1" dirty="0">
-                <a:solidFill>
-                  <a:schemeClr val="tx1"/>
-                </a:solidFill>
-              </a:rPr>
-              <a:t>收不到通知時</a:t>
-            </a:r>
-            <a:endParaRPr lang="en-US" sz="1600" dirty="0"/>
-          </a:p>
-        </p:txBody>
-      </p:sp>
-      <p:sp>
-        <p:nvSpPr>
-          <p:cNvPr id="17" name="Text 12"/>
-          <p:cNvSpPr txBox="1"/>
-          <p:nvPr/>
-        </p:nvSpPr>
-        <p:spPr>
-          <a:xfrm>
-            <a:off x="6309360" y="2697480"/>
-            <a:ext cx="2194560" cy="1051560"/>
-          </a:xfrm>
-          <a:prstGeom prst="rect">
-            <a:avLst/>
-          </a:prstGeom>
-          <a:noFill/>
-          <a:ln/>
-        </p:spPr>
-        <p:txBody>
-          <a:bodyPr wrap="square" lIns="0" tIns="0" rIns="0" bIns="0" rtlCol="0" anchor="t"/>
-          <a:lstStyle/>
-          <a:p>
-            <a:pPr indent="0" marL="0">
-              <a:buNone/>
-            </a:pPr>
-            <a:r>
-              <a:rPr lang="en-US" sz="1400" dirty="0">
-                <a:solidFill>
-                  <a:schemeClr val="tx1"/>
-                </a:solidFill>
-              </a:rPr>
-              <a:t>對方封鎖了官方帳號，火柴會被提醒「請直接聯絡」。急件一次邀全部會用較多則數。</a:t>
-            </a:r>
-            <a:endParaRPr lang="en-US" sz="1400" dirty="0"/>
-          </a:p>
-        </p:txBody>
-      </p:sp>
-      <p:sp>
-        <p:nvSpPr>
-          <p:cNvPr id="25" name="Slide Number Placeholder 0"/>
-          <p:cNvSpPr>
-            <a:spLocks noGrp="1"/>
-          </p:cNvSpPr>
-          <p:nvPr>
-            <p:ph type="sldNum" sz="quarter" idx="4294967295"/>
-          </p:nvPr>
-        </p:nvSpPr>
-        <p:spPr>
-          <a:xfrm>
-            <a:off x="8321040" y="4754880"/>
-            <a:ext cx="457200" cy="274320"/>
-          </a:xfrm>
-          <a:prstGeom prst="rect">
-            <a:avLst/>
-          </a:prstGeom>
-          <a:extLst>
-            <a:ext uri="{C572A759-6A51-4108-AA02-DFA0A04FC94B}">
-              <ma14:wrappingTextBoxFlag xmlns:ma14="http://schemas.microsoft.com/office/mac/drawingml/2011/main" val="0"/>
-            </a:ext>
-          </a:extLst>
-        </p:spPr>
-        <p:txBody>
-          <a:bodyPr/>
-          <a:lstStyle>
-            <a:lvl1pPr>
-              <a:defRPr sz="1000">
-                <a:solidFill>
-                  <a:schemeClr val="accent3"/>
-                </a:solidFill>
-              </a:defRPr>
-            </a:lvl1pPr>
-          </a:lstStyle>
-          <a:p>
-            <a:pPr algn="r"/>
-            <a:fld id="{F7021451-1387-4CA6-816F-3879F97B5CBC}" type="slidenum">
-              <a:rPr b="0" lang="en-US"/>
               <a:t>13</a:t>
             </a:fld>
             <a:endParaRPr lang="en-US"/>
@@ -5215,6 +5463,579 @@
       </p:grpSpPr>
       <p:sp>
         <p:nvSpPr>
+          <p:cNvPr id="2" name="Text 0"/>
+          <p:cNvSpPr/>
+          <p:nvPr>
+            <p:ph idx="100" type="title" hasCustomPrompt="1"/>
+          </p:nvPr>
+        </p:nvSpPr>
+        <p:spPr>
+          <a:xfrm>
+            <a:off x="457200" y="274320"/>
+            <a:ext cx="8229600" cy="731520"/>
+          </a:xfrm>
+          <a:prstGeom prst="rect">
+            <a:avLst/>
+          </a:prstGeom>
+          <a:noFill/>
+          <a:ln/>
+        </p:spPr>
+        <p:txBody>
+          <a:bodyPr wrap="square" lIns="0" tIns="0" rIns="0" bIns="0" rtlCol="0" anchor="ctr"/>
+          <a:lstStyle/>
+          <a:p>
+            <a:pPr algn="l" indent="0" marL="0">
+              <a:buNone/>
+            </a:pPr>
+            <a:r>
+              <a:rPr lang="en-US" sz="2800" b="1" dirty="0">
+                <a:solidFill>
+                  <a:schemeClr val="tx1"/>
+                </a:solidFill>
+              </a:rPr>
+              <a:t>LINE 的限制，先知道</a:t>
+            </a:r>
+            <a:endParaRPr lang="en-US" sz="2800" dirty="0"/>
+          </a:p>
+        </p:txBody>
+      </p:sp>
+      <p:sp>
+        <p:nvSpPr>
+          <p:cNvPr id="3" name="card"/>
+          <p:cNvSpPr/>
+          <p:nvPr/>
+        </p:nvSpPr>
+        <p:spPr>
+          <a:xfrm>
+            <a:off x="457200" y="1280160"/>
+            <a:ext cx="2560320" cy="2651760"/>
+          </a:xfrm>
+          <a:prstGeom prst="roundRect">
+            <a:avLst>
+              <a:gd name="adj" fmla="val 3571"/>
+            </a:avLst>
+          </a:prstGeom>
+          <a:solidFill>
+            <a:schemeClr val="bg2"/>
+          </a:solidFill>
+          <a:ln w="12700">
+            <a:solidFill>
+              <a:schemeClr val="bg2"/>
+            </a:solidFill>
+            <a:prstDash val="solid"/>
+          </a:ln>
+          <a:effectLst>
+            <a:outerShdw sx="100000" sy="100000" kx="0" ky="0" algn="bl" rotWithShape="0" blurRad="76200" dist="25400" dir="5400000">
+              <a:srgbClr val="000000">
+                <a:alpha val="12000"/>
+              </a:srgbClr>
+            </a:outerShdw>
+          </a:effectLst>
+        </p:spPr>
+      </p:sp>
+      <p:sp>
+        <p:nvSpPr>
+          <p:cNvPr id="4" name="icon-circle"/>
+          <p:cNvSpPr/>
+          <p:nvPr/>
+        </p:nvSpPr>
+        <p:spPr>
+          <a:xfrm>
+            <a:off x="640080" y="1463040"/>
+            <a:ext cx="502920" cy="502920"/>
+          </a:xfrm>
+          <a:prstGeom prst="ellipse">
+            <a:avLst/>
+          </a:prstGeom>
+          <a:solidFill>
+            <a:schemeClr val="accent1"/>
+          </a:solidFill>
+          <a:ln w="12700">
+            <a:solidFill>
+              <a:schemeClr val="accent1"/>
+            </a:solidFill>
+            <a:prstDash val="solid"/>
+          </a:ln>
+        </p:spPr>
+      </p:sp>
+      <p:pic>
+        <p:nvPicPr>
+          <p:cNvPr id="5" name="icon" descr="preencoded.png">    </p:cNvPr>
+          <p:cNvPicPr>
+            <a:picLocks noChangeAspect="1"/>
+          </p:cNvPicPr>
+          <p:nvPr/>
+        </p:nvPicPr>
+        <p:blipFill>
+          <a:blip r:embed="rId1"/>
+          <a:stretch>
+            <a:fillRect/>
+          </a:stretch>
+        </p:blipFill>
+        <p:spPr>
+          <a:xfrm>
+            <a:off x="768096" y="1591056"/>
+            <a:ext cx="246888" cy="246888"/>
+          </a:xfrm>
+          <a:prstGeom prst="rect">
+            <a:avLst/>
+          </a:prstGeom>
+        </p:spPr>
+      </p:pic>
+      <p:sp>
+        <p:nvSpPr>
+          <p:cNvPr id="6" name="Text 3"/>
+          <p:cNvSpPr txBox="1"/>
+          <p:nvPr/>
+        </p:nvSpPr>
+        <p:spPr>
+          <a:xfrm>
+            <a:off x="640080" y="2103120"/>
+            <a:ext cx="2194560" cy="548640"/>
+          </a:xfrm>
+          <a:prstGeom prst="rect">
+            <a:avLst/>
+          </a:prstGeom>
+          <a:noFill/>
+          <a:ln/>
+        </p:spPr>
+        <p:txBody>
+          <a:bodyPr wrap="square" lIns="0" tIns="0" rIns="0" bIns="0" rtlCol="0" anchor="t"/>
+          <a:lstStyle/>
+          <a:p>
+            <a:pPr indent="0" marL="0">
+              <a:buNone/>
+            </a:pPr>
+            <a:r>
+              <a:rPr lang="en-US" sz="1600" b="1" dirty="0">
+                <a:solidFill>
+                  <a:schemeClr val="tx1"/>
+                </a:solidFill>
+              </a:rPr>
+              <a:t>布達訊息</a:t>
+            </a:r>
+            <a:endParaRPr lang="en-US" sz="1600" dirty="0"/>
+          </a:p>
+        </p:txBody>
+      </p:sp>
+      <p:sp>
+        <p:nvSpPr>
+          <p:cNvPr id="7" name="Text 4"/>
+          <p:cNvSpPr txBox="1"/>
+          <p:nvPr/>
+        </p:nvSpPr>
+        <p:spPr>
+          <a:xfrm>
+            <a:off x="640080" y="2697480"/>
+            <a:ext cx="2194560" cy="1051560"/>
+          </a:xfrm>
+          <a:prstGeom prst="rect">
+            <a:avLst/>
+          </a:prstGeom>
+          <a:noFill/>
+          <a:ln/>
+        </p:spPr>
+        <p:txBody>
+          <a:bodyPr wrap="square" lIns="0" tIns="0" rIns="0" bIns="0" rtlCol="0" anchor="t"/>
+          <a:lstStyle/>
+          <a:p>
+            <a:pPr indent="0" marL="0">
+              <a:buNone/>
+            </a:pPr>
+            <a:r>
+              <a:rPr lang="en-US" sz="1400" dirty="0">
+                <a:solidFill>
+                  <a:schemeClr val="tx1"/>
+                </a:solidFill>
+              </a:rPr>
+              <a:t>先自己建 LINE 群組，再按「分享布達訊息」選群組傳送。LINE 不允許 App 自動建群。</a:t>
+            </a:r>
+            <a:endParaRPr lang="en-US" sz="1400" dirty="0"/>
+          </a:p>
+        </p:txBody>
+      </p:sp>
+      <p:sp>
+        <p:nvSpPr>
+          <p:cNvPr id="8" name="card"/>
+          <p:cNvSpPr/>
+          <p:nvPr/>
+        </p:nvSpPr>
+        <p:spPr>
+          <a:xfrm>
+            <a:off x="3291840" y="1280160"/>
+            <a:ext cx="2560320" cy="2651760"/>
+          </a:xfrm>
+          <a:prstGeom prst="roundRect">
+            <a:avLst>
+              <a:gd name="adj" fmla="val 3571"/>
+            </a:avLst>
+          </a:prstGeom>
+          <a:solidFill>
+            <a:schemeClr val="bg2"/>
+          </a:solidFill>
+          <a:ln w="12700">
+            <a:solidFill>
+              <a:schemeClr val="bg2"/>
+            </a:solidFill>
+            <a:prstDash val="solid"/>
+          </a:ln>
+          <a:effectLst>
+            <a:outerShdw sx="100000" sy="100000" kx="0" ky="0" algn="bl" rotWithShape="0" blurRad="76200" dist="25400" dir="5400000">
+              <a:srgbClr val="000000">
+                <a:alpha val="12000"/>
+              </a:srgbClr>
+            </a:outerShdw>
+          </a:effectLst>
+        </p:spPr>
+      </p:sp>
+      <p:sp>
+        <p:nvSpPr>
+          <p:cNvPr id="9" name="icon-circle"/>
+          <p:cNvSpPr/>
+          <p:nvPr/>
+        </p:nvSpPr>
+        <p:spPr>
+          <a:xfrm>
+            <a:off x="3474720" y="1463040"/>
+            <a:ext cx="502920" cy="502920"/>
+          </a:xfrm>
+          <a:prstGeom prst="ellipse">
+            <a:avLst/>
+          </a:prstGeom>
+          <a:solidFill>
+            <a:schemeClr val="accent1"/>
+          </a:solidFill>
+          <a:ln w="12700">
+            <a:solidFill>
+              <a:schemeClr val="accent1"/>
+            </a:solidFill>
+            <a:prstDash val="solid"/>
+          </a:ln>
+        </p:spPr>
+      </p:sp>
+      <p:pic>
+        <p:nvPicPr>
+          <p:cNvPr id="10" name="icon" descr="preencoded.png">    </p:cNvPr>
+          <p:cNvPicPr>
+            <a:picLocks noChangeAspect="1"/>
+          </p:cNvPicPr>
+          <p:nvPr/>
+        </p:nvPicPr>
+        <p:blipFill>
+          <a:blip r:embed="rId2"/>
+          <a:stretch>
+            <a:fillRect/>
+          </a:stretch>
+        </p:blipFill>
+        <p:spPr>
+          <a:xfrm>
+            <a:off x="3602736" y="1591056"/>
+            <a:ext cx="246888" cy="246888"/>
+          </a:xfrm>
+          <a:prstGeom prst="rect">
+            <a:avLst/>
+          </a:prstGeom>
+        </p:spPr>
+      </p:pic>
+      <p:sp>
+        <p:nvSpPr>
+          <p:cNvPr id="11" name="Text 7"/>
+          <p:cNvSpPr txBox="1"/>
+          <p:nvPr/>
+        </p:nvSpPr>
+        <p:spPr>
+          <a:xfrm>
+            <a:off x="3474720" y="2103120"/>
+            <a:ext cx="2194560" cy="548640"/>
+          </a:xfrm>
+          <a:prstGeom prst="rect">
+            <a:avLst/>
+          </a:prstGeom>
+          <a:noFill/>
+          <a:ln/>
+        </p:spPr>
+        <p:txBody>
+          <a:bodyPr wrap="square" lIns="0" tIns="0" rIns="0" bIns="0" rtlCol="0" anchor="t"/>
+          <a:lstStyle/>
+          <a:p>
+            <a:pPr indent="0" marL="0">
+              <a:buNone/>
+            </a:pPr>
+            <a:r>
+              <a:rPr lang="en-US" sz="1600" b="1" dirty="0">
+                <a:solidFill>
+                  <a:schemeClr val="tx1"/>
+                </a:solidFill>
+              </a:rPr>
+              <a:t>只有三種走 LINE</a:t>
+            </a:r>
+            <a:endParaRPr lang="en-US" sz="1600" dirty="0"/>
+          </a:p>
+        </p:txBody>
+      </p:sp>
+      <p:sp>
+        <p:nvSpPr>
+          <p:cNvPr id="12" name="Text 8"/>
+          <p:cNvSpPr txBox="1"/>
+          <p:nvPr/>
+        </p:nvSpPr>
+        <p:spPr>
+          <a:xfrm>
+            <a:off x="3474720" y="2697480"/>
+            <a:ext cx="2194560" cy="1051560"/>
+          </a:xfrm>
+          <a:prstGeom prst="rect">
+            <a:avLst/>
+          </a:prstGeom>
+          <a:noFill/>
+          <a:ln/>
+        </p:spPr>
+        <p:txBody>
+          <a:bodyPr wrap="square" lIns="0" tIns="0" rIns="0" bIns="0" rtlCol="0" anchor="t"/>
+          <a:lstStyle/>
+          <a:p>
+            <a:pPr indent="0" marL="0">
+              <a:buNone/>
+            </a:pPr>
+            <a:r>
+              <a:rPr lang="en-US" sz="1400" dirty="0">
+                <a:solidFill>
+                  <a:schemeClr val="tx1"/>
+                </a:solidFill>
+              </a:rPr>
+              <a:t>邀請、時間變更、缺人提醒。其他通知在 App 的鈴鐺。免費方案每月 200 則。</a:t>
+            </a:r>
+            <a:endParaRPr lang="en-US" sz="1400" dirty="0"/>
+          </a:p>
+        </p:txBody>
+      </p:sp>
+      <p:sp>
+        <p:nvSpPr>
+          <p:cNvPr id="13" name="card"/>
+          <p:cNvSpPr/>
+          <p:nvPr/>
+        </p:nvSpPr>
+        <p:spPr>
+          <a:xfrm>
+            <a:off x="6126480" y="1280160"/>
+            <a:ext cx="2560320" cy="2651760"/>
+          </a:xfrm>
+          <a:prstGeom prst="roundRect">
+            <a:avLst>
+              <a:gd name="adj" fmla="val 3571"/>
+            </a:avLst>
+          </a:prstGeom>
+          <a:solidFill>
+            <a:schemeClr val="bg2"/>
+          </a:solidFill>
+          <a:ln w="12700">
+            <a:solidFill>
+              <a:schemeClr val="bg2"/>
+            </a:solidFill>
+            <a:prstDash val="solid"/>
+          </a:ln>
+          <a:effectLst>
+            <a:outerShdw sx="100000" sy="100000" kx="0" ky="0" algn="bl" rotWithShape="0" blurRad="76200" dist="25400" dir="5400000">
+              <a:srgbClr val="000000">
+                <a:alpha val="12000"/>
+              </a:srgbClr>
+            </a:outerShdw>
+          </a:effectLst>
+        </p:spPr>
+      </p:sp>
+      <p:sp>
+        <p:nvSpPr>
+          <p:cNvPr id="14" name="icon-circle"/>
+          <p:cNvSpPr/>
+          <p:nvPr/>
+        </p:nvSpPr>
+        <p:spPr>
+          <a:xfrm>
+            <a:off x="6309360" y="1463040"/>
+            <a:ext cx="502920" cy="502920"/>
+          </a:xfrm>
+          <a:prstGeom prst="ellipse">
+            <a:avLst/>
+          </a:prstGeom>
+          <a:solidFill>
+            <a:schemeClr val="accent1"/>
+          </a:solidFill>
+          <a:ln w="12700">
+            <a:solidFill>
+              <a:schemeClr val="accent1"/>
+            </a:solidFill>
+            <a:prstDash val="solid"/>
+          </a:ln>
+        </p:spPr>
+      </p:sp>
+      <p:pic>
+        <p:nvPicPr>
+          <p:cNvPr id="15" name="icon" descr="preencoded.png">    </p:cNvPr>
+          <p:cNvPicPr>
+            <a:picLocks noChangeAspect="1"/>
+          </p:cNvPicPr>
+          <p:nvPr/>
+        </p:nvPicPr>
+        <p:blipFill>
+          <a:blip r:embed="rId3"/>
+          <a:stretch>
+            <a:fillRect/>
+          </a:stretch>
+        </p:blipFill>
+        <p:spPr>
+          <a:xfrm>
+            <a:off x="6437376" y="1591056"/>
+            <a:ext cx="246888" cy="246888"/>
+          </a:xfrm>
+          <a:prstGeom prst="rect">
+            <a:avLst/>
+          </a:prstGeom>
+        </p:spPr>
+      </p:pic>
+      <p:sp>
+        <p:nvSpPr>
+          <p:cNvPr id="16" name="Text 11"/>
+          <p:cNvSpPr txBox="1"/>
+          <p:nvPr/>
+        </p:nvSpPr>
+        <p:spPr>
+          <a:xfrm>
+            <a:off x="6309360" y="2103120"/>
+            <a:ext cx="2194560" cy="548640"/>
+          </a:xfrm>
+          <a:prstGeom prst="rect">
+            <a:avLst/>
+          </a:prstGeom>
+          <a:noFill/>
+          <a:ln/>
+        </p:spPr>
+        <p:txBody>
+          <a:bodyPr wrap="square" lIns="0" tIns="0" rIns="0" bIns="0" rtlCol="0" anchor="t"/>
+          <a:lstStyle/>
+          <a:p>
+            <a:pPr indent="0" marL="0">
+              <a:buNone/>
+            </a:pPr>
+            <a:r>
+              <a:rPr lang="en-US" sz="1600" b="1" dirty="0">
+                <a:solidFill>
+                  <a:schemeClr val="tx1"/>
+                </a:solidFill>
+              </a:rPr>
+              <a:t>收不到通知時</a:t>
+            </a:r>
+            <a:endParaRPr lang="en-US" sz="1600" dirty="0"/>
+          </a:p>
+        </p:txBody>
+      </p:sp>
+      <p:sp>
+        <p:nvSpPr>
+          <p:cNvPr id="17" name="Text 12"/>
+          <p:cNvSpPr txBox="1"/>
+          <p:nvPr/>
+        </p:nvSpPr>
+        <p:spPr>
+          <a:xfrm>
+            <a:off x="6309360" y="2697480"/>
+            <a:ext cx="2194560" cy="1051560"/>
+          </a:xfrm>
+          <a:prstGeom prst="rect">
+            <a:avLst/>
+          </a:prstGeom>
+          <a:noFill/>
+          <a:ln/>
+        </p:spPr>
+        <p:txBody>
+          <a:bodyPr wrap="square" lIns="0" tIns="0" rIns="0" bIns="0" rtlCol="0" anchor="t"/>
+          <a:lstStyle/>
+          <a:p>
+            <a:pPr indent="0" marL="0">
+              <a:buNone/>
+            </a:pPr>
+            <a:r>
+              <a:rPr lang="en-US" sz="1400" dirty="0">
+                <a:solidFill>
+                  <a:schemeClr val="tx1"/>
+                </a:solidFill>
+              </a:rPr>
+              <a:t>對方封鎖了官方帳號，火柴會被提醒「請直接聯絡」。急件一次邀全部會用較多則數。</a:t>
+            </a:r>
+            <a:endParaRPr lang="en-US" sz="1400" dirty="0"/>
+          </a:p>
+        </p:txBody>
+      </p:sp>
+      <p:sp>
+        <p:nvSpPr>
+          <p:cNvPr id="25" name="Slide Number Placeholder 0"/>
+          <p:cNvSpPr>
+            <a:spLocks noGrp="1"/>
+          </p:cNvSpPr>
+          <p:nvPr>
+            <p:ph type="sldNum" sz="quarter" idx="4294967295"/>
+          </p:nvPr>
+        </p:nvSpPr>
+        <p:spPr>
+          <a:xfrm>
+            <a:off x="8321040" y="4754880"/>
+            <a:ext cx="457200" cy="274320"/>
+          </a:xfrm>
+          <a:prstGeom prst="rect">
+            <a:avLst/>
+          </a:prstGeom>
+          <a:extLst>
+            <a:ext uri="{C572A759-6A51-4108-AA02-DFA0A04FC94B}">
+              <ma14:wrappingTextBoxFlag xmlns:ma14="http://schemas.microsoft.com/office/mac/drawingml/2011/main" val="0"/>
+            </a:ext>
+          </a:extLst>
+        </p:spPr>
+        <p:txBody>
+          <a:bodyPr/>
+          <a:lstStyle>
+            <a:lvl1pPr>
+              <a:defRPr sz="1000">
+                <a:solidFill>
+                  <a:schemeClr val="accent3"/>
+                </a:solidFill>
+              </a:defRPr>
+            </a:lvl1pPr>
+          </a:lstStyle>
+          <a:p>
+            <a:pPr algn="r"/>
+            <a:fld id="{F7021451-1387-4CA6-816F-3879F97B5CBC}" type="slidenum">
+              <a:rPr b="0" lang="en-US"/>
+              <a:t>14</a:t>
+            </a:fld>
+            <a:endParaRPr lang="en-US"/>
+          </a:p>
+        </p:txBody>
+      </p:sp>
+    </p:spTree>
+  </p:cSld>
+  <p:clrMapOvr>
+    <a:masterClrMapping/>
+  </p:clrMapOvr>
+</p:sld>
+</file>
+
+<file path=ppt/slides/slide15.xml><?xml version="1.0" encoding="utf-8"?>
+<p:sld xmlns:a="http://schemas.openxmlformats.org/drawingml/2006/main" xmlns:r="http://schemas.openxmlformats.org/officeDocument/2006/relationships" xmlns:p="http://schemas.openxmlformats.org/presentationml/2006/main">
+  <p:cSld name="Slide 15">
+    <p:spTree>
+      <p:nvGrpSpPr>
+        <p:cNvPr id="1" name=""/>
+        <p:cNvGrpSpPr/>
+        <p:nvPr/>
+      </p:nvGrpSpPr>
+      <p:grpSpPr>
+        <a:xfrm>
+          <a:off x="0" y="0"/>
+          <a:ext cx="0" cy="0"/>
+          <a:chOff x="0" y="0"/>
+          <a:chExt cx="0" cy="0"/>
+        </a:xfrm>
+      </p:grpSpPr>
+      <p:sp>
+        <p:nvSpPr>
           <p:cNvPr id="2" name="flame-circle"/>
           <p:cNvSpPr/>
           <p:nvPr/>
@@ -6475,7 +7296,7 @@
                   <a:schemeClr val="tx1"/>
                 </a:solidFill>
               </a:rPr>
-              <a:t>順位：先邀剛好的人數，其他人不被打擾</a:t>
+              <a:t>情境：副手也可以當主整</a:t>
             </a:r>
             <a:endParaRPr lang="en-US" sz="2800" dirty="0"/>
           </a:p>
@@ -6489,8 +7310,8 @@
         </p:nvSpPr>
         <p:spPr>
           <a:xfrm>
-            <a:off x="457200" y="1097280"/>
-            <a:ext cx="8229600" cy="320040"/>
+            <a:off x="457200" y="1051560"/>
+            <a:ext cx="8229600" cy="548640"/>
           </a:xfrm>
           <a:prstGeom prst="rect">
             <a:avLst/>
@@ -6499,7 +7320,7 @@
           <a:ln/>
         </p:spPr>
         <p:txBody>
-          <a:bodyPr wrap="square" lIns="0" tIns="0" rIns="0" bIns="0" rtlCol="0" anchor="ctr"/>
+          <a:bodyPr wrap="square" lIns="0" tIns="0" rIns="0" bIns="0" rtlCol="0" anchor="t"/>
           <a:lstStyle/>
           <a:p>
             <a:pPr indent="0" marL="0">
@@ -6511,7 +7332,7 @@
                   <a:schemeClr val="accent3"/>
                 </a:solidFill>
               </a:rPr>
-              <a:t>例：需要 2 人，火柴排了 5 位</a:t>
+              <a:t>子柔總是丹哥的副手。有一天她接到大案子，需要很多副手，卻從沒想過邀丹哥。</a:t>
             </a:r>
             <a:endParaRPr lang="en-US" sz="1600" dirty="0"/>
           </a:p>
@@ -6519,14 +7340,14 @@
       </p:sp>
       <p:sp>
         <p:nvSpPr>
-          <p:cNvPr id="4" name="rank-1"/>
+          <p:cNvPr id="4" name="step-1"/>
           <p:cNvSpPr/>
           <p:nvPr/>
         </p:nvSpPr>
         <p:spPr>
           <a:xfrm>
-            <a:off x="731520" y="1600200"/>
-            <a:ext cx="731520" cy="731520"/>
+            <a:off x="457200" y="1783080"/>
+            <a:ext cx="548640" cy="548640"/>
           </a:xfrm>
           <a:prstGeom prst="ellipse">
             <a:avLst/>
@@ -6534,7 +7355,7 @@
           <a:solidFill>
             <a:schemeClr val="accent1"/>
           </a:solidFill>
-          <a:ln w="19050">
+          <a:ln w="12700">
             <a:solidFill>
               <a:schemeClr val="accent1"/>
             </a:solidFill>
@@ -6550,8 +7371,8 @@
         </p:nvSpPr>
         <p:spPr>
           <a:xfrm>
-            <a:off x="731520" y="1600200"/>
-            <a:ext cx="731520" cy="731520"/>
+            <a:off x="457200" y="1783080"/>
+            <a:ext cx="548640" cy="548640"/>
           </a:xfrm>
           <a:prstGeom prst="rect">
             <a:avLst/>
@@ -6567,14 +7388,14 @@
               <a:buNone/>
             </a:pPr>
             <a:r>
-              <a:rPr lang="en-US" sz="2400" b="1" dirty="0">
+              <a:rPr lang="en-US" sz="2000" b="1" dirty="0">
                 <a:solidFill>
                   <a:schemeClr val="bg1"/>
                 </a:solidFill>
               </a:rPr>
               <a:t>1</a:t>
             </a:r>
-            <a:endParaRPr lang="en-US" sz="2400" dirty="0"/>
+            <a:endParaRPr lang="en-US" sz="2000" dirty="0"/>
           </a:p>
         </p:txBody>
       </p:sp>
@@ -6586,8 +7407,8 @@
         </p:nvSpPr>
         <p:spPr>
           <a:xfrm>
-            <a:off x="502920" y="2395728"/>
-            <a:ext cx="1188720" cy="320040"/>
+            <a:off x="457200" y="2468880"/>
+            <a:ext cx="1920240" cy="320040"/>
           </a:xfrm>
           <a:prstGeom prst="rect">
             <a:avLst/>
@@ -6599,16 +7420,52 @@
           <a:bodyPr wrap="square" lIns="0" tIns="0" rIns="0" bIns="0" rtlCol="0" anchor="ctr"/>
           <a:lstStyle/>
           <a:p>
-            <a:pPr algn="ctr" indent="0" marL="0">
+            <a:pPr indent="0" marL="0">
               <a:buNone/>
             </a:pPr>
             <a:r>
-              <a:rPr lang="en-US" sz="1400" b="1" dirty="0">
-                <a:solidFill>
-                  <a:schemeClr val="accent1"/>
+              <a:rPr lang="en-US" sz="1600" b="1" dirty="0">
+                <a:solidFill>
+                  <a:schemeClr val="tx1"/>
                 </a:solidFill>
               </a:rPr>
-              <a:t>先收到邀請</a:t>
+              <a:t>看月曆</a:t>
+            </a:r>
+            <a:endParaRPr lang="en-US" sz="1600" dirty="0"/>
+          </a:p>
+        </p:txBody>
+      </p:sp>
+      <p:sp>
+        <p:nvSpPr>
+          <p:cNvPr id="7" name="Text 5"/>
+          <p:cNvSpPr txBox="1"/>
+          <p:nvPr/>
+        </p:nvSpPr>
+        <p:spPr>
+          <a:xfrm>
+            <a:off x="457200" y="2788920"/>
+            <a:ext cx="1920240" cy="777240"/>
+          </a:xfrm>
+          <a:prstGeom prst="rect">
+            <a:avLst/>
+          </a:prstGeom>
+          <a:noFill/>
+          <a:ln/>
+        </p:spPr>
+        <p:txBody>
+          <a:bodyPr wrap="square" lIns="0" tIns="0" rIns="0" bIns="0" rtlCol="0" anchor="t"/>
+          <a:lstStyle/>
+          <a:p>
+            <a:pPr indent="0" marL="0">
+              <a:buNone/>
+            </a:pPr>
+            <a:r>
+              <a:rPr lang="en-US" sz="1400" dirty="0">
+                <a:solidFill>
+                  <a:schemeClr val="tx1"/>
+                </a:solidFill>
+              </a:rPr>
+              <a:t>那天「還能約」幾位，一眼看到</a:t>
             </a:r>
             <a:endParaRPr lang="en-US" sz="1400" dirty="0"/>
           </a:p>
@@ -6616,14 +7473,14 @@
       </p:sp>
       <p:sp>
         <p:nvSpPr>
-          <p:cNvPr id="7" name="rank-2"/>
+          <p:cNvPr id="8" name="step-2"/>
           <p:cNvSpPr/>
           <p:nvPr/>
         </p:nvSpPr>
         <p:spPr>
           <a:xfrm>
-            <a:off x="2286000" y="1600200"/>
-            <a:ext cx="731520" cy="731520"/>
+            <a:off x="2560320" y="1783080"/>
+            <a:ext cx="548640" cy="548640"/>
           </a:xfrm>
           <a:prstGeom prst="ellipse">
             <a:avLst/>
@@ -6631,7 +7488,7 @@
           <a:solidFill>
             <a:schemeClr val="accent1"/>
           </a:solidFill>
-          <a:ln w="19050">
+          <a:ln w="12700">
             <a:solidFill>
               <a:schemeClr val="accent1"/>
             </a:solidFill>
@@ -6641,14 +7498,14 @@
       </p:sp>
       <p:sp>
         <p:nvSpPr>
-          <p:cNvPr id="8" name="Text 6"/>
+          <p:cNvPr id="9" name="Text 7"/>
           <p:cNvSpPr txBox="1"/>
           <p:nvPr/>
         </p:nvSpPr>
         <p:spPr>
           <a:xfrm>
-            <a:off x="2286000" y="1600200"/>
-            <a:ext cx="731520" cy="731520"/>
+            <a:off x="2560320" y="1783080"/>
+            <a:ext cx="548640" cy="548640"/>
           </a:xfrm>
           <a:prstGeom prst="rect">
             <a:avLst/>
@@ -6664,27 +7521,124 @@
               <a:buNone/>
             </a:pPr>
             <a:r>
-              <a:rPr lang="en-US" sz="2400" b="1" dirty="0">
+              <a:rPr lang="en-US" sz="2000" b="1" dirty="0">
                 <a:solidFill>
                   <a:schemeClr val="bg1"/>
                 </a:solidFill>
               </a:rPr>
               <a:t>2</a:t>
             </a:r>
-            <a:endParaRPr lang="en-US" sz="2400" dirty="0"/>
-          </a:p>
-        </p:txBody>
-      </p:sp>
-      <p:sp>
-        <p:nvSpPr>
-          <p:cNvPr id="9" name="Text 7"/>
+            <a:endParaRPr lang="en-US" sz="2000" dirty="0"/>
+          </a:p>
+        </p:txBody>
+      </p:sp>
+      <p:sp>
+        <p:nvSpPr>
+          <p:cNvPr id="10" name="Text 8"/>
           <p:cNvSpPr txBox="1"/>
           <p:nvPr/>
         </p:nvSpPr>
         <p:spPr>
           <a:xfrm>
-            <a:off x="2057400" y="2395728"/>
-            <a:ext cx="1188720" cy="320040"/>
+            <a:off x="2560320" y="2468880"/>
+            <a:ext cx="1920240" cy="320040"/>
+          </a:xfrm>
+          <a:prstGeom prst="rect">
+            <a:avLst/>
+          </a:prstGeom>
+          <a:noFill/>
+          <a:ln/>
+        </p:spPr>
+        <p:txBody>
+          <a:bodyPr wrap="square" lIns="0" tIns="0" rIns="0" bIns="0" rtlCol="0" anchor="ctr"/>
+          <a:lstStyle/>
+          <a:p>
+            <a:pPr indent="0" marL="0">
+              <a:buNone/>
+            </a:pPr>
+            <a:r>
+              <a:rPr lang="en-US" sz="1600" b="1" dirty="0">
+                <a:solidFill>
+                  <a:schemeClr val="tx1"/>
+                </a:solidFill>
+              </a:rPr>
+              <a:t>點燃，排順位</a:t>
+            </a:r>
+            <a:endParaRPr lang="en-US" sz="1600" dirty="0"/>
+          </a:p>
+        </p:txBody>
+      </p:sp>
+      <p:sp>
+        <p:nvSpPr>
+          <p:cNvPr id="11" name="Text 9"/>
+          <p:cNvSpPr txBox="1"/>
+          <p:nvPr/>
+        </p:nvSpPr>
+        <p:spPr>
+          <a:xfrm>
+            <a:off x="2560320" y="2788920"/>
+            <a:ext cx="1920240" cy="777240"/>
+          </a:xfrm>
+          <a:prstGeom prst="rect">
+            <a:avLst/>
+          </a:prstGeom>
+          <a:noFill/>
+          <a:ln/>
+        </p:spPr>
+        <p:txBody>
+          <a:bodyPr wrap="square" lIns="0" tIns="0" rIns="0" bIns="0" rtlCol="0" anchor="t"/>
+          <a:lstStyle/>
+          <a:p>
+            <a:pPr indent="0" marL="0">
+              <a:buNone/>
+            </a:pPr>
+            <a:r>
+              <a:rPr lang="en-US" sz="1400" dirty="0">
+                <a:solidFill>
+                  <a:schemeClr val="tx1"/>
+                </a:solidFill>
+              </a:rPr>
+              <a:t>把丹哥也排進名單，不用事先設定誰是誰的副手</a:t>
+            </a:r>
+            <a:endParaRPr lang="en-US" sz="1400" dirty="0"/>
+          </a:p>
+        </p:txBody>
+      </p:sp>
+      <p:sp>
+        <p:nvSpPr>
+          <p:cNvPr id="12" name="step-3"/>
+          <p:cNvSpPr/>
+          <p:nvPr/>
+        </p:nvSpPr>
+        <p:spPr>
+          <a:xfrm>
+            <a:off x="4663440" y="1783080"/>
+            <a:ext cx="548640" cy="548640"/>
+          </a:xfrm>
+          <a:prstGeom prst="ellipse">
+            <a:avLst/>
+          </a:prstGeom>
+          <a:solidFill>
+            <a:schemeClr val="accent1"/>
+          </a:solidFill>
+          <a:ln w="12700">
+            <a:solidFill>
+              <a:schemeClr val="accent1"/>
+            </a:solidFill>
+            <a:prstDash val="solid"/>
+          </a:ln>
+        </p:spPr>
+      </p:sp>
+      <p:sp>
+        <p:nvSpPr>
+          <p:cNvPr id="13" name="Text 11"/>
+          <p:cNvSpPr txBox="1"/>
+          <p:nvPr/>
+        </p:nvSpPr>
+        <p:spPr>
+          <a:xfrm>
+            <a:off x="4663440" y="1783080"/>
+            <a:ext cx="548640" cy="548640"/>
           </a:xfrm>
           <a:prstGeom prst="rect">
             <a:avLst/>
@@ -6700,12 +7654,84 @@
               <a:buNone/>
             </a:pPr>
             <a:r>
-              <a:rPr lang="en-US" sz="1400" b="1" dirty="0">
-                <a:solidFill>
-                  <a:schemeClr val="accent1"/>
+              <a:rPr lang="en-US" sz="2000" b="1" dirty="0">
+                <a:solidFill>
+                  <a:schemeClr val="bg1"/>
                 </a:solidFill>
               </a:rPr>
-              <a:t>先收到邀請</a:t>
+              <a:t>3</a:t>
+            </a:r>
+            <a:endParaRPr lang="en-US" sz="2000" dirty="0"/>
+          </a:p>
+        </p:txBody>
+      </p:sp>
+      <p:sp>
+        <p:nvSpPr>
+          <p:cNvPr id="14" name="Text 12"/>
+          <p:cNvSpPr txBox="1"/>
+          <p:nvPr/>
+        </p:nvSpPr>
+        <p:spPr>
+          <a:xfrm>
+            <a:off x="4663440" y="2468880"/>
+            <a:ext cx="1920240" cy="320040"/>
+          </a:xfrm>
+          <a:prstGeom prst="rect">
+            <a:avLst/>
+          </a:prstGeom>
+          <a:noFill/>
+          <a:ln/>
+        </p:spPr>
+        <p:txBody>
+          <a:bodyPr wrap="square" lIns="0" tIns="0" rIns="0" bIns="0" rtlCol="0" anchor="ctr"/>
+          <a:lstStyle/>
+          <a:p>
+            <a:pPr indent="0" marL="0">
+              <a:buNone/>
+            </a:pPr>
+            <a:r>
+              <a:rPr lang="en-US" sz="1600" b="1" dirty="0">
+                <a:solidFill>
+                  <a:schemeClr val="tx1"/>
+                </a:solidFill>
+              </a:rPr>
+              <a:t>丹哥收到邀請</a:t>
+            </a:r>
+            <a:endParaRPr lang="en-US" sz="1600" dirty="0"/>
+          </a:p>
+        </p:txBody>
+      </p:sp>
+      <p:sp>
+        <p:nvSpPr>
+          <p:cNvPr id="15" name="Text 13"/>
+          <p:cNvSpPr txBox="1"/>
+          <p:nvPr/>
+        </p:nvSpPr>
+        <p:spPr>
+          <a:xfrm>
+            <a:off x="4663440" y="2788920"/>
+            <a:ext cx="1920240" cy="777240"/>
+          </a:xfrm>
+          <a:prstGeom prst="rect">
+            <a:avLst/>
+          </a:prstGeom>
+          <a:noFill/>
+          <a:ln/>
+        </p:spPr>
+        <p:txBody>
+          <a:bodyPr wrap="square" lIns="0" tIns="0" rIns="0" bIns="0" rtlCol="0" anchor="t"/>
+          <a:lstStyle/>
+          <a:p>
+            <a:pPr indent="0" marL="0">
+              <a:buNone/>
+            </a:pPr>
+            <a:r>
+              <a:rPr lang="en-US" sz="1400" dirty="0">
+                <a:solidFill>
+                  <a:schemeClr val="tx1"/>
+                </a:solidFill>
+              </a:rPr>
+              <a:t>LINE 邀請，卡片上有日期、時間、區域和時薪</a:t>
             </a:r>
             <a:endParaRPr lang="en-US" sz="1400" dirty="0"/>
           </a:p>
@@ -6713,24 +7739,24 @@
       </p:sp>
       <p:sp>
         <p:nvSpPr>
-          <p:cNvPr id="10" name="rank-3"/>
+          <p:cNvPr id="16" name="step-4"/>
           <p:cNvSpPr/>
           <p:nvPr/>
         </p:nvSpPr>
         <p:spPr>
           <a:xfrm>
-            <a:off x="3840480" y="1600200"/>
-            <a:ext cx="731520" cy="731520"/>
+            <a:off x="6766560" y="1783080"/>
+            <a:ext cx="548640" cy="548640"/>
           </a:xfrm>
           <a:prstGeom prst="ellipse">
             <a:avLst/>
           </a:prstGeom>
           <a:solidFill>
-            <a:schemeClr val="bg2"/>
+            <a:schemeClr val="accent1"/>
           </a:solidFill>
-          <a:ln w="19050">
+          <a:ln w="12700">
             <a:solidFill>
-              <a:schemeClr val="accent3"/>
+              <a:schemeClr val="accent1"/>
             </a:solidFill>
             <a:prstDash val="solid"/>
           </a:ln>
@@ -6738,14 +7764,14 @@
       </p:sp>
       <p:sp>
         <p:nvSpPr>
-          <p:cNvPr id="11" name="Text 9"/>
+          <p:cNvPr id="17" name="Text 15"/>
           <p:cNvSpPr txBox="1"/>
           <p:nvPr/>
         </p:nvSpPr>
         <p:spPr>
           <a:xfrm>
-            <a:off x="3840480" y="1600200"/>
-            <a:ext cx="731520" cy="731520"/>
+            <a:off x="6766560" y="1783080"/>
+            <a:ext cx="548640" cy="548640"/>
           </a:xfrm>
           <a:prstGeom prst="rect">
             <a:avLst/>
@@ -6761,27 +7787,27 @@
               <a:buNone/>
             </a:pPr>
             <a:r>
-              <a:rPr lang="en-US" sz="2400" b="1" dirty="0">
-                <a:solidFill>
-                  <a:schemeClr val="accent3"/>
+              <a:rPr lang="en-US" sz="2000" b="1" dirty="0">
+                <a:solidFill>
+                  <a:schemeClr val="bg1"/>
                 </a:solidFill>
               </a:rPr>
-              <a:t>3</a:t>
-            </a:r>
-            <a:endParaRPr lang="en-US" sz="2400" dirty="0"/>
-          </a:p>
-        </p:txBody>
-      </p:sp>
-      <p:sp>
-        <p:nvSpPr>
-          <p:cNvPr id="12" name="Text 10"/>
+              <a:t>4</a:t>
+            </a:r>
+            <a:endParaRPr lang="en-US" sz="2000" dirty="0"/>
+          </a:p>
+        </p:txBody>
+      </p:sp>
+      <p:sp>
+        <p:nvSpPr>
+          <p:cNvPr id="18" name="Text 16"/>
           <p:cNvSpPr txBox="1"/>
           <p:nvPr/>
         </p:nvSpPr>
         <p:spPr>
           <a:xfrm>
-            <a:off x="3611880" y="2395728"/>
-            <a:ext cx="1188720" cy="320040"/>
+            <a:off x="6766560" y="2468880"/>
+            <a:ext cx="1920240" cy="320040"/>
           </a:xfrm>
           <a:prstGeom prst="rect">
             <a:avLst/>
@@ -6791,270 +7817,6 @@
         </p:spPr>
         <p:txBody>
           <a:bodyPr wrap="square" lIns="0" tIns="0" rIns="0" bIns="0" rtlCol="0" anchor="ctr"/>
-          <a:lstStyle/>
-          <a:p>
-            <a:pPr algn="ctr" indent="0" marL="0">
-              <a:buNone/>
-            </a:pPr>
-            <a:r>
-              <a:rPr lang="en-US" sz="1400" dirty="0">
-                <a:solidFill>
-                  <a:schemeClr val="accent3"/>
-                </a:solidFill>
-              </a:rPr>
-              <a:t>候補，靜靜等</a:t>
-            </a:r>
-            <a:endParaRPr lang="en-US" sz="1400" dirty="0"/>
-          </a:p>
-        </p:txBody>
-      </p:sp>
-      <p:sp>
-        <p:nvSpPr>
-          <p:cNvPr id="13" name="rank-4"/>
-          <p:cNvSpPr/>
-          <p:nvPr/>
-        </p:nvSpPr>
-        <p:spPr>
-          <a:xfrm>
-            <a:off x="5394960" y="1600200"/>
-            <a:ext cx="731520" cy="731520"/>
-          </a:xfrm>
-          <a:prstGeom prst="ellipse">
-            <a:avLst/>
-          </a:prstGeom>
-          <a:solidFill>
-            <a:schemeClr val="bg2"/>
-          </a:solidFill>
-          <a:ln w="19050">
-            <a:solidFill>
-              <a:schemeClr val="accent3"/>
-            </a:solidFill>
-            <a:prstDash val="solid"/>
-          </a:ln>
-        </p:spPr>
-      </p:sp>
-      <p:sp>
-        <p:nvSpPr>
-          <p:cNvPr id="14" name="Text 12"/>
-          <p:cNvSpPr txBox="1"/>
-          <p:nvPr/>
-        </p:nvSpPr>
-        <p:spPr>
-          <a:xfrm>
-            <a:off x="5394960" y="1600200"/>
-            <a:ext cx="731520" cy="731520"/>
-          </a:xfrm>
-          <a:prstGeom prst="rect">
-            <a:avLst/>
-          </a:prstGeom>
-          <a:noFill/>
-          <a:ln/>
-        </p:spPr>
-        <p:txBody>
-          <a:bodyPr wrap="square" lIns="0" tIns="0" rIns="0" bIns="0" rtlCol="0" anchor="ctr"/>
-          <a:lstStyle/>
-          <a:p>
-            <a:pPr algn="ctr" indent="0" marL="0">
-              <a:buNone/>
-            </a:pPr>
-            <a:r>
-              <a:rPr lang="en-US" sz="2400" b="1" dirty="0">
-                <a:solidFill>
-                  <a:schemeClr val="accent3"/>
-                </a:solidFill>
-              </a:rPr>
-              <a:t>4</a:t>
-            </a:r>
-            <a:endParaRPr lang="en-US" sz="2400" dirty="0"/>
-          </a:p>
-        </p:txBody>
-      </p:sp>
-      <p:sp>
-        <p:nvSpPr>
-          <p:cNvPr id="15" name="Text 13"/>
-          <p:cNvSpPr txBox="1"/>
-          <p:nvPr/>
-        </p:nvSpPr>
-        <p:spPr>
-          <a:xfrm>
-            <a:off x="5166360" y="2395728"/>
-            <a:ext cx="1188720" cy="320040"/>
-          </a:xfrm>
-          <a:prstGeom prst="rect">
-            <a:avLst/>
-          </a:prstGeom>
-          <a:noFill/>
-          <a:ln/>
-        </p:spPr>
-        <p:txBody>
-          <a:bodyPr wrap="square" lIns="0" tIns="0" rIns="0" bIns="0" rtlCol="0" anchor="ctr"/>
-          <a:lstStyle/>
-          <a:p>
-            <a:pPr algn="ctr" indent="0" marL="0">
-              <a:buNone/>
-            </a:pPr>
-            <a:r>
-              <a:rPr lang="en-US" sz="1400" dirty="0">
-                <a:solidFill>
-                  <a:schemeClr val="accent3"/>
-                </a:solidFill>
-              </a:rPr>
-              <a:t>候補，靜靜等</a:t>
-            </a:r>
-            <a:endParaRPr lang="en-US" sz="1400" dirty="0"/>
-          </a:p>
-        </p:txBody>
-      </p:sp>
-      <p:sp>
-        <p:nvSpPr>
-          <p:cNvPr id="16" name="rank-5"/>
-          <p:cNvSpPr/>
-          <p:nvPr/>
-        </p:nvSpPr>
-        <p:spPr>
-          <a:xfrm>
-            <a:off x="6949440" y="1600200"/>
-            <a:ext cx="731520" cy="731520"/>
-          </a:xfrm>
-          <a:prstGeom prst="ellipse">
-            <a:avLst/>
-          </a:prstGeom>
-          <a:solidFill>
-            <a:schemeClr val="bg2"/>
-          </a:solidFill>
-          <a:ln w="19050">
-            <a:solidFill>
-              <a:schemeClr val="accent3"/>
-            </a:solidFill>
-            <a:prstDash val="solid"/>
-          </a:ln>
-        </p:spPr>
-      </p:sp>
-      <p:sp>
-        <p:nvSpPr>
-          <p:cNvPr id="17" name="Text 15"/>
-          <p:cNvSpPr txBox="1"/>
-          <p:nvPr/>
-        </p:nvSpPr>
-        <p:spPr>
-          <a:xfrm>
-            <a:off x="6949440" y="1600200"/>
-            <a:ext cx="731520" cy="731520"/>
-          </a:xfrm>
-          <a:prstGeom prst="rect">
-            <a:avLst/>
-          </a:prstGeom>
-          <a:noFill/>
-          <a:ln/>
-        </p:spPr>
-        <p:txBody>
-          <a:bodyPr wrap="square" lIns="0" tIns="0" rIns="0" bIns="0" rtlCol="0" anchor="ctr"/>
-          <a:lstStyle/>
-          <a:p>
-            <a:pPr algn="ctr" indent="0" marL="0">
-              <a:buNone/>
-            </a:pPr>
-            <a:r>
-              <a:rPr lang="en-US" sz="2400" b="1" dirty="0">
-                <a:solidFill>
-                  <a:schemeClr val="accent3"/>
-                </a:solidFill>
-              </a:rPr>
-              <a:t>5</a:t>
-            </a:r>
-            <a:endParaRPr lang="en-US" sz="2400" dirty="0"/>
-          </a:p>
-        </p:txBody>
-      </p:sp>
-      <p:sp>
-        <p:nvSpPr>
-          <p:cNvPr id="18" name="Text 16"/>
-          <p:cNvSpPr txBox="1"/>
-          <p:nvPr/>
-        </p:nvSpPr>
-        <p:spPr>
-          <a:xfrm>
-            <a:off x="6720840" y="2395728"/>
-            <a:ext cx="1188720" cy="320040"/>
-          </a:xfrm>
-          <a:prstGeom prst="rect">
-            <a:avLst/>
-          </a:prstGeom>
-          <a:noFill/>
-          <a:ln/>
-        </p:spPr>
-        <p:txBody>
-          <a:bodyPr wrap="square" lIns="0" tIns="0" rIns="0" bIns="0" rtlCol="0" anchor="ctr"/>
-          <a:lstStyle/>
-          <a:p>
-            <a:pPr algn="ctr" indent="0" marL="0">
-              <a:buNone/>
-            </a:pPr>
-            <a:r>
-              <a:rPr lang="en-US" sz="1400" dirty="0">
-                <a:solidFill>
-                  <a:schemeClr val="accent3"/>
-                </a:solidFill>
-              </a:rPr>
-              <a:t>候補，靜靜等</a:t>
-            </a:r>
-            <a:endParaRPr lang="en-US" sz="1400" dirty="0"/>
-          </a:p>
-        </p:txBody>
-      </p:sp>
-      <p:sp>
-        <p:nvSpPr>
-          <p:cNvPr id="19" name="card"/>
-          <p:cNvSpPr/>
-          <p:nvPr/>
-        </p:nvSpPr>
-        <p:spPr>
-          <a:xfrm>
-            <a:off x="457200" y="3017520"/>
-            <a:ext cx="2560320" cy="1645920"/>
-          </a:xfrm>
-          <a:prstGeom prst="roundRect">
-            <a:avLst>
-              <a:gd name="adj" fmla="val 5556"/>
-            </a:avLst>
-          </a:prstGeom>
-          <a:solidFill>
-            <a:schemeClr val="bg2"/>
-          </a:solidFill>
-          <a:ln w="12700">
-            <a:solidFill>
-              <a:schemeClr val="bg2"/>
-            </a:solidFill>
-            <a:prstDash val="solid"/>
-          </a:ln>
-          <a:effectLst>
-            <a:outerShdw sx="100000" sy="100000" kx="0" ky="0" algn="bl" rotWithShape="0" blurRad="76200" dist="25400" dir="5400000">
-              <a:srgbClr val="000000">
-                <a:alpha val="12000"/>
-              </a:srgbClr>
-            </a:outerShdw>
-          </a:effectLst>
-        </p:spPr>
-      </p:sp>
-      <p:sp>
-        <p:nvSpPr>
-          <p:cNvPr id="20" name="Text 18"/>
-          <p:cNvSpPr txBox="1"/>
-          <p:nvPr/>
-        </p:nvSpPr>
-        <p:spPr>
-          <a:xfrm>
-            <a:off x="640080" y="3200400"/>
-            <a:ext cx="2194560" cy="320040"/>
-          </a:xfrm>
-          <a:prstGeom prst="rect">
-            <a:avLst/>
-          </a:prstGeom>
-          <a:noFill/>
-          <a:ln/>
-        </p:spPr>
-        <p:txBody>
-          <a:bodyPr wrap="square" lIns="0" tIns="0" rIns="0" bIns="0" rtlCol="0" anchor="t"/>
           <a:lstStyle/>
           <a:p>
             <a:pPr indent="0" marL="0">
@@ -7066,7 +7828,7 @@
                   <a:schemeClr val="tx1"/>
                 </a:solidFill>
               </a:rPr>
-              <a:t>有人婉拒、或倒數結束</a:t>
+              <a:t>確認、婉拒</a:t>
             </a:r>
             <a:endParaRPr lang="en-US" sz="1600" dirty="0"/>
           </a:p>
@@ -7074,14 +7836,14 @@
       </p:sp>
       <p:sp>
         <p:nvSpPr>
-          <p:cNvPr id="21" name="Text 19"/>
+          <p:cNvPr id="19" name="Text 17"/>
           <p:cNvSpPr txBox="1"/>
           <p:nvPr/>
         </p:nvSpPr>
         <p:spPr>
           <a:xfrm>
-            <a:off x="640080" y="3566160"/>
-            <a:ext cx="2194560" cy="914400"/>
+            <a:off x="6766560" y="2788920"/>
+            <a:ext cx="1920240" cy="777240"/>
           </a:xfrm>
           <a:prstGeom prst="rect">
             <a:avLst/>
@@ -7102,7 +7864,7 @@
                   <a:schemeClr val="tx1"/>
                 </a:solidFill>
               </a:rPr>
-              <a:t>系統照順位，自動邀請下一位</a:t>
+              <a:t>在 LINE 先談好的，直接按「直接加入」</a:t>
             </a:r>
             <a:endParaRPr lang="en-US" sz="1400" dirty="0"/>
           </a:p>
@@ -7110,48 +7872,14 @@
       </p:sp>
       <p:sp>
         <p:nvSpPr>
-          <p:cNvPr id="22" name="card"/>
-          <p:cNvSpPr/>
-          <p:nvPr/>
-        </p:nvSpPr>
-        <p:spPr>
-          <a:xfrm>
-            <a:off x="3291840" y="3017520"/>
-            <a:ext cx="2560320" cy="1645920"/>
-          </a:xfrm>
-          <a:prstGeom prst="roundRect">
-            <a:avLst>
-              <a:gd name="adj" fmla="val 5556"/>
-            </a:avLst>
-          </a:prstGeom>
-          <a:solidFill>
-            <a:schemeClr val="bg2"/>
-          </a:solidFill>
-          <a:ln w="12700">
-            <a:solidFill>
-              <a:schemeClr val="bg2"/>
-            </a:solidFill>
-            <a:prstDash val="solid"/>
-          </a:ln>
-          <a:effectLst>
-            <a:outerShdw sx="100000" sy="100000" kx="0" ky="0" algn="bl" rotWithShape="0" blurRad="76200" dist="25400" dir="5400000">
-              <a:srgbClr val="000000">
-                <a:alpha val="12000"/>
-              </a:srgbClr>
-            </a:outerShdw>
-          </a:effectLst>
-        </p:spPr>
-      </p:sp>
-      <p:sp>
-        <p:nvSpPr>
-          <p:cNvPr id="23" name="Text 21"/>
+          <p:cNvPr id="20" name="Text 18"/>
           <p:cNvSpPr txBox="1"/>
           <p:nvPr/>
         </p:nvSpPr>
         <p:spPr>
           <a:xfrm>
-            <a:off x="3474720" y="3200400"/>
-            <a:ext cx="2194560" cy="320040"/>
+            <a:off x="457200" y="3840480"/>
+            <a:ext cx="8229600" cy="640080"/>
           </a:xfrm>
           <a:prstGeom prst="rect">
             <a:avLst/>
@@ -7169,154 +7897,12 @@
             <a:r>
               <a:rPr lang="en-US" sz="1600" b="1" dirty="0">
                 <a:solidFill>
-                  <a:schemeClr val="tx1"/>
+                  <a:schemeClr val="accent1"/>
                 </a:solidFill>
               </a:rPr>
-              <a:t>倒數結束 ≠ 失去機會</a:t>
+              <a:t>以前要一個一個問、等回覆；現在幾分鐘就能知道「丹哥當我的副手」行不行得通。</a:t>
             </a:r>
             <a:endParaRPr lang="en-US" sz="1600" dirty="0"/>
-          </a:p>
-        </p:txBody>
-      </p:sp>
-      <p:sp>
-        <p:nvSpPr>
-          <p:cNvPr id="24" name="Text 22"/>
-          <p:cNvSpPr txBox="1"/>
-          <p:nvPr/>
-        </p:nvSpPr>
-        <p:spPr>
-          <a:xfrm>
-            <a:off x="3474720" y="3566160"/>
-            <a:ext cx="2194560" cy="914400"/>
-          </a:xfrm>
-          <a:prstGeom prst="rect">
-            <a:avLst/>
-          </a:prstGeom>
-          <a:noFill/>
-          <a:ln/>
-        </p:spPr>
-        <p:txBody>
-          <a:bodyPr wrap="square" lIns="0" tIns="0" rIns="0" bIns="0" rtlCol="0" anchor="t"/>
-          <a:lstStyle/>
-          <a:p>
-            <a:pPr indent="0" marL="0">
-              <a:buNone/>
-            </a:pPr>
-            <a:r>
-              <a:rPr lang="en-US" sz="1400" dirty="0">
-                <a:solidFill>
-                  <a:schemeClr val="tx1"/>
-                </a:solidFill>
-              </a:rPr>
-              <a:t>原本的人還是可以確認，先確認的先拿到</a:t>
-            </a:r>
-            <a:endParaRPr lang="en-US" sz="1400" dirty="0"/>
-          </a:p>
-        </p:txBody>
-      </p:sp>
-      <p:sp>
-        <p:nvSpPr>
-          <p:cNvPr id="25" name="card"/>
-          <p:cNvSpPr/>
-          <p:nvPr/>
-        </p:nvSpPr>
-        <p:spPr>
-          <a:xfrm>
-            <a:off x="6126480" y="3017520"/>
-            <a:ext cx="2560320" cy="1645920"/>
-          </a:xfrm>
-          <a:prstGeom prst="roundRect">
-            <a:avLst>
-              <a:gd name="adj" fmla="val 5556"/>
-            </a:avLst>
-          </a:prstGeom>
-          <a:solidFill>
-            <a:schemeClr val="bg2"/>
-          </a:solidFill>
-          <a:ln w="12700">
-            <a:solidFill>
-              <a:schemeClr val="bg2"/>
-            </a:solidFill>
-            <a:prstDash val="solid"/>
-          </a:ln>
-          <a:effectLst>
-            <a:outerShdw sx="100000" sy="100000" kx="0" ky="0" algn="bl" rotWithShape="0" blurRad="76200" dist="25400" dir="5400000">
-              <a:srgbClr val="000000">
-                <a:alpha val="12000"/>
-              </a:srgbClr>
-            </a:outerShdw>
-          </a:effectLst>
-        </p:spPr>
-      </p:sp>
-      <p:sp>
-        <p:nvSpPr>
-          <p:cNvPr id="26" name="Text 24"/>
-          <p:cNvSpPr txBox="1"/>
-          <p:nvPr/>
-        </p:nvSpPr>
-        <p:spPr>
-          <a:xfrm>
-            <a:off x="6309360" y="3200400"/>
-            <a:ext cx="2194560" cy="320040"/>
-          </a:xfrm>
-          <a:prstGeom prst="rect">
-            <a:avLst/>
-          </a:prstGeom>
-          <a:noFill/>
-          <a:ln/>
-        </p:spPr>
-        <p:txBody>
-          <a:bodyPr wrap="square" lIns="0" tIns="0" rIns="0" bIns="0" rtlCol="0" anchor="t"/>
-          <a:lstStyle/>
-          <a:p>
-            <a:pPr indent="0" marL="0">
-              <a:buNone/>
-            </a:pPr>
-            <a:r>
-              <a:rPr lang="en-US" sz="1600" b="1" dirty="0">
-                <a:solidFill>
-                  <a:schemeClr val="tx1"/>
-                </a:solidFill>
-              </a:rPr>
-              <a:t>人數額滿</a:t>
-            </a:r>
-            <a:endParaRPr lang="en-US" sz="1600" dirty="0"/>
-          </a:p>
-        </p:txBody>
-      </p:sp>
-      <p:sp>
-        <p:nvSpPr>
-          <p:cNvPr id="27" name="Text 25"/>
-          <p:cNvSpPr txBox="1"/>
-          <p:nvPr/>
-        </p:nvSpPr>
-        <p:spPr>
-          <a:xfrm>
-            <a:off x="6309360" y="3566160"/>
-            <a:ext cx="2194560" cy="914400"/>
-          </a:xfrm>
-          <a:prstGeom prst="rect">
-            <a:avLst/>
-          </a:prstGeom>
-          <a:noFill/>
-          <a:ln/>
-        </p:spPr>
-        <p:txBody>
-          <a:bodyPr wrap="square" lIns="0" tIns="0" rIns="0" bIns="0" rtlCol="0" anchor="t"/>
-          <a:lstStyle/>
-          <a:p>
-            <a:pPr indent="0" marL="0">
-              <a:buNone/>
-            </a:pPr>
-            <a:r>
-              <a:rPr lang="en-US" sz="1400" dirty="0">
-                <a:solidFill>
-                  <a:schemeClr val="tx1"/>
-                </a:solidFill>
-              </a:rPr>
-              <a:t>還沒回覆的邀請改成「已額滿」，火柴收到通知</a:t>
-            </a:r>
-            <a:endParaRPr lang="en-US" sz="1400" dirty="0"/>
           </a:p>
         </p:txBody>
       </p:sp>
@@ -7422,7 +8008,7 @@
                   <a:schemeClr val="tx1"/>
                 </a:solidFill>
               </a:rPr>
-              <a:t>同一天，可以同時收到好幾張邀請</a:t>
+              <a:t>順位：先邀剛好的人數，其他人不被打擾</a:t>
             </a:r>
             <a:endParaRPr lang="en-US" sz="2800" dirty="0"/>
           </a:p>
@@ -7430,18 +8016,539 @@
       </p:sp>
       <p:sp>
         <p:nvSpPr>
-          <p:cNvPr id="3" name="card"/>
+          <p:cNvPr id="3" name="Text 1"/>
+          <p:cNvSpPr txBox="1"/>
+          <p:nvPr/>
+        </p:nvSpPr>
+        <p:spPr>
+          <a:xfrm>
+            <a:off x="457200" y="1097280"/>
+            <a:ext cx="8229600" cy="320040"/>
+          </a:xfrm>
+          <a:prstGeom prst="rect">
+            <a:avLst/>
+          </a:prstGeom>
+          <a:noFill/>
+          <a:ln/>
+        </p:spPr>
+        <p:txBody>
+          <a:bodyPr wrap="square" lIns="0" tIns="0" rIns="0" bIns="0" rtlCol="0" anchor="ctr"/>
+          <a:lstStyle/>
+          <a:p>
+            <a:pPr indent="0" marL="0">
+              <a:buNone/>
+            </a:pPr>
+            <a:r>
+              <a:rPr lang="en-US" sz="1600" dirty="0">
+                <a:solidFill>
+                  <a:schemeClr val="accent3"/>
+                </a:solidFill>
+              </a:rPr>
+              <a:t>例：需要 2 人，火柴排了 5 位</a:t>
+            </a:r>
+            <a:endParaRPr lang="en-US" sz="1600" dirty="0"/>
+          </a:p>
+        </p:txBody>
+      </p:sp>
+      <p:sp>
+        <p:nvSpPr>
+          <p:cNvPr id="4" name="rank-1"/>
           <p:cNvSpPr/>
           <p:nvPr/>
         </p:nvSpPr>
         <p:spPr>
           <a:xfrm>
-            <a:off x="457200" y="1280160"/>
-            <a:ext cx="2560320" cy="2286000"/>
+            <a:off x="731520" y="1600200"/>
+            <a:ext cx="731520" cy="731520"/>
+          </a:xfrm>
+          <a:prstGeom prst="ellipse">
+            <a:avLst/>
+          </a:prstGeom>
+          <a:solidFill>
+            <a:schemeClr val="accent1"/>
+          </a:solidFill>
+          <a:ln w="19050">
+            <a:solidFill>
+              <a:schemeClr val="accent1"/>
+            </a:solidFill>
+            <a:prstDash val="solid"/>
+          </a:ln>
+        </p:spPr>
+      </p:sp>
+      <p:sp>
+        <p:nvSpPr>
+          <p:cNvPr id="5" name="Text 3"/>
+          <p:cNvSpPr txBox="1"/>
+          <p:nvPr/>
+        </p:nvSpPr>
+        <p:spPr>
+          <a:xfrm>
+            <a:off x="731520" y="1600200"/>
+            <a:ext cx="731520" cy="731520"/>
+          </a:xfrm>
+          <a:prstGeom prst="rect">
+            <a:avLst/>
+          </a:prstGeom>
+          <a:noFill/>
+          <a:ln/>
+        </p:spPr>
+        <p:txBody>
+          <a:bodyPr wrap="square" lIns="0" tIns="0" rIns="0" bIns="0" rtlCol="0" anchor="ctr"/>
+          <a:lstStyle/>
+          <a:p>
+            <a:pPr algn="ctr" indent="0" marL="0">
+              <a:buNone/>
+            </a:pPr>
+            <a:r>
+              <a:rPr lang="en-US" sz="2400" b="1" dirty="0">
+                <a:solidFill>
+                  <a:schemeClr val="bg1"/>
+                </a:solidFill>
+              </a:rPr>
+              <a:t>1</a:t>
+            </a:r>
+            <a:endParaRPr lang="en-US" sz="2400" dirty="0"/>
+          </a:p>
+        </p:txBody>
+      </p:sp>
+      <p:sp>
+        <p:nvSpPr>
+          <p:cNvPr id="6" name="Text 4"/>
+          <p:cNvSpPr txBox="1"/>
+          <p:nvPr/>
+        </p:nvSpPr>
+        <p:spPr>
+          <a:xfrm>
+            <a:off x="502920" y="2395728"/>
+            <a:ext cx="1188720" cy="320040"/>
+          </a:xfrm>
+          <a:prstGeom prst="rect">
+            <a:avLst/>
+          </a:prstGeom>
+          <a:noFill/>
+          <a:ln/>
+        </p:spPr>
+        <p:txBody>
+          <a:bodyPr wrap="square" lIns="0" tIns="0" rIns="0" bIns="0" rtlCol="0" anchor="ctr"/>
+          <a:lstStyle/>
+          <a:p>
+            <a:pPr algn="ctr" indent="0" marL="0">
+              <a:buNone/>
+            </a:pPr>
+            <a:r>
+              <a:rPr lang="en-US" sz="1400" b="1" dirty="0">
+                <a:solidFill>
+                  <a:schemeClr val="accent1"/>
+                </a:solidFill>
+              </a:rPr>
+              <a:t>先收到邀請</a:t>
+            </a:r>
+            <a:endParaRPr lang="en-US" sz="1400" dirty="0"/>
+          </a:p>
+        </p:txBody>
+      </p:sp>
+      <p:sp>
+        <p:nvSpPr>
+          <p:cNvPr id="7" name="rank-2"/>
+          <p:cNvSpPr/>
+          <p:nvPr/>
+        </p:nvSpPr>
+        <p:spPr>
+          <a:xfrm>
+            <a:off x="2286000" y="1600200"/>
+            <a:ext cx="731520" cy="731520"/>
+          </a:xfrm>
+          <a:prstGeom prst="ellipse">
+            <a:avLst/>
+          </a:prstGeom>
+          <a:solidFill>
+            <a:schemeClr val="accent1"/>
+          </a:solidFill>
+          <a:ln w="19050">
+            <a:solidFill>
+              <a:schemeClr val="accent1"/>
+            </a:solidFill>
+            <a:prstDash val="solid"/>
+          </a:ln>
+        </p:spPr>
+      </p:sp>
+      <p:sp>
+        <p:nvSpPr>
+          <p:cNvPr id="8" name="Text 6"/>
+          <p:cNvSpPr txBox="1"/>
+          <p:nvPr/>
+        </p:nvSpPr>
+        <p:spPr>
+          <a:xfrm>
+            <a:off x="2286000" y="1600200"/>
+            <a:ext cx="731520" cy="731520"/>
+          </a:xfrm>
+          <a:prstGeom prst="rect">
+            <a:avLst/>
+          </a:prstGeom>
+          <a:noFill/>
+          <a:ln/>
+        </p:spPr>
+        <p:txBody>
+          <a:bodyPr wrap="square" lIns="0" tIns="0" rIns="0" bIns="0" rtlCol="0" anchor="ctr"/>
+          <a:lstStyle/>
+          <a:p>
+            <a:pPr algn="ctr" indent="0" marL="0">
+              <a:buNone/>
+            </a:pPr>
+            <a:r>
+              <a:rPr lang="en-US" sz="2400" b="1" dirty="0">
+                <a:solidFill>
+                  <a:schemeClr val="bg1"/>
+                </a:solidFill>
+              </a:rPr>
+              <a:t>2</a:t>
+            </a:r>
+            <a:endParaRPr lang="en-US" sz="2400" dirty="0"/>
+          </a:p>
+        </p:txBody>
+      </p:sp>
+      <p:sp>
+        <p:nvSpPr>
+          <p:cNvPr id="9" name="Text 7"/>
+          <p:cNvSpPr txBox="1"/>
+          <p:nvPr/>
+        </p:nvSpPr>
+        <p:spPr>
+          <a:xfrm>
+            <a:off x="2057400" y="2395728"/>
+            <a:ext cx="1188720" cy="320040"/>
+          </a:xfrm>
+          <a:prstGeom prst="rect">
+            <a:avLst/>
+          </a:prstGeom>
+          <a:noFill/>
+          <a:ln/>
+        </p:spPr>
+        <p:txBody>
+          <a:bodyPr wrap="square" lIns="0" tIns="0" rIns="0" bIns="0" rtlCol="0" anchor="ctr"/>
+          <a:lstStyle/>
+          <a:p>
+            <a:pPr algn="ctr" indent="0" marL="0">
+              <a:buNone/>
+            </a:pPr>
+            <a:r>
+              <a:rPr lang="en-US" sz="1400" b="1" dirty="0">
+                <a:solidFill>
+                  <a:schemeClr val="accent1"/>
+                </a:solidFill>
+              </a:rPr>
+              <a:t>先收到邀請</a:t>
+            </a:r>
+            <a:endParaRPr lang="en-US" sz="1400" dirty="0"/>
+          </a:p>
+        </p:txBody>
+      </p:sp>
+      <p:sp>
+        <p:nvSpPr>
+          <p:cNvPr id="10" name="rank-3"/>
+          <p:cNvSpPr/>
+          <p:nvPr/>
+        </p:nvSpPr>
+        <p:spPr>
+          <a:xfrm>
+            <a:off x="3840480" y="1600200"/>
+            <a:ext cx="731520" cy="731520"/>
+          </a:xfrm>
+          <a:prstGeom prst="ellipse">
+            <a:avLst/>
+          </a:prstGeom>
+          <a:solidFill>
+            <a:schemeClr val="bg2"/>
+          </a:solidFill>
+          <a:ln w="19050">
+            <a:solidFill>
+              <a:schemeClr val="accent3"/>
+            </a:solidFill>
+            <a:prstDash val="solid"/>
+          </a:ln>
+        </p:spPr>
+      </p:sp>
+      <p:sp>
+        <p:nvSpPr>
+          <p:cNvPr id="11" name="Text 9"/>
+          <p:cNvSpPr txBox="1"/>
+          <p:nvPr/>
+        </p:nvSpPr>
+        <p:spPr>
+          <a:xfrm>
+            <a:off x="3840480" y="1600200"/>
+            <a:ext cx="731520" cy="731520"/>
+          </a:xfrm>
+          <a:prstGeom prst="rect">
+            <a:avLst/>
+          </a:prstGeom>
+          <a:noFill/>
+          <a:ln/>
+        </p:spPr>
+        <p:txBody>
+          <a:bodyPr wrap="square" lIns="0" tIns="0" rIns="0" bIns="0" rtlCol="0" anchor="ctr"/>
+          <a:lstStyle/>
+          <a:p>
+            <a:pPr algn="ctr" indent="0" marL="0">
+              <a:buNone/>
+            </a:pPr>
+            <a:r>
+              <a:rPr lang="en-US" sz="2400" b="1" dirty="0">
+                <a:solidFill>
+                  <a:schemeClr val="accent3"/>
+                </a:solidFill>
+              </a:rPr>
+              <a:t>3</a:t>
+            </a:r>
+            <a:endParaRPr lang="en-US" sz="2400" dirty="0"/>
+          </a:p>
+        </p:txBody>
+      </p:sp>
+      <p:sp>
+        <p:nvSpPr>
+          <p:cNvPr id="12" name="Text 10"/>
+          <p:cNvSpPr txBox="1"/>
+          <p:nvPr/>
+        </p:nvSpPr>
+        <p:spPr>
+          <a:xfrm>
+            <a:off x="3611880" y="2395728"/>
+            <a:ext cx="1188720" cy="320040"/>
+          </a:xfrm>
+          <a:prstGeom prst="rect">
+            <a:avLst/>
+          </a:prstGeom>
+          <a:noFill/>
+          <a:ln/>
+        </p:spPr>
+        <p:txBody>
+          <a:bodyPr wrap="square" lIns="0" tIns="0" rIns="0" bIns="0" rtlCol="0" anchor="ctr"/>
+          <a:lstStyle/>
+          <a:p>
+            <a:pPr algn="ctr" indent="0" marL="0">
+              <a:buNone/>
+            </a:pPr>
+            <a:r>
+              <a:rPr lang="en-US" sz="1400" dirty="0">
+                <a:solidFill>
+                  <a:schemeClr val="accent3"/>
+                </a:solidFill>
+              </a:rPr>
+              <a:t>候補，靜靜等</a:t>
+            </a:r>
+            <a:endParaRPr lang="en-US" sz="1400" dirty="0"/>
+          </a:p>
+        </p:txBody>
+      </p:sp>
+      <p:sp>
+        <p:nvSpPr>
+          <p:cNvPr id="13" name="rank-4"/>
+          <p:cNvSpPr/>
+          <p:nvPr/>
+        </p:nvSpPr>
+        <p:spPr>
+          <a:xfrm>
+            <a:off x="5394960" y="1600200"/>
+            <a:ext cx="731520" cy="731520"/>
+          </a:xfrm>
+          <a:prstGeom prst="ellipse">
+            <a:avLst/>
+          </a:prstGeom>
+          <a:solidFill>
+            <a:schemeClr val="bg2"/>
+          </a:solidFill>
+          <a:ln w="19050">
+            <a:solidFill>
+              <a:schemeClr val="accent3"/>
+            </a:solidFill>
+            <a:prstDash val="solid"/>
+          </a:ln>
+        </p:spPr>
+      </p:sp>
+      <p:sp>
+        <p:nvSpPr>
+          <p:cNvPr id="14" name="Text 12"/>
+          <p:cNvSpPr txBox="1"/>
+          <p:nvPr/>
+        </p:nvSpPr>
+        <p:spPr>
+          <a:xfrm>
+            <a:off x="5394960" y="1600200"/>
+            <a:ext cx="731520" cy="731520"/>
+          </a:xfrm>
+          <a:prstGeom prst="rect">
+            <a:avLst/>
+          </a:prstGeom>
+          <a:noFill/>
+          <a:ln/>
+        </p:spPr>
+        <p:txBody>
+          <a:bodyPr wrap="square" lIns="0" tIns="0" rIns="0" bIns="0" rtlCol="0" anchor="ctr"/>
+          <a:lstStyle/>
+          <a:p>
+            <a:pPr algn="ctr" indent="0" marL="0">
+              <a:buNone/>
+            </a:pPr>
+            <a:r>
+              <a:rPr lang="en-US" sz="2400" b="1" dirty="0">
+                <a:solidFill>
+                  <a:schemeClr val="accent3"/>
+                </a:solidFill>
+              </a:rPr>
+              <a:t>4</a:t>
+            </a:r>
+            <a:endParaRPr lang="en-US" sz="2400" dirty="0"/>
+          </a:p>
+        </p:txBody>
+      </p:sp>
+      <p:sp>
+        <p:nvSpPr>
+          <p:cNvPr id="15" name="Text 13"/>
+          <p:cNvSpPr txBox="1"/>
+          <p:nvPr/>
+        </p:nvSpPr>
+        <p:spPr>
+          <a:xfrm>
+            <a:off x="5166360" y="2395728"/>
+            <a:ext cx="1188720" cy="320040"/>
+          </a:xfrm>
+          <a:prstGeom prst="rect">
+            <a:avLst/>
+          </a:prstGeom>
+          <a:noFill/>
+          <a:ln/>
+        </p:spPr>
+        <p:txBody>
+          <a:bodyPr wrap="square" lIns="0" tIns="0" rIns="0" bIns="0" rtlCol="0" anchor="ctr"/>
+          <a:lstStyle/>
+          <a:p>
+            <a:pPr algn="ctr" indent="0" marL="0">
+              <a:buNone/>
+            </a:pPr>
+            <a:r>
+              <a:rPr lang="en-US" sz="1400" dirty="0">
+                <a:solidFill>
+                  <a:schemeClr val="accent3"/>
+                </a:solidFill>
+              </a:rPr>
+              <a:t>候補，靜靜等</a:t>
+            </a:r>
+            <a:endParaRPr lang="en-US" sz="1400" dirty="0"/>
+          </a:p>
+        </p:txBody>
+      </p:sp>
+      <p:sp>
+        <p:nvSpPr>
+          <p:cNvPr id="16" name="rank-5"/>
+          <p:cNvSpPr/>
+          <p:nvPr/>
+        </p:nvSpPr>
+        <p:spPr>
+          <a:xfrm>
+            <a:off x="6949440" y="1600200"/>
+            <a:ext cx="731520" cy="731520"/>
+          </a:xfrm>
+          <a:prstGeom prst="ellipse">
+            <a:avLst/>
+          </a:prstGeom>
+          <a:solidFill>
+            <a:schemeClr val="bg2"/>
+          </a:solidFill>
+          <a:ln w="19050">
+            <a:solidFill>
+              <a:schemeClr val="accent3"/>
+            </a:solidFill>
+            <a:prstDash val="solid"/>
+          </a:ln>
+        </p:spPr>
+      </p:sp>
+      <p:sp>
+        <p:nvSpPr>
+          <p:cNvPr id="17" name="Text 15"/>
+          <p:cNvSpPr txBox="1"/>
+          <p:nvPr/>
+        </p:nvSpPr>
+        <p:spPr>
+          <a:xfrm>
+            <a:off x="6949440" y="1600200"/>
+            <a:ext cx="731520" cy="731520"/>
+          </a:xfrm>
+          <a:prstGeom prst="rect">
+            <a:avLst/>
+          </a:prstGeom>
+          <a:noFill/>
+          <a:ln/>
+        </p:spPr>
+        <p:txBody>
+          <a:bodyPr wrap="square" lIns="0" tIns="0" rIns="0" bIns="0" rtlCol="0" anchor="ctr"/>
+          <a:lstStyle/>
+          <a:p>
+            <a:pPr algn="ctr" indent="0" marL="0">
+              <a:buNone/>
+            </a:pPr>
+            <a:r>
+              <a:rPr lang="en-US" sz="2400" b="1" dirty="0">
+                <a:solidFill>
+                  <a:schemeClr val="accent3"/>
+                </a:solidFill>
+              </a:rPr>
+              <a:t>5</a:t>
+            </a:r>
+            <a:endParaRPr lang="en-US" sz="2400" dirty="0"/>
+          </a:p>
+        </p:txBody>
+      </p:sp>
+      <p:sp>
+        <p:nvSpPr>
+          <p:cNvPr id="18" name="Text 16"/>
+          <p:cNvSpPr txBox="1"/>
+          <p:nvPr/>
+        </p:nvSpPr>
+        <p:spPr>
+          <a:xfrm>
+            <a:off x="6720840" y="2395728"/>
+            <a:ext cx="1188720" cy="320040"/>
+          </a:xfrm>
+          <a:prstGeom prst="rect">
+            <a:avLst/>
+          </a:prstGeom>
+          <a:noFill/>
+          <a:ln/>
+        </p:spPr>
+        <p:txBody>
+          <a:bodyPr wrap="square" lIns="0" tIns="0" rIns="0" bIns="0" rtlCol="0" anchor="ctr"/>
+          <a:lstStyle/>
+          <a:p>
+            <a:pPr algn="ctr" indent="0" marL="0">
+              <a:buNone/>
+            </a:pPr>
+            <a:r>
+              <a:rPr lang="en-US" sz="1400" dirty="0">
+                <a:solidFill>
+                  <a:schemeClr val="accent3"/>
+                </a:solidFill>
+              </a:rPr>
+              <a:t>候補，靜靜等</a:t>
+            </a:r>
+            <a:endParaRPr lang="en-US" sz="1400" dirty="0"/>
+          </a:p>
+        </p:txBody>
+      </p:sp>
+      <p:sp>
+        <p:nvSpPr>
+          <p:cNvPr id="19" name="card"/>
+          <p:cNvSpPr/>
+          <p:nvPr/>
+        </p:nvSpPr>
+        <p:spPr>
+          <a:xfrm>
+            <a:off x="457200" y="3017520"/>
+            <a:ext cx="2560320" cy="1645920"/>
           </a:xfrm>
           <a:prstGeom prst="roundRect">
             <a:avLst>
-              <a:gd name="adj" fmla="val 4000"/>
+              <a:gd name="adj" fmla="val 5556"/>
             </a:avLst>
           </a:prstGeom>
           <a:solidFill>
@@ -7464,63 +8571,14 @@
       </p:sp>
       <p:sp>
         <p:nvSpPr>
-          <p:cNvPr id="4" name="icon-circle"/>
-          <p:cNvSpPr/>
-          <p:nvPr/>
-        </p:nvSpPr>
-        <p:spPr>
-          <a:xfrm>
-            <a:off x="640080" y="1463040"/>
-            <a:ext cx="502920" cy="502920"/>
-          </a:xfrm>
-          <a:prstGeom prst="ellipse">
-            <a:avLst/>
-          </a:prstGeom>
-          <a:solidFill>
-            <a:schemeClr val="accent1"/>
-          </a:solidFill>
-          <a:ln w="12700">
-            <a:solidFill>
-              <a:schemeClr val="accent1"/>
-            </a:solidFill>
-            <a:prstDash val="solid"/>
-          </a:ln>
-        </p:spPr>
-      </p:sp>
-      <p:pic>
-        <p:nvPicPr>
-          <p:cNvPr id="5" name="icon" descr="preencoded.png">    </p:cNvPr>
-          <p:cNvPicPr>
-            <a:picLocks noChangeAspect="1"/>
-          </p:cNvPicPr>
-          <p:nvPr/>
-        </p:nvPicPr>
-        <p:blipFill>
-          <a:blip r:embed="rId1"/>
-          <a:stretch>
-            <a:fillRect/>
-          </a:stretch>
-        </p:blipFill>
-        <p:spPr>
-          <a:xfrm>
-            <a:off x="768096" y="1591056"/>
-            <a:ext cx="246888" cy="246888"/>
-          </a:xfrm>
-          <a:prstGeom prst="rect">
-            <a:avLst/>
-          </a:prstGeom>
-        </p:spPr>
-      </p:pic>
-      <p:sp>
-        <p:nvSpPr>
-          <p:cNvPr id="6" name="Text 3"/>
+          <p:cNvPr id="20" name="Text 18"/>
           <p:cNvSpPr txBox="1"/>
           <p:nvPr/>
         </p:nvSpPr>
         <p:spPr>
           <a:xfrm>
-            <a:off x="640080" y="2103120"/>
-            <a:ext cx="2194560" cy="548640"/>
+            <a:off x="640080" y="3200400"/>
+            <a:ext cx="2194560" cy="320040"/>
           </a:xfrm>
           <a:prstGeom prst="rect">
             <a:avLst/>
@@ -7541,7 +8599,7 @@
                   <a:schemeClr val="tx1"/>
                 </a:solidFill>
               </a:rPr>
-              <a:t>同一天收到 A、B 兩張</a:t>
+              <a:t>有人婉拒、或倒數結束</a:t>
             </a:r>
             <a:endParaRPr lang="en-US" sz="1600" dirty="0"/>
           </a:p>
@@ -7549,14 +8607,14 @@
       </p:sp>
       <p:sp>
         <p:nvSpPr>
-          <p:cNvPr id="7" name="Text 4"/>
+          <p:cNvPr id="21" name="Text 19"/>
           <p:cNvSpPr txBox="1"/>
           <p:nvPr/>
         </p:nvSpPr>
         <p:spPr>
           <a:xfrm>
-            <a:off x="640080" y="2697480"/>
-            <a:ext cx="2194560" cy="685800"/>
+            <a:off x="640080" y="3566160"/>
+            <a:ext cx="2194560" cy="914400"/>
           </a:xfrm>
           <a:prstGeom prst="rect">
             <a:avLst/>
@@ -7577,7 +8635,7 @@
                   <a:schemeClr val="tx1"/>
                 </a:solidFill>
               </a:rPr>
-              <a:t>由你自己選，不用兩邊都回</a:t>
+              <a:t>系統照順位，自動邀請下一位</a:t>
             </a:r>
             <a:endParaRPr lang="en-US" sz="1400" dirty="0"/>
           </a:p>
@@ -7585,54 +8643,18 @@
       </p:sp>
       <p:sp>
         <p:nvSpPr>
-          <p:cNvPr id="8" name="Text 5"/>
-          <p:cNvSpPr txBox="1"/>
-          <p:nvPr/>
-        </p:nvSpPr>
-        <p:spPr>
-          <a:xfrm>
-            <a:off x="3017520" y="2194560"/>
-            <a:ext cx="274320" cy="457200"/>
-          </a:xfrm>
-          <a:prstGeom prst="rect">
-            <a:avLst/>
-          </a:prstGeom>
-          <a:noFill/>
-          <a:ln/>
-        </p:spPr>
-        <p:txBody>
-          <a:bodyPr wrap="square" lIns="0" tIns="0" rIns="0" bIns="0" rtlCol="0" anchor="ctr"/>
-          <a:lstStyle/>
-          <a:p>
-            <a:pPr algn="ctr" indent="0" marL="0">
-              <a:buNone/>
-            </a:pPr>
-            <a:r>
-              <a:rPr lang="en-US" sz="2400" b="1" dirty="0">
-                <a:solidFill>
-                  <a:schemeClr val="accent1"/>
-                </a:solidFill>
-              </a:rPr>
-              <a:t>→</a:t>
-            </a:r>
-            <a:endParaRPr lang="en-US" sz="2400" dirty="0"/>
-          </a:p>
-        </p:txBody>
-      </p:sp>
-      <p:sp>
-        <p:nvSpPr>
-          <p:cNvPr id="9" name="card"/>
+          <p:cNvPr id="22" name="card"/>
           <p:cNvSpPr/>
           <p:nvPr/>
         </p:nvSpPr>
         <p:spPr>
           <a:xfrm>
-            <a:off x="3291840" y="1280160"/>
-            <a:ext cx="2560320" cy="2286000"/>
+            <a:off x="3291840" y="3017520"/>
+            <a:ext cx="2560320" cy="1645920"/>
           </a:xfrm>
           <a:prstGeom prst="roundRect">
             <a:avLst>
-              <a:gd name="adj" fmla="val 4000"/>
+              <a:gd name="adj" fmla="val 5556"/>
             </a:avLst>
           </a:prstGeom>
           <a:solidFill>
@@ -7655,63 +8677,14 @@
       </p:sp>
       <p:sp>
         <p:nvSpPr>
-          <p:cNvPr id="10" name="icon-circle"/>
-          <p:cNvSpPr/>
-          <p:nvPr/>
-        </p:nvSpPr>
-        <p:spPr>
-          <a:xfrm>
-            <a:off x="3474720" y="1463040"/>
-            <a:ext cx="502920" cy="502920"/>
-          </a:xfrm>
-          <a:prstGeom prst="ellipse">
-            <a:avLst/>
-          </a:prstGeom>
-          <a:solidFill>
-            <a:schemeClr val="accent1"/>
-          </a:solidFill>
-          <a:ln w="12700">
-            <a:solidFill>
-              <a:schemeClr val="accent1"/>
-            </a:solidFill>
-            <a:prstDash val="solid"/>
-          </a:ln>
-        </p:spPr>
-      </p:sp>
-      <p:pic>
-        <p:nvPicPr>
-          <p:cNvPr id="11" name="icon" descr="preencoded.png">    </p:cNvPr>
-          <p:cNvPicPr>
-            <a:picLocks noChangeAspect="1"/>
-          </p:cNvPicPr>
-          <p:nvPr/>
-        </p:nvPicPr>
-        <p:blipFill>
-          <a:blip r:embed="rId2"/>
-          <a:stretch>
-            <a:fillRect/>
-          </a:stretch>
-        </p:blipFill>
-        <p:spPr>
-          <a:xfrm>
-            <a:off x="3602736" y="1591056"/>
-            <a:ext cx="246888" cy="246888"/>
-          </a:xfrm>
-          <a:prstGeom prst="rect">
-            <a:avLst/>
-          </a:prstGeom>
-        </p:spPr>
-      </p:pic>
-      <p:sp>
-        <p:nvSpPr>
-          <p:cNvPr id="12" name="Text 8"/>
+          <p:cNvPr id="23" name="Text 21"/>
           <p:cNvSpPr txBox="1"/>
           <p:nvPr/>
         </p:nvSpPr>
         <p:spPr>
           <a:xfrm>
-            <a:off x="3474720" y="2103120"/>
-            <a:ext cx="2194560" cy="548640"/>
+            <a:off x="3474720" y="3200400"/>
+            <a:ext cx="2194560" cy="320040"/>
           </a:xfrm>
           <a:prstGeom prst="rect">
             <a:avLst/>
@@ -7732,7 +8705,7 @@
                   <a:schemeClr val="tx1"/>
                 </a:solidFill>
               </a:rPr>
-              <a:t>你確認 A</a:t>
+              <a:t>倒數結束 ≠ 失去機會</a:t>
             </a:r>
             <a:endParaRPr lang="en-US" sz="1600" dirty="0"/>
           </a:p>
@@ -7740,14 +8713,14 @@
       </p:sp>
       <p:sp>
         <p:nvSpPr>
-          <p:cNvPr id="13" name="Text 9"/>
+          <p:cNvPr id="24" name="Text 22"/>
           <p:cNvSpPr txBox="1"/>
           <p:nvPr/>
         </p:nvSpPr>
         <p:spPr>
           <a:xfrm>
-            <a:off x="3474720" y="2697480"/>
-            <a:ext cx="2194560" cy="685800"/>
+            <a:off x="3474720" y="3566160"/>
+            <a:ext cx="2194560" cy="914400"/>
           </a:xfrm>
           <a:prstGeom prst="rect">
             <a:avLst/>
@@ -7768,7 +8741,7 @@
                   <a:schemeClr val="tx1"/>
                 </a:solidFill>
               </a:rPr>
-              <a:t>B 自動關閉</a:t>
+              <a:t>原本的人還是可以確認，先確認的先拿到</a:t>
             </a:r>
             <a:endParaRPr lang="en-US" sz="1400" dirty="0"/>
           </a:p>
@@ -7776,54 +8749,18 @@
       </p:sp>
       <p:sp>
         <p:nvSpPr>
-          <p:cNvPr id="14" name="Text 10"/>
-          <p:cNvSpPr txBox="1"/>
-          <p:nvPr/>
-        </p:nvSpPr>
-        <p:spPr>
-          <a:xfrm>
-            <a:off x="5852160" y="2194560"/>
-            <a:ext cx="274320" cy="457200"/>
-          </a:xfrm>
-          <a:prstGeom prst="rect">
-            <a:avLst/>
-          </a:prstGeom>
-          <a:noFill/>
-          <a:ln/>
-        </p:spPr>
-        <p:txBody>
-          <a:bodyPr wrap="square" lIns="0" tIns="0" rIns="0" bIns="0" rtlCol="0" anchor="ctr"/>
-          <a:lstStyle/>
-          <a:p>
-            <a:pPr algn="ctr" indent="0" marL="0">
-              <a:buNone/>
-            </a:pPr>
-            <a:r>
-              <a:rPr lang="en-US" sz="2400" b="1" dirty="0">
-                <a:solidFill>
-                  <a:schemeClr val="accent1"/>
-                </a:solidFill>
-              </a:rPr>
-              <a:t>→</a:t>
-            </a:r>
-            <a:endParaRPr lang="en-US" sz="2400" dirty="0"/>
-          </a:p>
-        </p:txBody>
-      </p:sp>
-      <p:sp>
-        <p:nvSpPr>
-          <p:cNvPr id="15" name="card"/>
+          <p:cNvPr id="25" name="card"/>
           <p:cNvSpPr/>
           <p:nvPr/>
         </p:nvSpPr>
         <p:spPr>
           <a:xfrm>
-            <a:off x="6126480" y="1280160"/>
-            <a:ext cx="2560320" cy="2286000"/>
+            <a:off x="6126480" y="3017520"/>
+            <a:ext cx="2560320" cy="1645920"/>
           </a:xfrm>
           <a:prstGeom prst="roundRect">
             <a:avLst>
-              <a:gd name="adj" fmla="val 4000"/>
+              <a:gd name="adj" fmla="val 5556"/>
             </a:avLst>
           </a:prstGeom>
           <a:solidFill>
@@ -7846,63 +8783,14 @@
       </p:sp>
       <p:sp>
         <p:nvSpPr>
-          <p:cNvPr id="16" name="icon-circle"/>
-          <p:cNvSpPr/>
-          <p:nvPr/>
-        </p:nvSpPr>
-        <p:spPr>
-          <a:xfrm>
-            <a:off x="6309360" y="1463040"/>
-            <a:ext cx="502920" cy="502920"/>
-          </a:xfrm>
-          <a:prstGeom prst="ellipse">
-            <a:avLst/>
-          </a:prstGeom>
-          <a:solidFill>
-            <a:schemeClr val="accent1"/>
-          </a:solidFill>
-          <a:ln w="12700">
-            <a:solidFill>
-              <a:schemeClr val="accent1"/>
-            </a:solidFill>
-            <a:prstDash val="solid"/>
-          </a:ln>
-        </p:spPr>
-      </p:sp>
-      <p:pic>
-        <p:nvPicPr>
-          <p:cNvPr id="17" name="icon" descr="preencoded.png">    </p:cNvPr>
-          <p:cNvPicPr>
-            <a:picLocks noChangeAspect="1"/>
-          </p:cNvPicPr>
-          <p:nvPr/>
-        </p:nvPicPr>
-        <p:blipFill>
-          <a:blip r:embed="rId3"/>
-          <a:stretch>
-            <a:fillRect/>
-          </a:stretch>
-        </p:blipFill>
-        <p:spPr>
-          <a:xfrm>
-            <a:off x="6437376" y="1591056"/>
-            <a:ext cx="246888" cy="246888"/>
-          </a:xfrm>
-          <a:prstGeom prst="rect">
-            <a:avLst/>
-          </a:prstGeom>
-        </p:spPr>
-      </p:pic>
-      <p:sp>
-        <p:nvSpPr>
-          <p:cNvPr id="18" name="Text 13"/>
+          <p:cNvPr id="26" name="Text 24"/>
           <p:cNvSpPr txBox="1"/>
           <p:nvPr/>
         </p:nvSpPr>
         <p:spPr>
           <a:xfrm>
-            <a:off x="6309360" y="2103120"/>
-            <a:ext cx="2194560" cy="548640"/>
+            <a:off x="6309360" y="3200400"/>
+            <a:ext cx="2194560" cy="320040"/>
           </a:xfrm>
           <a:prstGeom prst="rect">
             <a:avLst/>
@@ -7923,7 +8811,7 @@
                   <a:schemeClr val="tx1"/>
                 </a:solidFill>
               </a:rPr>
-              <a:t>B 的火柴立刻補位</a:t>
+              <a:t>人數額滿</a:t>
             </a:r>
             <a:endParaRPr lang="en-US" sz="1600" dirty="0"/>
           </a:p>
@@ -7931,14 +8819,14 @@
       </p:sp>
       <p:sp>
         <p:nvSpPr>
-          <p:cNvPr id="19" name="Text 14"/>
+          <p:cNvPr id="27" name="Text 25"/>
           <p:cNvSpPr txBox="1"/>
           <p:nvPr/>
         </p:nvSpPr>
         <p:spPr>
           <a:xfrm>
-            <a:off x="6309360" y="2697480"/>
-            <a:ext cx="2194560" cy="685800"/>
+            <a:off x="6309360" y="3566160"/>
+            <a:ext cx="2194560" cy="914400"/>
           </a:xfrm>
           <a:prstGeom prst="rect">
             <a:avLst/>
@@ -7959,79 +8847,7 @@
                   <a:schemeClr val="tx1"/>
                 </a:solidFill>
               </a:rPr>
-              <a:t>系統邀請她的下一位候補</a:t>
-            </a:r>
-            <a:endParaRPr lang="en-US" sz="1400" dirty="0"/>
-          </a:p>
-        </p:txBody>
-      </p:sp>
-      <p:sp>
-        <p:nvSpPr>
-          <p:cNvPr id="20" name="Text 15"/>
-          <p:cNvSpPr txBox="1"/>
-          <p:nvPr/>
-        </p:nvSpPr>
-        <p:spPr>
-          <a:xfrm>
-            <a:off x="457200" y="3794760"/>
-            <a:ext cx="8229600" cy="365760"/>
-          </a:xfrm>
-          <a:prstGeom prst="rect">
-            <a:avLst/>
-          </a:prstGeom>
-          <a:noFill/>
-          <a:ln/>
-        </p:spPr>
-        <p:txBody>
-          <a:bodyPr wrap="square" lIns="0" tIns="0" rIns="0" bIns="0" rtlCol="0" anchor="ctr"/>
-          <a:lstStyle/>
-          <a:p>
-            <a:pPr indent="0" marL="0">
-              <a:buNone/>
-            </a:pPr>
-            <a:r>
-              <a:rPr lang="en-US" sz="1600" b="1" dirty="0">
-                <a:solidFill>
-                  <a:schemeClr val="accent1"/>
-                </a:solidFill>
-              </a:rPr>
-              <a:t>做這個 App 的初衷：盡可能排滿每個人的時間。多幾個機會，對女孩是好事。</a:t>
-            </a:r>
-            <a:endParaRPr lang="en-US" sz="1600" dirty="0"/>
-          </a:p>
-        </p:txBody>
-      </p:sp>
-      <p:sp>
-        <p:nvSpPr>
-          <p:cNvPr id="21" name="Text 16"/>
-          <p:cNvSpPr txBox="1"/>
-          <p:nvPr/>
-        </p:nvSpPr>
-        <p:spPr>
-          <a:xfrm>
-            <a:off x="457200" y="4206240"/>
-            <a:ext cx="8229600" cy="320040"/>
-          </a:xfrm>
-          <a:prstGeom prst="rect">
-            <a:avLst/>
-          </a:prstGeom>
-          <a:noFill/>
-          <a:ln/>
-        </p:spPr>
-        <p:txBody>
-          <a:bodyPr wrap="square" lIns="0" tIns="0" rIns="0" bIns="0" rtlCol="0" anchor="ctr"/>
-          <a:lstStyle/>
-          <a:p>
-            <a:pPr indent="0" marL="0">
-              <a:buNone/>
-            </a:pPr>
-            <a:r>
-              <a:rPr lang="en-US" sz="1400" dirty="0">
-                <a:solidFill>
-                  <a:schemeClr val="tx1"/>
-                </a:solidFill>
-              </a:rPr>
-              <a:t>婉拒不用理由，也不欠任何人解釋；確認之後想反悔，才是「取消」。</a:t>
+              <a:t>還沒回覆的邀請改成「已額滿」，火柴收到通知</a:t>
             </a:r>
             <a:endParaRPr lang="en-US" sz="1400" dirty="0"/>
           </a:p>
@@ -8139,7 +8955,7 @@
                   <a:schemeClr val="tx1"/>
                 </a:solidFill>
               </a:rPr>
-              <a:t>已經在 LINE 談好：按「直接加入」</a:t>
+              <a:t>同一天，可以同時收到好幾張邀請</a:t>
             </a:r>
             <a:endParaRPr lang="en-US" sz="2800" dirty="0"/>
           </a:p>
@@ -8154,11 +8970,11 @@
         <p:spPr>
           <a:xfrm>
             <a:off x="457200" y="1280160"/>
-            <a:ext cx="2560320" cy="2651760"/>
+            <a:ext cx="2560320" cy="2286000"/>
           </a:xfrm>
           <a:prstGeom prst="roundRect">
             <a:avLst>
-              <a:gd name="adj" fmla="val 3571"/>
+              <a:gd name="adj" fmla="val 4000"/>
             </a:avLst>
           </a:prstGeom>
           <a:solidFill>
@@ -8258,7 +9074,7 @@
                   <a:schemeClr val="tx1"/>
                 </a:solidFill>
               </a:rPr>
-              <a:t>一步記進 App</a:t>
+              <a:t>同一天收到 A、B 兩張</a:t>
             </a:r>
             <a:endParaRPr lang="en-US" sz="1600" dirty="0"/>
           </a:p>
@@ -8273,7 +9089,7 @@
         <p:spPr>
           <a:xfrm>
             <a:off x="640080" y="2697480"/>
-            <a:ext cx="2194560" cy="1051560"/>
+            <a:ext cx="2194560" cy="685800"/>
           </a:xfrm>
           <a:prstGeom prst="rect">
             <a:avLst/>
@@ -8294,7 +9110,7 @@
                   <a:schemeClr val="tx1"/>
                 </a:solidFill>
               </a:rPr>
-              <a:t>對方不用再回覆，只會收到通知。月曆因此永遠是準的。</a:t>
+              <a:t>由你自己選，不用兩邊都回</a:t>
             </a:r>
             <a:endParaRPr lang="en-US" sz="1400" dirty="0"/>
           </a:p>
@@ -8302,18 +9118,54 @@
       </p:sp>
       <p:sp>
         <p:nvSpPr>
-          <p:cNvPr id="8" name="card"/>
+          <p:cNvPr id="8" name="Text 5"/>
+          <p:cNvSpPr txBox="1"/>
+          <p:nvPr/>
+        </p:nvSpPr>
+        <p:spPr>
+          <a:xfrm>
+            <a:off x="3017520" y="2194560"/>
+            <a:ext cx="274320" cy="457200"/>
+          </a:xfrm>
+          <a:prstGeom prst="rect">
+            <a:avLst/>
+          </a:prstGeom>
+          <a:noFill/>
+          <a:ln/>
+        </p:spPr>
+        <p:txBody>
+          <a:bodyPr wrap="square" lIns="0" tIns="0" rIns="0" bIns="0" rtlCol="0" anchor="ctr"/>
+          <a:lstStyle/>
+          <a:p>
+            <a:pPr algn="ctr" indent="0" marL="0">
+              <a:buNone/>
+            </a:pPr>
+            <a:r>
+              <a:rPr lang="en-US" sz="2400" b="1" dirty="0">
+                <a:solidFill>
+                  <a:schemeClr val="accent1"/>
+                </a:solidFill>
+              </a:rPr>
+              <a:t>→</a:t>
+            </a:r>
+            <a:endParaRPr lang="en-US" sz="2400" dirty="0"/>
+          </a:p>
+        </p:txBody>
+      </p:sp>
+      <p:sp>
+        <p:nvSpPr>
+          <p:cNvPr id="9" name="card"/>
           <p:cNvSpPr/>
           <p:nvPr/>
         </p:nvSpPr>
         <p:spPr>
           <a:xfrm>
             <a:off x="3291840" y="1280160"/>
-            <a:ext cx="2560320" cy="2651760"/>
+            <a:ext cx="2560320" cy="2286000"/>
           </a:xfrm>
           <a:prstGeom prst="roundRect">
             <a:avLst>
-              <a:gd name="adj" fmla="val 3571"/>
+              <a:gd name="adj" fmla="val 4000"/>
             </a:avLst>
           </a:prstGeom>
           <a:solidFill>
@@ -8336,7 +9188,7 @@
       </p:sp>
       <p:sp>
         <p:nvSpPr>
-          <p:cNvPr id="9" name="icon-circle"/>
+          <p:cNvPr id="10" name="icon-circle"/>
           <p:cNvSpPr/>
           <p:nvPr/>
         </p:nvSpPr>
@@ -8361,7 +9213,7 @@
       </p:sp>
       <p:pic>
         <p:nvPicPr>
-          <p:cNvPr id="10" name="icon" descr="preencoded.png">    </p:cNvPr>
+          <p:cNvPr id="11" name="icon" descr="preencoded.png">    </p:cNvPr>
           <p:cNvPicPr>
             <a:picLocks noChangeAspect="1"/>
           </p:cNvPicPr>
@@ -8385,7 +9237,7 @@
       </p:pic>
       <p:sp>
         <p:nvSpPr>
-          <p:cNvPr id="11" name="Text 7"/>
+          <p:cNvPr id="12" name="Text 8"/>
           <p:cNvSpPr txBox="1"/>
           <p:nvPr/>
         </p:nvSpPr>
@@ -8413,7 +9265,7 @@
                   <a:schemeClr val="tx1"/>
                 </a:solidFill>
               </a:rPr>
-              <a:t>她當天其他邀請自動關閉</a:t>
+              <a:t>你確認 A</a:t>
             </a:r>
             <a:endParaRPr lang="en-US" sz="1600" dirty="0"/>
           </a:p>
@@ -8421,14 +9273,14 @@
       </p:sp>
       <p:sp>
         <p:nvSpPr>
-          <p:cNvPr id="12" name="Text 8"/>
+          <p:cNvPr id="13" name="Text 9"/>
           <p:cNvSpPr txBox="1"/>
           <p:nvPr/>
         </p:nvSpPr>
         <p:spPr>
           <a:xfrm>
             <a:off x="3474720" y="2697480"/>
-            <a:ext cx="2194560" cy="1051560"/>
+            <a:ext cx="2194560" cy="685800"/>
           </a:xfrm>
           <a:prstGeom prst="rect">
             <a:avLst/>
@@ -8449,7 +9301,7 @@
                   <a:schemeClr val="tx1"/>
                 </a:solidFill>
               </a:rPr>
-              <a:t>那些火柴的案子立刻補位，不會有人撞班。</a:t>
+              <a:t>B 自動關閉</a:t>
             </a:r>
             <a:endParaRPr lang="en-US" sz="1400" dirty="0"/>
           </a:p>
@@ -8457,18 +9309,54 @@
       </p:sp>
       <p:sp>
         <p:nvSpPr>
-          <p:cNvPr id="13" name="card"/>
+          <p:cNvPr id="14" name="Text 10"/>
+          <p:cNvSpPr txBox="1"/>
+          <p:nvPr/>
+        </p:nvSpPr>
+        <p:spPr>
+          <a:xfrm>
+            <a:off x="5852160" y="2194560"/>
+            <a:ext cx="274320" cy="457200"/>
+          </a:xfrm>
+          <a:prstGeom prst="rect">
+            <a:avLst/>
+          </a:prstGeom>
+          <a:noFill/>
+          <a:ln/>
+        </p:spPr>
+        <p:txBody>
+          <a:bodyPr wrap="square" lIns="0" tIns="0" rIns="0" bIns="0" rtlCol="0" anchor="ctr"/>
+          <a:lstStyle/>
+          <a:p>
+            <a:pPr algn="ctr" indent="0" marL="0">
+              <a:buNone/>
+            </a:pPr>
+            <a:r>
+              <a:rPr lang="en-US" sz="2400" b="1" dirty="0">
+                <a:solidFill>
+                  <a:schemeClr val="accent1"/>
+                </a:solidFill>
+              </a:rPr>
+              <a:t>→</a:t>
+            </a:r>
+            <a:endParaRPr lang="en-US" sz="2400" dirty="0"/>
+          </a:p>
+        </p:txBody>
+      </p:sp>
+      <p:sp>
+        <p:nvSpPr>
+          <p:cNvPr id="15" name="card"/>
           <p:cNvSpPr/>
           <p:nvPr/>
         </p:nvSpPr>
         <p:spPr>
           <a:xfrm>
             <a:off x="6126480" y="1280160"/>
-            <a:ext cx="2560320" cy="2651760"/>
+            <a:ext cx="2560320" cy="2286000"/>
           </a:xfrm>
           <a:prstGeom prst="roundRect">
             <a:avLst>
-              <a:gd name="adj" fmla="val 3571"/>
+              <a:gd name="adj" fmla="val 4000"/>
             </a:avLst>
           </a:prstGeom>
           <a:solidFill>
@@ -8491,7 +9379,7 @@
       </p:sp>
       <p:sp>
         <p:nvSpPr>
-          <p:cNvPr id="14" name="icon-circle"/>
+          <p:cNvPr id="16" name="icon-circle"/>
           <p:cNvSpPr/>
           <p:nvPr/>
         </p:nvSpPr>
@@ -8516,7 +9404,7 @@
       </p:sp>
       <p:pic>
         <p:nvPicPr>
-          <p:cNvPr id="15" name="icon" descr="preencoded.png">    </p:cNvPr>
+          <p:cNvPr id="17" name="icon" descr="preencoded.png">    </p:cNvPr>
           <p:cNvPicPr>
             <a:picLocks noChangeAspect="1"/>
           </p:cNvPicPr>
@@ -8540,7 +9428,7 @@
       </p:pic>
       <p:sp>
         <p:nvSpPr>
-          <p:cNvPr id="16" name="Text 11"/>
+          <p:cNvPr id="18" name="Text 13"/>
           <p:cNvSpPr txBox="1"/>
           <p:nvPr/>
         </p:nvSpPr>
@@ -8568,7 +9456,7 @@
                   <a:schemeClr val="tx1"/>
                 </a:solidFill>
               </a:rPr>
-              <a:t>時薪自動帶入</a:t>
+              <a:t>B 的火柴立刻補位</a:t>
             </a:r>
             <a:endParaRPr lang="en-US" sz="1600" dirty="0"/>
           </a:p>
@@ -8576,14 +9464,14 @@
       </p:sp>
       <p:sp>
         <p:nvSpPr>
-          <p:cNvPr id="17" name="Text 12"/>
+          <p:cNvPr id="19" name="Text 14"/>
           <p:cNvSpPr txBox="1"/>
           <p:nvPr/>
         </p:nvSpPr>
         <p:spPr>
           <a:xfrm>
             <a:off x="6309360" y="2697480"/>
-            <a:ext cx="2194560" cy="1051560"/>
+            <a:ext cx="2194560" cy="685800"/>
           </a:xfrm>
           <a:prstGeom prst="rect">
             <a:avLst/>
@@ -8604,7 +9492,7 @@
                   <a:schemeClr val="tx1"/>
                 </a:solidFill>
               </a:rPr>
-              <a:t>帶入你上次和她合作的金額，第一次合作要填一次。</a:t>
+              <a:t>系統邀請她的下一位候補</a:t>
             </a:r>
             <a:endParaRPr lang="en-US" sz="1400" dirty="0"/>
           </a:p>
@@ -8612,13 +9500,13 @@
       </p:sp>
       <p:sp>
         <p:nvSpPr>
-          <p:cNvPr id="18" name="Text 13"/>
+          <p:cNvPr id="20" name="Text 15"/>
           <p:cNvSpPr txBox="1"/>
           <p:nvPr/>
         </p:nvSpPr>
         <p:spPr>
           <a:xfrm>
-            <a:off x="457200" y="4160520"/>
+            <a:off x="457200" y="3794760"/>
             <a:ext cx="8229600" cy="365760"/>
           </a:xfrm>
           <a:prstGeom prst="rect">
@@ -8635,12 +9523,48 @@
               <a:buNone/>
             </a:pPr>
             <a:r>
+              <a:rPr lang="en-US" sz="1600" b="1" dirty="0">
+                <a:solidFill>
+                  <a:schemeClr val="accent1"/>
+                </a:solidFill>
+              </a:rPr>
+              <a:t>做這個 App 的初衷：盡可能排滿每個人的時間。多幾個機會，對女孩是好事。</a:t>
+            </a:r>
+            <a:endParaRPr lang="en-US" sz="1600" dirty="0"/>
+          </a:p>
+        </p:txBody>
+      </p:sp>
+      <p:sp>
+        <p:nvSpPr>
+          <p:cNvPr id="21" name="Text 16"/>
+          <p:cNvSpPr txBox="1"/>
+          <p:nvPr/>
+        </p:nvSpPr>
+        <p:spPr>
+          <a:xfrm>
+            <a:off x="457200" y="4206240"/>
+            <a:ext cx="8229600" cy="320040"/>
+          </a:xfrm>
+          <a:prstGeom prst="rect">
+            <a:avLst/>
+          </a:prstGeom>
+          <a:noFill/>
+          <a:ln/>
+        </p:spPr>
+        <p:txBody>
+          <a:bodyPr wrap="square" lIns="0" tIns="0" rIns="0" bIns="0" rtlCol="0" anchor="ctr"/>
+          <a:lstStyle/>
+          <a:p>
+            <a:pPr indent="0" marL="0">
+              <a:buNone/>
+            </a:pPr>
+            <a:r>
               <a:rPr lang="en-US" sz="1400" dirty="0">
                 <a:solidFill>
-                  <a:schemeClr val="accent3"/>
+                  <a:schemeClr val="tx1"/>
                 </a:solidFill>
               </a:rPr>
-              <a:t>直接加入的人數不能超過需要人數，超過系統會擋下。</a:t>
+              <a:t>婉拒不用理由，也不欠任何人解釋；確認之後想反悔，才是「取消」。</a:t>
             </a:r>
             <a:endParaRPr lang="en-US" sz="1400" dirty="0"/>
           </a:p>
@@ -8748,6 +9672,615 @@
                   <a:schemeClr val="tx1"/>
                 </a:solidFill>
               </a:rPr>
+              <a:t>已經在 LINE 談好：按「直接加入」</a:t>
+            </a:r>
+            <a:endParaRPr lang="en-US" sz="2800" dirty="0"/>
+          </a:p>
+        </p:txBody>
+      </p:sp>
+      <p:sp>
+        <p:nvSpPr>
+          <p:cNvPr id="3" name="card"/>
+          <p:cNvSpPr/>
+          <p:nvPr/>
+        </p:nvSpPr>
+        <p:spPr>
+          <a:xfrm>
+            <a:off x="457200" y="1280160"/>
+            <a:ext cx="2560320" cy="2651760"/>
+          </a:xfrm>
+          <a:prstGeom prst="roundRect">
+            <a:avLst>
+              <a:gd name="adj" fmla="val 3571"/>
+            </a:avLst>
+          </a:prstGeom>
+          <a:solidFill>
+            <a:schemeClr val="bg2"/>
+          </a:solidFill>
+          <a:ln w="12700">
+            <a:solidFill>
+              <a:schemeClr val="bg2"/>
+            </a:solidFill>
+            <a:prstDash val="solid"/>
+          </a:ln>
+          <a:effectLst>
+            <a:outerShdw sx="100000" sy="100000" kx="0" ky="0" algn="bl" rotWithShape="0" blurRad="76200" dist="25400" dir="5400000">
+              <a:srgbClr val="000000">
+                <a:alpha val="12000"/>
+              </a:srgbClr>
+            </a:outerShdw>
+          </a:effectLst>
+        </p:spPr>
+      </p:sp>
+      <p:sp>
+        <p:nvSpPr>
+          <p:cNvPr id="4" name="icon-circle"/>
+          <p:cNvSpPr/>
+          <p:nvPr/>
+        </p:nvSpPr>
+        <p:spPr>
+          <a:xfrm>
+            <a:off x="640080" y="1463040"/>
+            <a:ext cx="502920" cy="502920"/>
+          </a:xfrm>
+          <a:prstGeom prst="ellipse">
+            <a:avLst/>
+          </a:prstGeom>
+          <a:solidFill>
+            <a:schemeClr val="accent1"/>
+          </a:solidFill>
+          <a:ln w="12700">
+            <a:solidFill>
+              <a:schemeClr val="accent1"/>
+            </a:solidFill>
+            <a:prstDash val="solid"/>
+          </a:ln>
+        </p:spPr>
+      </p:sp>
+      <p:pic>
+        <p:nvPicPr>
+          <p:cNvPr id="5" name="icon" descr="preencoded.png">    </p:cNvPr>
+          <p:cNvPicPr>
+            <a:picLocks noChangeAspect="1"/>
+          </p:cNvPicPr>
+          <p:nvPr/>
+        </p:nvPicPr>
+        <p:blipFill>
+          <a:blip r:embed="rId1"/>
+          <a:stretch>
+            <a:fillRect/>
+          </a:stretch>
+        </p:blipFill>
+        <p:spPr>
+          <a:xfrm>
+            <a:off x="768096" y="1591056"/>
+            <a:ext cx="246888" cy="246888"/>
+          </a:xfrm>
+          <a:prstGeom prst="rect">
+            <a:avLst/>
+          </a:prstGeom>
+        </p:spPr>
+      </p:pic>
+      <p:sp>
+        <p:nvSpPr>
+          <p:cNvPr id="6" name="Text 3"/>
+          <p:cNvSpPr txBox="1"/>
+          <p:nvPr/>
+        </p:nvSpPr>
+        <p:spPr>
+          <a:xfrm>
+            <a:off x="640080" y="2103120"/>
+            <a:ext cx="2194560" cy="548640"/>
+          </a:xfrm>
+          <a:prstGeom prst="rect">
+            <a:avLst/>
+          </a:prstGeom>
+          <a:noFill/>
+          <a:ln/>
+        </p:spPr>
+        <p:txBody>
+          <a:bodyPr wrap="square" lIns="0" tIns="0" rIns="0" bIns="0" rtlCol="0" anchor="t"/>
+          <a:lstStyle/>
+          <a:p>
+            <a:pPr indent="0" marL="0">
+              <a:buNone/>
+            </a:pPr>
+            <a:r>
+              <a:rPr lang="en-US" sz="1600" b="1" dirty="0">
+                <a:solidFill>
+                  <a:schemeClr val="tx1"/>
+                </a:solidFill>
+              </a:rPr>
+              <a:t>一步記進 App</a:t>
+            </a:r>
+            <a:endParaRPr lang="en-US" sz="1600" dirty="0"/>
+          </a:p>
+        </p:txBody>
+      </p:sp>
+      <p:sp>
+        <p:nvSpPr>
+          <p:cNvPr id="7" name="Text 4"/>
+          <p:cNvSpPr txBox="1"/>
+          <p:nvPr/>
+        </p:nvSpPr>
+        <p:spPr>
+          <a:xfrm>
+            <a:off x="640080" y="2697480"/>
+            <a:ext cx="2194560" cy="1051560"/>
+          </a:xfrm>
+          <a:prstGeom prst="rect">
+            <a:avLst/>
+          </a:prstGeom>
+          <a:noFill/>
+          <a:ln/>
+        </p:spPr>
+        <p:txBody>
+          <a:bodyPr wrap="square" lIns="0" tIns="0" rIns="0" bIns="0" rtlCol="0" anchor="t"/>
+          <a:lstStyle/>
+          <a:p>
+            <a:pPr indent="0" marL="0">
+              <a:buNone/>
+            </a:pPr>
+            <a:r>
+              <a:rPr lang="en-US" sz="1400" dirty="0">
+                <a:solidFill>
+                  <a:schemeClr val="tx1"/>
+                </a:solidFill>
+              </a:rPr>
+              <a:t>對方不用再回覆，只會收到通知。月曆因此永遠是準的。</a:t>
+            </a:r>
+            <a:endParaRPr lang="en-US" sz="1400" dirty="0"/>
+          </a:p>
+        </p:txBody>
+      </p:sp>
+      <p:sp>
+        <p:nvSpPr>
+          <p:cNvPr id="8" name="card"/>
+          <p:cNvSpPr/>
+          <p:nvPr/>
+        </p:nvSpPr>
+        <p:spPr>
+          <a:xfrm>
+            <a:off x="3291840" y="1280160"/>
+            <a:ext cx="2560320" cy="2651760"/>
+          </a:xfrm>
+          <a:prstGeom prst="roundRect">
+            <a:avLst>
+              <a:gd name="adj" fmla="val 3571"/>
+            </a:avLst>
+          </a:prstGeom>
+          <a:solidFill>
+            <a:schemeClr val="bg2"/>
+          </a:solidFill>
+          <a:ln w="12700">
+            <a:solidFill>
+              <a:schemeClr val="bg2"/>
+            </a:solidFill>
+            <a:prstDash val="solid"/>
+          </a:ln>
+          <a:effectLst>
+            <a:outerShdw sx="100000" sy="100000" kx="0" ky="0" algn="bl" rotWithShape="0" blurRad="76200" dist="25400" dir="5400000">
+              <a:srgbClr val="000000">
+                <a:alpha val="12000"/>
+              </a:srgbClr>
+            </a:outerShdw>
+          </a:effectLst>
+        </p:spPr>
+      </p:sp>
+      <p:sp>
+        <p:nvSpPr>
+          <p:cNvPr id="9" name="icon-circle"/>
+          <p:cNvSpPr/>
+          <p:nvPr/>
+        </p:nvSpPr>
+        <p:spPr>
+          <a:xfrm>
+            <a:off x="3474720" y="1463040"/>
+            <a:ext cx="502920" cy="502920"/>
+          </a:xfrm>
+          <a:prstGeom prst="ellipse">
+            <a:avLst/>
+          </a:prstGeom>
+          <a:solidFill>
+            <a:schemeClr val="accent1"/>
+          </a:solidFill>
+          <a:ln w="12700">
+            <a:solidFill>
+              <a:schemeClr val="accent1"/>
+            </a:solidFill>
+            <a:prstDash val="solid"/>
+          </a:ln>
+        </p:spPr>
+      </p:sp>
+      <p:pic>
+        <p:nvPicPr>
+          <p:cNvPr id="10" name="icon" descr="preencoded.png">    </p:cNvPr>
+          <p:cNvPicPr>
+            <a:picLocks noChangeAspect="1"/>
+          </p:cNvPicPr>
+          <p:nvPr/>
+        </p:nvPicPr>
+        <p:blipFill>
+          <a:blip r:embed="rId2"/>
+          <a:stretch>
+            <a:fillRect/>
+          </a:stretch>
+        </p:blipFill>
+        <p:spPr>
+          <a:xfrm>
+            <a:off x="3602736" y="1591056"/>
+            <a:ext cx="246888" cy="246888"/>
+          </a:xfrm>
+          <a:prstGeom prst="rect">
+            <a:avLst/>
+          </a:prstGeom>
+        </p:spPr>
+      </p:pic>
+      <p:sp>
+        <p:nvSpPr>
+          <p:cNvPr id="11" name="Text 7"/>
+          <p:cNvSpPr txBox="1"/>
+          <p:nvPr/>
+        </p:nvSpPr>
+        <p:spPr>
+          <a:xfrm>
+            <a:off x="3474720" y="2103120"/>
+            <a:ext cx="2194560" cy="548640"/>
+          </a:xfrm>
+          <a:prstGeom prst="rect">
+            <a:avLst/>
+          </a:prstGeom>
+          <a:noFill/>
+          <a:ln/>
+        </p:spPr>
+        <p:txBody>
+          <a:bodyPr wrap="square" lIns="0" tIns="0" rIns="0" bIns="0" rtlCol="0" anchor="t"/>
+          <a:lstStyle/>
+          <a:p>
+            <a:pPr indent="0" marL="0">
+              <a:buNone/>
+            </a:pPr>
+            <a:r>
+              <a:rPr lang="en-US" sz="1600" b="1" dirty="0">
+                <a:solidFill>
+                  <a:schemeClr val="tx1"/>
+                </a:solidFill>
+              </a:rPr>
+              <a:t>她當天其他邀請自動關閉</a:t>
+            </a:r>
+            <a:endParaRPr lang="en-US" sz="1600" dirty="0"/>
+          </a:p>
+        </p:txBody>
+      </p:sp>
+      <p:sp>
+        <p:nvSpPr>
+          <p:cNvPr id="12" name="Text 8"/>
+          <p:cNvSpPr txBox="1"/>
+          <p:nvPr/>
+        </p:nvSpPr>
+        <p:spPr>
+          <a:xfrm>
+            <a:off x="3474720" y="2697480"/>
+            <a:ext cx="2194560" cy="1051560"/>
+          </a:xfrm>
+          <a:prstGeom prst="rect">
+            <a:avLst/>
+          </a:prstGeom>
+          <a:noFill/>
+          <a:ln/>
+        </p:spPr>
+        <p:txBody>
+          <a:bodyPr wrap="square" lIns="0" tIns="0" rIns="0" bIns="0" rtlCol="0" anchor="t"/>
+          <a:lstStyle/>
+          <a:p>
+            <a:pPr indent="0" marL="0">
+              <a:buNone/>
+            </a:pPr>
+            <a:r>
+              <a:rPr lang="en-US" sz="1400" dirty="0">
+                <a:solidFill>
+                  <a:schemeClr val="tx1"/>
+                </a:solidFill>
+              </a:rPr>
+              <a:t>那些火柴的案子立刻補位，不會有人撞班。</a:t>
+            </a:r>
+            <a:endParaRPr lang="en-US" sz="1400" dirty="0"/>
+          </a:p>
+        </p:txBody>
+      </p:sp>
+      <p:sp>
+        <p:nvSpPr>
+          <p:cNvPr id="13" name="card"/>
+          <p:cNvSpPr/>
+          <p:nvPr/>
+        </p:nvSpPr>
+        <p:spPr>
+          <a:xfrm>
+            <a:off x="6126480" y="1280160"/>
+            <a:ext cx="2560320" cy="2651760"/>
+          </a:xfrm>
+          <a:prstGeom prst="roundRect">
+            <a:avLst>
+              <a:gd name="adj" fmla="val 3571"/>
+            </a:avLst>
+          </a:prstGeom>
+          <a:solidFill>
+            <a:schemeClr val="bg2"/>
+          </a:solidFill>
+          <a:ln w="12700">
+            <a:solidFill>
+              <a:schemeClr val="bg2"/>
+            </a:solidFill>
+            <a:prstDash val="solid"/>
+          </a:ln>
+          <a:effectLst>
+            <a:outerShdw sx="100000" sy="100000" kx="0" ky="0" algn="bl" rotWithShape="0" blurRad="76200" dist="25400" dir="5400000">
+              <a:srgbClr val="000000">
+                <a:alpha val="12000"/>
+              </a:srgbClr>
+            </a:outerShdw>
+          </a:effectLst>
+        </p:spPr>
+      </p:sp>
+      <p:sp>
+        <p:nvSpPr>
+          <p:cNvPr id="14" name="icon-circle"/>
+          <p:cNvSpPr/>
+          <p:nvPr/>
+        </p:nvSpPr>
+        <p:spPr>
+          <a:xfrm>
+            <a:off x="6309360" y="1463040"/>
+            <a:ext cx="502920" cy="502920"/>
+          </a:xfrm>
+          <a:prstGeom prst="ellipse">
+            <a:avLst/>
+          </a:prstGeom>
+          <a:solidFill>
+            <a:schemeClr val="accent1"/>
+          </a:solidFill>
+          <a:ln w="12700">
+            <a:solidFill>
+              <a:schemeClr val="accent1"/>
+            </a:solidFill>
+            <a:prstDash val="solid"/>
+          </a:ln>
+        </p:spPr>
+      </p:sp>
+      <p:pic>
+        <p:nvPicPr>
+          <p:cNvPr id="15" name="icon" descr="preencoded.png">    </p:cNvPr>
+          <p:cNvPicPr>
+            <a:picLocks noChangeAspect="1"/>
+          </p:cNvPicPr>
+          <p:nvPr/>
+        </p:nvPicPr>
+        <p:blipFill>
+          <a:blip r:embed="rId3"/>
+          <a:stretch>
+            <a:fillRect/>
+          </a:stretch>
+        </p:blipFill>
+        <p:spPr>
+          <a:xfrm>
+            <a:off x="6437376" y="1591056"/>
+            <a:ext cx="246888" cy="246888"/>
+          </a:xfrm>
+          <a:prstGeom prst="rect">
+            <a:avLst/>
+          </a:prstGeom>
+        </p:spPr>
+      </p:pic>
+      <p:sp>
+        <p:nvSpPr>
+          <p:cNvPr id="16" name="Text 11"/>
+          <p:cNvSpPr txBox="1"/>
+          <p:nvPr/>
+        </p:nvSpPr>
+        <p:spPr>
+          <a:xfrm>
+            <a:off x="6309360" y="2103120"/>
+            <a:ext cx="2194560" cy="548640"/>
+          </a:xfrm>
+          <a:prstGeom prst="rect">
+            <a:avLst/>
+          </a:prstGeom>
+          <a:noFill/>
+          <a:ln/>
+        </p:spPr>
+        <p:txBody>
+          <a:bodyPr wrap="square" lIns="0" tIns="0" rIns="0" bIns="0" rtlCol="0" anchor="t"/>
+          <a:lstStyle/>
+          <a:p>
+            <a:pPr indent="0" marL="0">
+              <a:buNone/>
+            </a:pPr>
+            <a:r>
+              <a:rPr lang="en-US" sz="1600" b="1" dirty="0">
+                <a:solidFill>
+                  <a:schemeClr val="tx1"/>
+                </a:solidFill>
+              </a:rPr>
+              <a:t>時薪自動帶入</a:t>
+            </a:r>
+            <a:endParaRPr lang="en-US" sz="1600" dirty="0"/>
+          </a:p>
+        </p:txBody>
+      </p:sp>
+      <p:sp>
+        <p:nvSpPr>
+          <p:cNvPr id="17" name="Text 12"/>
+          <p:cNvSpPr txBox="1"/>
+          <p:nvPr/>
+        </p:nvSpPr>
+        <p:spPr>
+          <a:xfrm>
+            <a:off x="6309360" y="2697480"/>
+            <a:ext cx="2194560" cy="1051560"/>
+          </a:xfrm>
+          <a:prstGeom prst="rect">
+            <a:avLst/>
+          </a:prstGeom>
+          <a:noFill/>
+          <a:ln/>
+        </p:spPr>
+        <p:txBody>
+          <a:bodyPr wrap="square" lIns="0" tIns="0" rIns="0" bIns="0" rtlCol="0" anchor="t"/>
+          <a:lstStyle/>
+          <a:p>
+            <a:pPr indent="0" marL="0">
+              <a:buNone/>
+            </a:pPr>
+            <a:r>
+              <a:rPr lang="en-US" sz="1400" dirty="0">
+                <a:solidFill>
+                  <a:schemeClr val="tx1"/>
+                </a:solidFill>
+              </a:rPr>
+              <a:t>帶入你上次和她合作的金額，第一次合作要填一次。</a:t>
+            </a:r>
+            <a:endParaRPr lang="en-US" sz="1400" dirty="0"/>
+          </a:p>
+        </p:txBody>
+      </p:sp>
+      <p:sp>
+        <p:nvSpPr>
+          <p:cNvPr id="18" name="Text 13"/>
+          <p:cNvSpPr txBox="1"/>
+          <p:nvPr/>
+        </p:nvSpPr>
+        <p:spPr>
+          <a:xfrm>
+            <a:off x="457200" y="4160520"/>
+            <a:ext cx="8229600" cy="365760"/>
+          </a:xfrm>
+          <a:prstGeom prst="rect">
+            <a:avLst/>
+          </a:prstGeom>
+          <a:noFill/>
+          <a:ln/>
+        </p:spPr>
+        <p:txBody>
+          <a:bodyPr wrap="square" lIns="0" tIns="0" rIns="0" bIns="0" rtlCol="0" anchor="ctr"/>
+          <a:lstStyle/>
+          <a:p>
+            <a:pPr indent="0" marL="0">
+              <a:buNone/>
+            </a:pPr>
+            <a:r>
+              <a:rPr lang="en-US" sz="1400" dirty="0">
+                <a:solidFill>
+                  <a:schemeClr val="accent3"/>
+                </a:solidFill>
+              </a:rPr>
+              <a:t>直接加入的人數不能超過需要人數，超過系統會擋下。</a:t>
+            </a:r>
+            <a:endParaRPr lang="en-US" sz="1400" dirty="0"/>
+          </a:p>
+        </p:txBody>
+      </p:sp>
+      <p:sp>
+        <p:nvSpPr>
+          <p:cNvPr id="25" name="Slide Number Placeholder 0"/>
+          <p:cNvSpPr>
+            <a:spLocks noGrp="1"/>
+          </p:cNvSpPr>
+          <p:nvPr>
+            <p:ph type="sldNum" sz="quarter" idx="4294967295"/>
+          </p:nvPr>
+        </p:nvSpPr>
+        <p:spPr>
+          <a:xfrm>
+            <a:off x="8321040" y="4754880"/>
+            <a:ext cx="457200" cy="274320"/>
+          </a:xfrm>
+          <a:prstGeom prst="rect">
+            <a:avLst/>
+          </a:prstGeom>
+          <a:extLst>
+            <a:ext uri="{C572A759-6A51-4108-AA02-DFA0A04FC94B}">
+              <ma14:wrappingTextBoxFlag xmlns:ma14="http://schemas.microsoft.com/office/mac/drawingml/2011/main" val="0"/>
+            </a:ext>
+          </a:extLst>
+        </p:spPr>
+        <p:txBody>
+          <a:bodyPr/>
+          <a:lstStyle>
+            <a:lvl1pPr>
+              <a:defRPr sz="1000">
+                <a:solidFill>
+                  <a:schemeClr val="accent3"/>
+                </a:solidFill>
+              </a:defRPr>
+            </a:lvl1pPr>
+          </a:lstStyle>
+          <a:p>
+            <a:pPr algn="r"/>
+            <a:fld id="{F7021451-1387-4CA6-816F-3879F97B5CBC}" type="slidenum">
+              <a:rPr b="0" lang="en-US"/>
+              <a:t>7</a:t>
+            </a:fld>
+            <a:endParaRPr lang="en-US"/>
+          </a:p>
+        </p:txBody>
+      </p:sp>
+    </p:spTree>
+  </p:cSld>
+  <p:clrMapOvr>
+    <a:masterClrMapping/>
+  </p:clrMapOvr>
+</p:sld>
+</file>
+
+<file path=ppt/slides/slide8.xml><?xml version="1.0" encoding="utf-8"?>
+<p:sld xmlns:a="http://schemas.openxmlformats.org/drawingml/2006/main" xmlns:r="http://schemas.openxmlformats.org/officeDocument/2006/relationships" xmlns:p="http://schemas.openxmlformats.org/presentationml/2006/main">
+  <p:cSld name="Slide 8">
+    <p:spTree>
+      <p:nvGrpSpPr>
+        <p:cNvPr id="1" name=""/>
+        <p:cNvGrpSpPr/>
+        <p:nvPr/>
+      </p:nvGrpSpPr>
+      <p:grpSpPr>
+        <a:xfrm>
+          <a:off x="0" y="0"/>
+          <a:ext cx="0" cy="0"/>
+          <a:chOff x="0" y="0"/>
+          <a:chExt cx="0" cy="0"/>
+        </a:xfrm>
+      </p:grpSpPr>
+      <p:sp>
+        <p:nvSpPr>
+          <p:cNvPr id="2" name="Text 0"/>
+          <p:cNvSpPr/>
+          <p:nvPr>
+            <p:ph idx="100" type="title" hasCustomPrompt="1"/>
+          </p:nvPr>
+        </p:nvSpPr>
+        <p:spPr>
+          <a:xfrm>
+            <a:off x="457200" y="274320"/>
+            <a:ext cx="8229600" cy="731520"/>
+          </a:xfrm>
+          <a:prstGeom prst="rect">
+            <a:avLst/>
+          </a:prstGeom>
+          <a:noFill/>
+          <a:ln/>
+        </p:spPr>
+        <p:txBody>
+          <a:bodyPr wrap="square" lIns="0" tIns="0" rIns="0" bIns="0" rtlCol="0" anchor="ctr"/>
+          <a:lstStyle/>
+          <a:p>
+            <a:pPr algn="l" indent="0" marL="0">
+              <a:buNone/>
+            </a:pPr>
+            <a:r>
+              <a:rPr lang="en-US" sz="2800" b="1" dirty="0">
+                <a:solidFill>
+                  <a:schemeClr val="tx1"/>
+                </a:solidFill>
+              </a:rPr>
               <a:t>倒數時鐘怎麼走</a:t>
             </a:r>
             <a:endParaRPr lang="en-US" sz="2800" dirty="0"/>
@@ -8756,7 +10289,7 @@
       </p:sp>
       <p:graphicFrame>
         <p:nvGraphicFramePr>
-          <p:cNvPr id="8" name="Table 0"/>
+          <p:cNvPr id="9" name="Table 0"/>
           <p:cNvGraphicFramePr>
             <a:graphicFrameLocks noGrp="1"/>
           </p:cNvGraphicFramePr>
@@ -9610,615 +11143,6 @@
             <a:pPr algn="r"/>
             <a:fld id="{F7021451-1387-4CA6-816F-3879F97B5CBC}" type="slidenum">
               <a:rPr b="0" lang="en-US"/>
-              <a:t>7</a:t>
-            </a:fld>
-            <a:endParaRPr lang="en-US"/>
-          </a:p>
-        </p:txBody>
-      </p:sp>
-    </p:spTree>
-  </p:cSld>
-  <p:clrMapOvr>
-    <a:masterClrMapping/>
-  </p:clrMapOvr>
-</p:sld>
-</file>
-
-<file path=ppt/slides/slide8.xml><?xml version="1.0" encoding="utf-8"?>
-<p:sld xmlns:a="http://schemas.openxmlformats.org/drawingml/2006/main" xmlns:r="http://schemas.openxmlformats.org/officeDocument/2006/relationships" xmlns:p="http://schemas.openxmlformats.org/presentationml/2006/main">
-  <p:cSld name="Slide 8">
-    <p:spTree>
-      <p:nvGrpSpPr>
-        <p:cNvPr id="1" name=""/>
-        <p:cNvGrpSpPr/>
-        <p:nvPr/>
-      </p:nvGrpSpPr>
-      <p:grpSpPr>
-        <a:xfrm>
-          <a:off x="0" y="0"/>
-          <a:ext cx="0" cy="0"/>
-          <a:chOff x="0" y="0"/>
-          <a:chExt cx="0" cy="0"/>
-        </a:xfrm>
-      </p:grpSpPr>
-      <p:sp>
-        <p:nvSpPr>
-          <p:cNvPr id="2" name="Text 0"/>
-          <p:cNvSpPr/>
-          <p:nvPr>
-            <p:ph idx="100" type="title" hasCustomPrompt="1"/>
-          </p:nvPr>
-        </p:nvSpPr>
-        <p:spPr>
-          <a:xfrm>
-            <a:off x="457200" y="274320"/>
-            <a:ext cx="8229600" cy="731520"/>
-          </a:xfrm>
-          <a:prstGeom prst="rect">
-            <a:avLst/>
-          </a:prstGeom>
-          <a:noFill/>
-          <a:ln/>
-        </p:spPr>
-        <p:txBody>
-          <a:bodyPr wrap="square" lIns="0" tIns="0" rIns="0" bIns="0" rtlCol="0" anchor="ctr"/>
-          <a:lstStyle/>
-          <a:p>
-            <a:pPr algn="l" indent="0" marL="0">
-              <a:buNone/>
-            </a:pPr>
-            <a:r>
-              <a:rPr lang="en-US" sz="2800" b="1" dirty="0">
-                <a:solidFill>
-                  <a:schemeClr val="tx1"/>
-                </a:solidFill>
-              </a:rPr>
-              <a:t>火柴自己也算一個人</a:t>
-            </a:r>
-            <a:endParaRPr lang="en-US" sz="2800" dirty="0"/>
-          </a:p>
-        </p:txBody>
-      </p:sp>
-      <p:sp>
-        <p:nvSpPr>
-          <p:cNvPr id="3" name="card"/>
-          <p:cNvSpPr/>
-          <p:nvPr/>
-        </p:nvSpPr>
-        <p:spPr>
-          <a:xfrm>
-            <a:off x="457200" y="1280160"/>
-            <a:ext cx="2560320" cy="2468880"/>
-          </a:xfrm>
-          <a:prstGeom prst="roundRect">
-            <a:avLst>
-              <a:gd name="adj" fmla="val 3704"/>
-            </a:avLst>
-          </a:prstGeom>
-          <a:solidFill>
-            <a:schemeClr val="bg2"/>
-          </a:solidFill>
-          <a:ln w="12700">
-            <a:solidFill>
-              <a:schemeClr val="bg2"/>
-            </a:solidFill>
-            <a:prstDash val="solid"/>
-          </a:ln>
-          <a:effectLst>
-            <a:outerShdw sx="100000" sy="100000" kx="0" ky="0" algn="bl" rotWithShape="0" blurRad="76200" dist="25400" dir="5400000">
-              <a:srgbClr val="000000">
-                <a:alpha val="12000"/>
-              </a:srgbClr>
-            </a:outerShdw>
-          </a:effectLst>
-        </p:spPr>
-      </p:sp>
-      <p:sp>
-        <p:nvSpPr>
-          <p:cNvPr id="4" name="icon-circle"/>
-          <p:cNvSpPr/>
-          <p:nvPr/>
-        </p:nvSpPr>
-        <p:spPr>
-          <a:xfrm>
-            <a:off x="640080" y="1463040"/>
-            <a:ext cx="502920" cy="502920"/>
-          </a:xfrm>
-          <a:prstGeom prst="ellipse">
-            <a:avLst/>
-          </a:prstGeom>
-          <a:solidFill>
-            <a:schemeClr val="accent1"/>
-          </a:solidFill>
-          <a:ln w="12700">
-            <a:solidFill>
-              <a:schemeClr val="accent1"/>
-            </a:solidFill>
-            <a:prstDash val="solid"/>
-          </a:ln>
-        </p:spPr>
-      </p:sp>
-      <p:pic>
-        <p:nvPicPr>
-          <p:cNvPr id="5" name="icon" descr="preencoded.png">    </p:cNvPr>
-          <p:cNvPicPr>
-            <a:picLocks noChangeAspect="1"/>
-          </p:cNvPicPr>
-          <p:nvPr/>
-        </p:nvPicPr>
-        <p:blipFill>
-          <a:blip r:embed="rId1"/>
-          <a:stretch>
-            <a:fillRect/>
-          </a:stretch>
-        </p:blipFill>
-        <p:spPr>
-          <a:xfrm>
-            <a:off x="768096" y="1591056"/>
-            <a:ext cx="246888" cy="246888"/>
-          </a:xfrm>
-          <a:prstGeom prst="rect">
-            <a:avLst/>
-          </a:prstGeom>
-        </p:spPr>
-      </p:pic>
-      <p:sp>
-        <p:nvSpPr>
-          <p:cNvPr id="6" name="Text 3"/>
-          <p:cNvSpPr txBox="1"/>
-          <p:nvPr/>
-        </p:nvSpPr>
-        <p:spPr>
-          <a:xfrm>
-            <a:off x="640080" y="2103120"/>
-            <a:ext cx="2194560" cy="548640"/>
-          </a:xfrm>
-          <a:prstGeom prst="rect">
-            <a:avLst/>
-          </a:prstGeom>
-          <a:noFill/>
-          <a:ln/>
-        </p:spPr>
-        <p:txBody>
-          <a:bodyPr wrap="square" lIns="0" tIns="0" rIns="0" bIns="0" rtlCol="0" anchor="t"/>
-          <a:lstStyle/>
-          <a:p>
-            <a:pPr indent="0" marL="0">
-              <a:buNone/>
-            </a:pPr>
-            <a:r>
-              <a:rPr lang="en-US" sz="1600" b="1" dirty="0">
-                <a:solidFill>
-                  <a:schemeClr val="tx1"/>
-                </a:solidFill>
-              </a:rPr>
-              <a:t>人數填「含我」</a:t>
-            </a:r>
-            <a:endParaRPr lang="en-US" sz="1600" dirty="0"/>
-          </a:p>
-        </p:txBody>
-      </p:sp>
-      <p:sp>
-        <p:nvSpPr>
-          <p:cNvPr id="7" name="Text 4"/>
-          <p:cNvSpPr txBox="1"/>
-          <p:nvPr/>
-        </p:nvSpPr>
-        <p:spPr>
-          <a:xfrm>
-            <a:off x="640080" y="2697480"/>
-            <a:ext cx="2194560" cy="868680"/>
-          </a:xfrm>
-          <a:prstGeom prst="rect">
-            <a:avLst/>
-          </a:prstGeom>
-          <a:noFill/>
-          <a:ln/>
-        </p:spPr>
-        <p:txBody>
-          <a:bodyPr wrap="square" lIns="0" tIns="0" rIns="0" bIns="0" rtlCol="0" anchor="t"/>
-          <a:lstStyle/>
-          <a:p>
-            <a:pPr indent="0" marL="0">
-              <a:buNone/>
-            </a:pPr>
-            <a:r>
-              <a:rPr lang="en-US" sz="1400" dirty="0">
-                <a:solidFill>
-                  <a:schemeClr val="tx1"/>
-                </a:solidFill>
-              </a:rPr>
-              <a:t>填 3 人，系統只邀 2 位。火柴自己自動算已確認。</a:t>
-            </a:r>
-            <a:endParaRPr lang="en-US" sz="1400" dirty="0"/>
-          </a:p>
-        </p:txBody>
-      </p:sp>
-      <p:sp>
-        <p:nvSpPr>
-          <p:cNvPr id="8" name="card"/>
-          <p:cNvSpPr/>
-          <p:nvPr/>
-        </p:nvSpPr>
-        <p:spPr>
-          <a:xfrm>
-            <a:off x="3291840" y="1280160"/>
-            <a:ext cx="2560320" cy="2468880"/>
-          </a:xfrm>
-          <a:prstGeom prst="roundRect">
-            <a:avLst>
-              <a:gd name="adj" fmla="val 3704"/>
-            </a:avLst>
-          </a:prstGeom>
-          <a:solidFill>
-            <a:schemeClr val="bg2"/>
-          </a:solidFill>
-          <a:ln w="12700">
-            <a:solidFill>
-              <a:schemeClr val="bg2"/>
-            </a:solidFill>
-            <a:prstDash val="solid"/>
-          </a:ln>
-          <a:effectLst>
-            <a:outerShdw sx="100000" sy="100000" kx="0" ky="0" algn="bl" rotWithShape="0" blurRad="76200" dist="25400" dir="5400000">
-              <a:srgbClr val="000000">
-                <a:alpha val="12000"/>
-              </a:srgbClr>
-            </a:outerShdw>
-          </a:effectLst>
-        </p:spPr>
-      </p:sp>
-      <p:sp>
-        <p:nvSpPr>
-          <p:cNvPr id="9" name="icon-circle"/>
-          <p:cNvSpPr/>
-          <p:nvPr/>
-        </p:nvSpPr>
-        <p:spPr>
-          <a:xfrm>
-            <a:off x="3474720" y="1463040"/>
-            <a:ext cx="502920" cy="502920"/>
-          </a:xfrm>
-          <a:prstGeom prst="ellipse">
-            <a:avLst/>
-          </a:prstGeom>
-          <a:solidFill>
-            <a:schemeClr val="accent1"/>
-          </a:solidFill>
-          <a:ln w="12700">
-            <a:solidFill>
-              <a:schemeClr val="accent1"/>
-            </a:solidFill>
-            <a:prstDash val="solid"/>
-          </a:ln>
-        </p:spPr>
-      </p:sp>
-      <p:pic>
-        <p:nvPicPr>
-          <p:cNvPr id="10" name="icon" descr="preencoded.png">    </p:cNvPr>
-          <p:cNvPicPr>
-            <a:picLocks noChangeAspect="1"/>
-          </p:cNvPicPr>
-          <p:nvPr/>
-        </p:nvPicPr>
-        <p:blipFill>
-          <a:blip r:embed="rId2"/>
-          <a:stretch>
-            <a:fillRect/>
-          </a:stretch>
-        </p:blipFill>
-        <p:spPr>
-          <a:xfrm>
-            <a:off x="3602736" y="1591056"/>
-            <a:ext cx="246888" cy="246888"/>
-          </a:xfrm>
-          <a:prstGeom prst="rect">
-            <a:avLst/>
-          </a:prstGeom>
-        </p:spPr>
-      </p:pic>
-      <p:sp>
-        <p:nvSpPr>
-          <p:cNvPr id="11" name="Text 7"/>
-          <p:cNvSpPr txBox="1"/>
-          <p:nvPr/>
-        </p:nvSpPr>
-        <p:spPr>
-          <a:xfrm>
-            <a:off x="3474720" y="2103120"/>
-            <a:ext cx="2194560" cy="548640"/>
-          </a:xfrm>
-          <a:prstGeom prst="rect">
-            <a:avLst/>
-          </a:prstGeom>
-          <a:noFill/>
-          <a:ln/>
-        </p:spPr>
-        <p:txBody>
-          <a:bodyPr wrap="square" lIns="0" tIns="0" rIns="0" bIns="0" rtlCol="0" anchor="t"/>
-          <a:lstStyle/>
-          <a:p>
-            <a:pPr indent="0" marL="0">
-              <a:buNone/>
-            </a:pPr>
-            <a:r>
-              <a:rPr lang="en-US" sz="1600" b="1" dirty="0">
-                <a:solidFill>
-                  <a:schemeClr val="tx1"/>
-                </a:solidFill>
-              </a:rPr>
-              <a:t>那天你不能被別人約</a:t>
-            </a:r>
-            <a:endParaRPr lang="en-US" sz="1600" dirty="0"/>
-          </a:p>
-        </p:txBody>
-      </p:sp>
-      <p:sp>
-        <p:nvSpPr>
-          <p:cNvPr id="12" name="Text 8"/>
-          <p:cNvSpPr txBox="1"/>
-          <p:nvPr/>
-        </p:nvSpPr>
-        <p:spPr>
-          <a:xfrm>
-            <a:off x="3474720" y="2697480"/>
-            <a:ext cx="2194560" cy="868680"/>
-          </a:xfrm>
-          <a:prstGeom prst="rect">
-            <a:avLst/>
-          </a:prstGeom>
-          <a:noFill/>
-          <a:ln/>
-        </p:spPr>
-        <p:txBody>
-          <a:bodyPr wrap="square" lIns="0" tIns="0" rIns="0" bIns="0" rtlCol="0" anchor="t"/>
-          <a:lstStyle/>
-          <a:p>
-            <a:pPr indent="0" marL="0">
-              <a:buNone/>
-            </a:pPr>
-            <a:r>
-              <a:rPr lang="en-US" sz="1400" dirty="0">
-                <a:solidFill>
-                  <a:schemeClr val="tx1"/>
-                </a:solidFill>
-              </a:rPr>
-              <a:t>「我也出班」的那天，你已有班，其他火柴選不了你。</a:t>
-            </a:r>
-            <a:endParaRPr lang="en-US" sz="1400" dirty="0"/>
-          </a:p>
-        </p:txBody>
-      </p:sp>
-      <p:sp>
-        <p:nvSpPr>
-          <p:cNvPr id="13" name="card"/>
-          <p:cNvSpPr/>
-          <p:nvPr/>
-        </p:nvSpPr>
-        <p:spPr>
-          <a:xfrm>
-            <a:off x="6126480" y="1280160"/>
-            <a:ext cx="2560320" cy="2468880"/>
-          </a:xfrm>
-          <a:prstGeom prst="roundRect">
-            <a:avLst>
-              <a:gd name="adj" fmla="val 3704"/>
-            </a:avLst>
-          </a:prstGeom>
-          <a:solidFill>
-            <a:schemeClr val="bg2"/>
-          </a:solidFill>
-          <a:ln w="12700">
-            <a:solidFill>
-              <a:schemeClr val="bg2"/>
-            </a:solidFill>
-            <a:prstDash val="solid"/>
-          </a:ln>
-          <a:effectLst>
-            <a:outerShdw sx="100000" sy="100000" kx="0" ky="0" algn="bl" rotWithShape="0" blurRad="76200" dist="25400" dir="5400000">
-              <a:srgbClr val="000000">
-                <a:alpha val="12000"/>
-              </a:srgbClr>
-            </a:outerShdw>
-          </a:effectLst>
-        </p:spPr>
-      </p:sp>
-      <p:sp>
-        <p:nvSpPr>
-          <p:cNvPr id="14" name="icon-circle"/>
-          <p:cNvSpPr/>
-          <p:nvPr/>
-        </p:nvSpPr>
-        <p:spPr>
-          <a:xfrm>
-            <a:off x="6309360" y="1463040"/>
-            <a:ext cx="502920" cy="502920"/>
-          </a:xfrm>
-          <a:prstGeom prst="ellipse">
-            <a:avLst/>
-          </a:prstGeom>
-          <a:solidFill>
-            <a:schemeClr val="accent1"/>
-          </a:solidFill>
-          <a:ln w="12700">
-            <a:solidFill>
-              <a:schemeClr val="accent1"/>
-            </a:solidFill>
-            <a:prstDash val="solid"/>
-          </a:ln>
-        </p:spPr>
-      </p:sp>
-      <p:pic>
-        <p:nvPicPr>
-          <p:cNvPr id="15" name="icon" descr="preencoded.png">    </p:cNvPr>
-          <p:cNvPicPr>
-            <a:picLocks noChangeAspect="1"/>
-          </p:cNvPicPr>
-          <p:nvPr/>
-        </p:nvPicPr>
-        <p:blipFill>
-          <a:blip r:embed="rId3"/>
-          <a:stretch>
-            <a:fillRect/>
-          </a:stretch>
-        </p:blipFill>
-        <p:spPr>
-          <a:xfrm>
-            <a:off x="6437376" y="1591056"/>
-            <a:ext cx="246888" cy="246888"/>
-          </a:xfrm>
-          <a:prstGeom prst="rect">
-            <a:avLst/>
-          </a:prstGeom>
-        </p:spPr>
-      </p:pic>
-      <p:sp>
-        <p:nvSpPr>
-          <p:cNvPr id="16" name="Text 11"/>
-          <p:cNvSpPr txBox="1"/>
-          <p:nvPr/>
-        </p:nvSpPr>
-        <p:spPr>
-          <a:xfrm>
-            <a:off x="6309360" y="2103120"/>
-            <a:ext cx="2194560" cy="548640"/>
-          </a:xfrm>
-          <a:prstGeom prst="rect">
-            <a:avLst/>
-          </a:prstGeom>
-          <a:noFill/>
-          <a:ln/>
-        </p:spPr>
-        <p:txBody>
-          <a:bodyPr wrap="square" lIns="0" tIns="0" rIns="0" bIns="0" rtlCol="0" anchor="t"/>
-          <a:lstStyle/>
-          <a:p>
-            <a:pPr indent="0" marL="0">
-              <a:buNone/>
-            </a:pPr>
-            <a:r>
-              <a:rPr lang="en-US" sz="1600" b="1" dirty="0">
-                <a:solidFill>
-                  <a:schemeClr val="tx1"/>
-                </a:solidFill>
-              </a:rPr>
-              <a:t>點燃時自動關掉你的其他邀請</a:t>
-            </a:r>
-            <a:endParaRPr lang="en-US" sz="1600" dirty="0"/>
-          </a:p>
-        </p:txBody>
-      </p:sp>
-      <p:sp>
-        <p:nvSpPr>
-          <p:cNvPr id="17" name="Text 12"/>
-          <p:cNvSpPr txBox="1"/>
-          <p:nvPr/>
-        </p:nvSpPr>
-        <p:spPr>
-          <a:xfrm>
-            <a:off x="6309360" y="2697480"/>
-            <a:ext cx="2194560" cy="868680"/>
-          </a:xfrm>
-          <a:prstGeom prst="rect">
-            <a:avLst/>
-          </a:prstGeom>
-          <a:noFill/>
-          <a:ln/>
-        </p:spPr>
-        <p:txBody>
-          <a:bodyPr wrap="square" lIns="0" tIns="0" rIns="0" bIns="0" rtlCol="0" anchor="t"/>
-          <a:lstStyle/>
-          <a:p>
-            <a:pPr indent="0" marL="0">
-              <a:buNone/>
-            </a:pPr>
-            <a:r>
-              <a:rPr lang="en-US" sz="1400" dirty="0">
-                <a:solidFill>
-                  <a:schemeClr val="tx1"/>
-                </a:solidFill>
-              </a:rPr>
-              <a:t>那些火柴的案子立刻補位。</a:t>
-            </a:r>
-            <a:endParaRPr lang="en-US" sz="1400" dirty="0"/>
-          </a:p>
-        </p:txBody>
-      </p:sp>
-      <p:sp>
-        <p:nvSpPr>
-          <p:cNvPr id="18" name="Text 13"/>
-          <p:cNvSpPr txBox="1"/>
-          <p:nvPr/>
-        </p:nvSpPr>
-        <p:spPr>
-          <a:xfrm>
-            <a:off x="457200" y="3977640"/>
-            <a:ext cx="8229600" cy="548640"/>
-          </a:xfrm>
-          <a:prstGeom prst="rect">
-            <a:avLst/>
-          </a:prstGeom>
-          <a:noFill/>
-          <a:ln/>
-        </p:spPr>
-        <p:txBody>
-          <a:bodyPr wrap="square" lIns="0" tIns="0" rIns="0" bIns="0" rtlCol="0" anchor="t"/>
-          <a:lstStyle/>
-          <a:p>
-            <a:pPr indent="0" marL="0">
-              <a:buNone/>
-            </a:pPr>
-            <a:r>
-              <a:rPr lang="en-US" sz="1400" dirty="0">
-                <a:solidFill>
-                  <a:schemeClr val="tx1"/>
-                </a:solidFill>
-              </a:rPr>
-              <a:t>只接洽、不出班？把「我也出班」關掉，你那天仍然有空，還能當別人的女孩。</a:t>
-            </a:r>
-            <a:endParaRPr lang="en-US" sz="1400" dirty="0"/>
-          </a:p>
-        </p:txBody>
-      </p:sp>
-      <p:sp>
-        <p:nvSpPr>
-          <p:cNvPr id="25" name="Slide Number Placeholder 0"/>
-          <p:cNvSpPr>
-            <a:spLocks noGrp="1"/>
-          </p:cNvSpPr>
-          <p:nvPr>
-            <p:ph type="sldNum" sz="quarter" idx="4294967295"/>
-          </p:nvPr>
-        </p:nvSpPr>
-        <p:spPr>
-          <a:xfrm>
-            <a:off x="8321040" y="4754880"/>
-            <a:ext cx="457200" cy="274320"/>
-          </a:xfrm>
-          <a:prstGeom prst="rect">
-            <a:avLst/>
-          </a:prstGeom>
-          <a:extLst>
-            <a:ext uri="{C572A759-6A51-4108-AA02-DFA0A04FC94B}">
-              <ma14:wrappingTextBoxFlag xmlns:ma14="http://schemas.microsoft.com/office/mac/drawingml/2011/main" val="0"/>
-            </a:ext>
-          </a:extLst>
-        </p:spPr>
-        <p:txBody>
-          <a:bodyPr/>
-          <a:lstStyle>
-            <a:lvl1pPr>
-              <a:defRPr sz="1000">
-                <a:solidFill>
-                  <a:schemeClr val="accent3"/>
-                </a:solidFill>
-              </a:defRPr>
-            </a:lvl1pPr>
-          </a:lstStyle>
-          <a:p>
-            <a:pPr algn="r"/>
-            <a:fld id="{F7021451-1387-4CA6-816F-3879F97B5CBC}" type="slidenum">
-              <a:rPr b="0" lang="en-US"/>
               <a:t>8</a:t>
             </a:fld>
             <a:endParaRPr lang="en-US"/>
@@ -10282,7 +11206,7 @@
                   <a:schemeClr val="tx1"/>
                 </a:solidFill>
               </a:rPr>
-              <a:t>系統默默在做的事</a:t>
+              <a:t>火柴自己也算一個人</a:t>
             </a:r>
             <a:endParaRPr lang="en-US" sz="2800" dirty="0"/>
           </a:p>
@@ -10296,12 +11220,12 @@
         </p:nvSpPr>
         <p:spPr>
           <a:xfrm>
-            <a:off x="457200" y="1188720"/>
-            <a:ext cx="4023360" cy="1554480"/>
+            <a:off x="457200" y="1280160"/>
+            <a:ext cx="2560320" cy="2468880"/>
           </a:xfrm>
           <a:prstGeom prst="roundRect">
             <a:avLst>
-              <a:gd name="adj" fmla="val 5882"/>
+              <a:gd name="adj" fmla="val 3704"/>
             </a:avLst>
           </a:prstGeom>
           <a:solidFill>
@@ -10324,86 +11248,14 @@
       </p:sp>
       <p:sp>
         <p:nvSpPr>
-          <p:cNvPr id="4" name="Text 2"/>
-          <p:cNvSpPr txBox="1"/>
-          <p:nvPr/>
-        </p:nvSpPr>
-        <p:spPr>
-          <a:xfrm>
-            <a:off x="640080" y="1371600"/>
-            <a:ext cx="3657600" cy="320040"/>
-          </a:xfrm>
-          <a:prstGeom prst="rect">
-            <a:avLst/>
-          </a:prstGeom>
-          <a:noFill/>
-          <a:ln/>
-        </p:spPr>
-        <p:txBody>
-          <a:bodyPr wrap="square" lIns="0" tIns="0" rIns="0" bIns="0" rtlCol="0" anchor="t"/>
-          <a:lstStyle/>
-          <a:p>
-            <a:pPr indent="0" marL="0">
-              <a:buNone/>
-            </a:pPr>
-            <a:r>
-              <a:rPr lang="en-US" sz="1600" b="1" dirty="0">
-                <a:solidFill>
-                  <a:schemeClr val="tx1"/>
-                </a:solidFill>
-              </a:rPr>
-              <a:t>輪到的候補已有班，直接跳過</a:t>
-            </a:r>
-            <a:endParaRPr lang="en-US" sz="1600" dirty="0"/>
-          </a:p>
-        </p:txBody>
-      </p:sp>
-      <p:sp>
-        <p:nvSpPr>
-          <p:cNvPr id="5" name="Text 3"/>
-          <p:cNvSpPr txBox="1"/>
-          <p:nvPr/>
-        </p:nvSpPr>
-        <p:spPr>
-          <a:xfrm>
-            <a:off x="640080" y="1737360"/>
-            <a:ext cx="3657600" cy="822960"/>
-          </a:xfrm>
-          <a:prstGeom prst="rect">
-            <a:avLst/>
-          </a:prstGeom>
-          <a:noFill/>
-          <a:ln/>
-        </p:spPr>
-        <p:txBody>
-          <a:bodyPr wrap="square" lIns="0" tIns="0" rIns="0" bIns="0" rtlCol="0" anchor="t"/>
-          <a:lstStyle/>
-          <a:p>
-            <a:pPr indent="0" marL="0">
-              <a:buNone/>
-            </a:pPr>
-            <a:r>
-              <a:rPr lang="en-US" sz="1400" dirty="0">
-                <a:solidFill>
-                  <a:schemeClr val="tx1"/>
-                </a:solidFill>
-              </a:rPr>
-              <a:t>或是帳號被暫停的人，都不會被打擾，也不用火柴處理。</a:t>
-            </a:r>
-            <a:endParaRPr lang="en-US" sz="1400" dirty="0"/>
-          </a:p>
-        </p:txBody>
-      </p:sp>
-      <p:sp>
-        <p:nvSpPr>
-          <p:cNvPr id="6" name="icon-circle"/>
+          <p:cNvPr id="4" name="icon-circle"/>
           <p:cNvSpPr/>
           <p:nvPr/>
         </p:nvSpPr>
         <p:spPr>
           <a:xfrm>
-            <a:off x="3840480" y="1325880"/>
-            <a:ext cx="457200" cy="457200"/>
+            <a:off x="640080" y="1463040"/>
+            <a:ext cx="502920" cy="502920"/>
           </a:xfrm>
           <a:prstGeom prst="ellipse">
             <a:avLst/>
@@ -10421,7 +11273,7 @@
       </p:sp>
       <p:pic>
         <p:nvPicPr>
-          <p:cNvPr id="7" name="icon" descr="preencoded.png">    </p:cNvPr>
+          <p:cNvPr id="5" name="icon" descr="preencoded.png">    </p:cNvPr>
           <p:cNvPicPr>
             <a:picLocks noChangeAspect="1"/>
           </p:cNvPicPr>
@@ -10435,14 +11287,86 @@
         </p:blipFill>
         <p:spPr>
           <a:xfrm>
-            <a:off x="3950208" y="1435608"/>
-            <a:ext cx="237744" cy="237744"/>
+            <a:off x="768096" y="1591056"/>
+            <a:ext cx="246888" cy="246888"/>
           </a:xfrm>
           <a:prstGeom prst="rect">
             <a:avLst/>
           </a:prstGeom>
         </p:spPr>
       </p:pic>
+      <p:sp>
+        <p:nvSpPr>
+          <p:cNvPr id="6" name="Text 3"/>
+          <p:cNvSpPr txBox="1"/>
+          <p:nvPr/>
+        </p:nvSpPr>
+        <p:spPr>
+          <a:xfrm>
+            <a:off x="640080" y="2103120"/>
+            <a:ext cx="2194560" cy="548640"/>
+          </a:xfrm>
+          <a:prstGeom prst="rect">
+            <a:avLst/>
+          </a:prstGeom>
+          <a:noFill/>
+          <a:ln/>
+        </p:spPr>
+        <p:txBody>
+          <a:bodyPr wrap="square" lIns="0" tIns="0" rIns="0" bIns="0" rtlCol="0" anchor="t"/>
+          <a:lstStyle/>
+          <a:p>
+            <a:pPr indent="0" marL="0">
+              <a:buNone/>
+            </a:pPr>
+            <a:r>
+              <a:rPr lang="en-US" sz="1600" b="1" dirty="0">
+                <a:solidFill>
+                  <a:schemeClr val="tx1"/>
+                </a:solidFill>
+              </a:rPr>
+              <a:t>人數填「含我」</a:t>
+            </a:r>
+            <a:endParaRPr lang="en-US" sz="1600" dirty="0"/>
+          </a:p>
+        </p:txBody>
+      </p:sp>
+      <p:sp>
+        <p:nvSpPr>
+          <p:cNvPr id="7" name="Text 4"/>
+          <p:cNvSpPr txBox="1"/>
+          <p:nvPr/>
+        </p:nvSpPr>
+        <p:spPr>
+          <a:xfrm>
+            <a:off x="640080" y="2697480"/>
+            <a:ext cx="2194560" cy="868680"/>
+          </a:xfrm>
+          <a:prstGeom prst="rect">
+            <a:avLst/>
+          </a:prstGeom>
+          <a:noFill/>
+          <a:ln/>
+        </p:spPr>
+        <p:txBody>
+          <a:bodyPr wrap="square" lIns="0" tIns="0" rIns="0" bIns="0" rtlCol="0" anchor="t"/>
+          <a:lstStyle/>
+          <a:p>
+            <a:pPr indent="0" marL="0">
+              <a:buNone/>
+            </a:pPr>
+            <a:r>
+              <a:rPr lang="en-US" sz="1400" dirty="0">
+                <a:solidFill>
+                  <a:schemeClr val="tx1"/>
+                </a:solidFill>
+              </a:rPr>
+              <a:t>填 3 人，系統只邀 2 位。火柴自己自動算已確認。</a:t>
+            </a:r>
+            <a:endParaRPr lang="en-US" sz="1400" dirty="0"/>
+          </a:p>
+        </p:txBody>
+      </p:sp>
       <p:sp>
         <p:nvSpPr>
           <p:cNvPr id="8" name="card"/>
@@ -10451,12 +11375,12 @@
         </p:nvSpPr>
         <p:spPr>
           <a:xfrm>
-            <a:off x="4663440" y="1188720"/>
-            <a:ext cx="4023360" cy="1554480"/>
+            <a:off x="3291840" y="1280160"/>
+            <a:ext cx="2560320" cy="2468880"/>
           </a:xfrm>
           <a:prstGeom prst="roundRect">
             <a:avLst>
-              <a:gd name="adj" fmla="val 5882"/>
+              <a:gd name="adj" fmla="val 3704"/>
             </a:avLst>
           </a:prstGeom>
           <a:solidFill>
@@ -10479,86 +11403,14 @@
       </p:sp>
       <p:sp>
         <p:nvSpPr>
-          <p:cNvPr id="9" name="Text 6"/>
-          <p:cNvSpPr txBox="1"/>
-          <p:nvPr/>
-        </p:nvSpPr>
-        <p:spPr>
-          <a:xfrm>
-            <a:off x="4846320" y="1371600"/>
-            <a:ext cx="3657600" cy="320040"/>
-          </a:xfrm>
-          <a:prstGeom prst="rect">
-            <a:avLst/>
-          </a:prstGeom>
-          <a:noFill/>
-          <a:ln/>
-        </p:spPr>
-        <p:txBody>
-          <a:bodyPr wrap="square" lIns="0" tIns="0" rIns="0" bIns="0" rtlCol="0" anchor="t"/>
-          <a:lstStyle/>
-          <a:p>
-            <a:pPr indent="0" marL="0">
-              <a:buNone/>
-            </a:pPr>
-            <a:r>
-              <a:rPr lang="en-US" sz="1600" b="1" dirty="0">
-                <a:solidFill>
-                  <a:schemeClr val="tx1"/>
-                </a:solidFill>
-              </a:rPr>
-              <a:t>有人取消，立刻補位</a:t>
-            </a:r>
-            <a:endParaRPr lang="en-US" sz="1600" dirty="0"/>
-          </a:p>
-        </p:txBody>
-      </p:sp>
-      <p:sp>
-        <p:nvSpPr>
-          <p:cNvPr id="10" name="Text 7"/>
-          <p:cNvSpPr txBox="1"/>
-          <p:nvPr/>
-        </p:nvSpPr>
-        <p:spPr>
-          <a:xfrm>
-            <a:off x="4846320" y="1737360"/>
-            <a:ext cx="3657600" cy="822960"/>
-          </a:xfrm>
-          <a:prstGeom prst="rect">
-            <a:avLst/>
-          </a:prstGeom>
-          <a:noFill/>
-          <a:ln/>
-        </p:spPr>
-        <p:txBody>
-          <a:bodyPr wrap="square" lIns="0" tIns="0" rIns="0" bIns="0" rtlCol="0" anchor="t"/>
-          <a:lstStyle/>
-          <a:p>
-            <a:pPr indent="0" marL="0">
-              <a:buNone/>
-            </a:pPr>
-            <a:r>
-              <a:rPr lang="en-US" sz="1400" dirty="0">
-                <a:solidFill>
-                  <a:schemeClr val="tx1"/>
-                </a:solidFill>
-              </a:rPr>
-              <a:t>火柴馬上收到通知，系統同時邀請下一位。</a:t>
-            </a:r>
-            <a:endParaRPr lang="en-US" sz="1400" dirty="0"/>
-          </a:p>
-        </p:txBody>
-      </p:sp>
-      <p:sp>
-        <p:nvSpPr>
-          <p:cNvPr id="11" name="icon-circle"/>
+          <p:cNvPr id="9" name="icon-circle"/>
           <p:cNvSpPr/>
           <p:nvPr/>
         </p:nvSpPr>
         <p:spPr>
           <a:xfrm>
-            <a:off x="8046720" y="1325880"/>
-            <a:ext cx="457200" cy="457200"/>
+            <a:off x="3474720" y="1463040"/>
+            <a:ext cx="502920" cy="502920"/>
           </a:xfrm>
           <a:prstGeom prst="ellipse">
             <a:avLst/>
@@ -10576,7 +11428,7 @@
       </p:sp>
       <p:pic>
         <p:nvPicPr>
-          <p:cNvPr id="12" name="icon" descr="preencoded.png">    </p:cNvPr>
+          <p:cNvPr id="10" name="icon" descr="preencoded.png">    </p:cNvPr>
           <p:cNvPicPr>
             <a:picLocks noChangeAspect="1"/>
           </p:cNvPicPr>
@@ -10590,14 +11442,86 @@
         </p:blipFill>
         <p:spPr>
           <a:xfrm>
-            <a:off x="8156448" y="1435608"/>
-            <a:ext cx="237744" cy="237744"/>
+            <a:off x="3602736" y="1591056"/>
+            <a:ext cx="246888" cy="246888"/>
           </a:xfrm>
           <a:prstGeom prst="rect">
             <a:avLst/>
           </a:prstGeom>
         </p:spPr>
       </p:pic>
+      <p:sp>
+        <p:nvSpPr>
+          <p:cNvPr id="11" name="Text 7"/>
+          <p:cNvSpPr txBox="1"/>
+          <p:nvPr/>
+        </p:nvSpPr>
+        <p:spPr>
+          <a:xfrm>
+            <a:off x="3474720" y="2103120"/>
+            <a:ext cx="2194560" cy="548640"/>
+          </a:xfrm>
+          <a:prstGeom prst="rect">
+            <a:avLst/>
+          </a:prstGeom>
+          <a:noFill/>
+          <a:ln/>
+        </p:spPr>
+        <p:txBody>
+          <a:bodyPr wrap="square" lIns="0" tIns="0" rIns="0" bIns="0" rtlCol="0" anchor="t"/>
+          <a:lstStyle/>
+          <a:p>
+            <a:pPr indent="0" marL="0">
+              <a:buNone/>
+            </a:pPr>
+            <a:r>
+              <a:rPr lang="en-US" sz="1600" b="1" dirty="0">
+                <a:solidFill>
+                  <a:schemeClr val="tx1"/>
+                </a:solidFill>
+              </a:rPr>
+              <a:t>那天你不能被別人約</a:t>
+            </a:r>
+            <a:endParaRPr lang="en-US" sz="1600" dirty="0"/>
+          </a:p>
+        </p:txBody>
+      </p:sp>
+      <p:sp>
+        <p:nvSpPr>
+          <p:cNvPr id="12" name="Text 8"/>
+          <p:cNvSpPr txBox="1"/>
+          <p:nvPr/>
+        </p:nvSpPr>
+        <p:spPr>
+          <a:xfrm>
+            <a:off x="3474720" y="2697480"/>
+            <a:ext cx="2194560" cy="868680"/>
+          </a:xfrm>
+          <a:prstGeom prst="rect">
+            <a:avLst/>
+          </a:prstGeom>
+          <a:noFill/>
+          <a:ln/>
+        </p:spPr>
+        <p:txBody>
+          <a:bodyPr wrap="square" lIns="0" tIns="0" rIns="0" bIns="0" rtlCol="0" anchor="t"/>
+          <a:lstStyle/>
+          <a:p>
+            <a:pPr indent="0" marL="0">
+              <a:buNone/>
+            </a:pPr>
+            <a:r>
+              <a:rPr lang="en-US" sz="1400" dirty="0">
+                <a:solidFill>
+                  <a:schemeClr val="tx1"/>
+                </a:solidFill>
+              </a:rPr>
+              <a:t>「我也出班」的那天，你已有班，其他火柴選不了你。</a:t>
+            </a:r>
+            <a:endParaRPr lang="en-US" sz="1400" dirty="0"/>
+          </a:p>
+        </p:txBody>
+      </p:sp>
       <p:sp>
         <p:nvSpPr>
           <p:cNvPr id="13" name="card"/>
@@ -10606,12 +11530,12 @@
         </p:nvSpPr>
         <p:spPr>
           <a:xfrm>
-            <a:off x="457200" y="2880360"/>
-            <a:ext cx="4023360" cy="1554480"/>
+            <a:off x="6126480" y="1280160"/>
+            <a:ext cx="2560320" cy="2468880"/>
           </a:xfrm>
           <a:prstGeom prst="roundRect">
             <a:avLst>
-              <a:gd name="adj" fmla="val 5882"/>
+              <a:gd name="adj" fmla="val 3704"/>
             </a:avLst>
           </a:prstGeom>
           <a:solidFill>
@@ -10634,86 +11558,14 @@
       </p:sp>
       <p:sp>
         <p:nvSpPr>
-          <p:cNvPr id="14" name="Text 10"/>
-          <p:cNvSpPr txBox="1"/>
-          <p:nvPr/>
-        </p:nvSpPr>
-        <p:spPr>
-          <a:xfrm>
-            <a:off x="640080" y="3063240"/>
-            <a:ext cx="3657600" cy="320040"/>
-          </a:xfrm>
-          <a:prstGeom prst="rect">
-            <a:avLst/>
-          </a:prstGeom>
-          <a:noFill/>
-          <a:ln/>
-        </p:spPr>
-        <p:txBody>
-          <a:bodyPr wrap="square" lIns="0" tIns="0" rIns="0" bIns="0" rtlCol="0" anchor="t"/>
-          <a:lstStyle/>
-          <a:p>
-            <a:pPr indent="0" marL="0">
-              <a:buNone/>
-            </a:pPr>
-            <a:r>
-              <a:rPr lang="en-US" sz="1600" b="1" dirty="0">
-                <a:solidFill>
-                  <a:schemeClr val="tx1"/>
-                </a:solidFill>
-              </a:rPr>
-              <a:t>缺人只提醒，不替你決定</a:t>
-            </a:r>
-            <a:endParaRPr lang="en-US" sz="1600" dirty="0"/>
-          </a:p>
-        </p:txBody>
-      </p:sp>
-      <p:sp>
-        <p:nvSpPr>
-          <p:cNvPr id="15" name="Text 11"/>
-          <p:cNvSpPr txBox="1"/>
-          <p:nvPr/>
-        </p:nvSpPr>
-        <p:spPr>
-          <a:xfrm>
-            <a:off x="640080" y="3429000"/>
-            <a:ext cx="3657600" cy="822960"/>
-          </a:xfrm>
-          <a:prstGeom prst="rect">
-            <a:avLst/>
-          </a:prstGeom>
-          <a:noFill/>
-          <a:ln/>
-        </p:spPr>
-        <p:txBody>
-          <a:bodyPr wrap="square" lIns="0" tIns="0" rIns="0" bIns="0" rtlCol="0" anchor="t"/>
-          <a:lstStyle/>
-          <a:p>
-            <a:pPr indent="0" marL="0">
-              <a:buNone/>
-            </a:pPr>
-            <a:r>
-              <a:rPr lang="en-US" sz="1400" dirty="0">
-                <a:solidFill>
-                  <a:schemeClr val="tx1"/>
-                </a:solidFill>
-              </a:rPr>
-              <a:t>出班前 3 天內（10:00 起）、前一天 18:00，各提醒一次。提醒附「改成急件」按鈕。</a:t>
-            </a:r>
-            <a:endParaRPr lang="en-US" sz="1400" dirty="0"/>
-          </a:p>
-        </p:txBody>
-      </p:sp>
-      <p:sp>
-        <p:nvSpPr>
-          <p:cNvPr id="16" name="icon-circle"/>
+          <p:cNvPr id="14" name="icon-circle"/>
           <p:cNvSpPr/>
           <p:nvPr/>
         </p:nvSpPr>
         <p:spPr>
           <a:xfrm>
-            <a:off x="3840480" y="3017520"/>
-            <a:ext cx="457200" cy="457200"/>
+            <a:off x="6309360" y="1463040"/>
+            <a:ext cx="502920" cy="502920"/>
           </a:xfrm>
           <a:prstGeom prst="ellipse">
             <a:avLst/>
@@ -10731,7 +11583,7 @@
       </p:sp>
       <p:pic>
         <p:nvPicPr>
-          <p:cNvPr id="17" name="icon" descr="preencoded.png">    </p:cNvPr>
+          <p:cNvPr id="15" name="icon" descr="preencoded.png">    </p:cNvPr>
           <p:cNvPicPr>
             <a:picLocks noChangeAspect="1"/>
           </p:cNvPicPr>
@@ -10745,8 +11597,8 @@
         </p:blipFill>
         <p:spPr>
           <a:xfrm>
-            <a:off x="3950208" y="3127248"/>
-            <a:ext cx="237744" cy="237744"/>
+            <a:off x="6437376" y="1591056"/>
+            <a:ext cx="246888" cy="246888"/>
           </a:xfrm>
           <a:prstGeom prst="rect">
             <a:avLst/>
@@ -10755,48 +11607,14 @@
       </p:pic>
       <p:sp>
         <p:nvSpPr>
-          <p:cNvPr id="18" name="card"/>
-          <p:cNvSpPr/>
-          <p:nvPr/>
-        </p:nvSpPr>
-        <p:spPr>
-          <a:xfrm>
-            <a:off x="4663440" y="2880360"/>
-            <a:ext cx="4023360" cy="1554480"/>
-          </a:xfrm>
-          <a:prstGeom prst="roundRect">
-            <a:avLst>
-              <a:gd name="adj" fmla="val 5882"/>
-            </a:avLst>
-          </a:prstGeom>
-          <a:solidFill>
-            <a:schemeClr val="bg2"/>
-          </a:solidFill>
-          <a:ln w="12700">
-            <a:solidFill>
-              <a:schemeClr val="bg2"/>
-            </a:solidFill>
-            <a:prstDash val="solid"/>
-          </a:ln>
-          <a:effectLst>
-            <a:outerShdw sx="100000" sy="100000" kx="0" ky="0" algn="bl" rotWithShape="0" blurRad="76200" dist="25400" dir="5400000">
-              <a:srgbClr val="000000">
-                <a:alpha val="12000"/>
-              </a:srgbClr>
-            </a:outerShdw>
-          </a:effectLst>
-        </p:spPr>
-      </p:sp>
-      <p:sp>
-        <p:nvSpPr>
-          <p:cNvPr id="19" name="Text 14"/>
+          <p:cNvPr id="16" name="Text 11"/>
           <p:cNvSpPr txBox="1"/>
           <p:nvPr/>
         </p:nvSpPr>
         <p:spPr>
           <a:xfrm>
-            <a:off x="4846320" y="3063240"/>
-            <a:ext cx="3657600" cy="320040"/>
+            <a:off x="6309360" y="2103120"/>
+            <a:ext cx="2194560" cy="548640"/>
           </a:xfrm>
           <a:prstGeom prst="rect">
             <a:avLst/>
@@ -10817,7 +11635,7 @@
                   <a:schemeClr val="tx1"/>
                 </a:solidFill>
               </a:rPr>
-              <a:t>開工時間到就關門</a:t>
+              <a:t>點燃時自動關掉你的其他邀請</a:t>
             </a:r>
             <a:endParaRPr lang="en-US" sz="1600" dirty="0"/>
           </a:p>
@@ -10825,14 +11643,14 @@
       </p:sp>
       <p:sp>
         <p:nvSpPr>
-          <p:cNvPr id="20" name="Text 15"/>
+          <p:cNvPr id="17" name="Text 12"/>
           <p:cNvSpPr txBox="1"/>
           <p:nvPr/>
         </p:nvSpPr>
         <p:spPr>
           <a:xfrm>
-            <a:off x="4846320" y="3429000"/>
-            <a:ext cx="3657600" cy="822960"/>
+            <a:off x="6309360" y="2697480"/>
+            <a:ext cx="2194560" cy="868680"/>
           </a:xfrm>
           <a:prstGeom prst="rect">
             <a:avLst/>
@@ -10853,7 +11671,7 @@
                   <a:schemeClr val="tx1"/>
                 </a:solidFill>
               </a:rPr>
-              <a:t>還沒回覆的邀請全部關閉，那天記下「缺幾人出班」，留在月報。</a:t>
+              <a:t>那些火柴的案子立刻補位。</a:t>
             </a:r>
             <a:endParaRPr lang="en-US" sz="1400" dirty="0"/>
           </a:p>
@@ -10861,53 +11679,40 @@
       </p:sp>
       <p:sp>
         <p:nvSpPr>
-          <p:cNvPr id="21" name="icon-circle"/>
-          <p:cNvSpPr/>
-          <p:nvPr/>
-        </p:nvSpPr>
-        <p:spPr>
-          <a:xfrm>
-            <a:off x="8046720" y="3017520"/>
-            <a:ext cx="457200" cy="457200"/>
-          </a:xfrm>
-          <a:prstGeom prst="ellipse">
-            <a:avLst/>
-          </a:prstGeom>
-          <a:solidFill>
-            <a:schemeClr val="accent1"/>
-          </a:solidFill>
-          <a:ln w="12700">
-            <a:solidFill>
-              <a:schemeClr val="accent1"/>
-            </a:solidFill>
-            <a:prstDash val="solid"/>
-          </a:ln>
-        </p:spPr>
-      </p:sp>
-      <p:pic>
-        <p:nvPicPr>
-          <p:cNvPr id="22" name="icon" descr="preencoded.png">    </p:cNvPr>
-          <p:cNvPicPr>
-            <a:picLocks noChangeAspect="1"/>
-          </p:cNvPicPr>
-          <p:nvPr/>
-        </p:nvPicPr>
-        <p:blipFill>
-          <a:blip r:embed="rId4"/>
-          <a:stretch>
-            <a:fillRect/>
-          </a:stretch>
-        </p:blipFill>
-        <p:spPr>
-          <a:xfrm>
-            <a:off x="8156448" y="3127248"/>
-            <a:ext cx="237744" cy="237744"/>
-          </a:xfrm>
-          <a:prstGeom prst="rect">
-            <a:avLst/>
-          </a:prstGeom>
-        </p:spPr>
-      </p:pic>
+          <p:cNvPr id="18" name="Text 13"/>
+          <p:cNvSpPr txBox="1"/>
+          <p:nvPr/>
+        </p:nvSpPr>
+        <p:spPr>
+          <a:xfrm>
+            <a:off x="457200" y="3977640"/>
+            <a:ext cx="8229600" cy="548640"/>
+          </a:xfrm>
+          <a:prstGeom prst="rect">
+            <a:avLst/>
+          </a:prstGeom>
+          <a:noFill/>
+          <a:ln/>
+        </p:spPr>
+        <p:txBody>
+          <a:bodyPr wrap="square" lIns="0" tIns="0" rIns="0" bIns="0" rtlCol="0" anchor="t"/>
+          <a:lstStyle/>
+          <a:p>
+            <a:pPr indent="0" marL="0">
+              <a:buNone/>
+            </a:pPr>
+            <a:r>
+              <a:rPr lang="en-US" sz="1400" dirty="0">
+                <a:solidFill>
+                  <a:schemeClr val="tx1"/>
+                </a:solidFill>
+              </a:rPr>
+              <a:t>只接洽、不出班？把「我也出班」關掉，你那天仍然有空，還能當別人的女孩。</a:t>
+            </a:r>
+            <a:endParaRPr lang="en-US" sz="1400" dirty="0"/>
+          </a:p>
+        </p:txBody>
+      </p:sp>
       <p:sp>
         <p:nvSpPr>
           <p:cNvPr id="25" name="Slide Number Placeholder 0"/>

--- a/docs/briefing/huochai-briefing.pptx
+++ b/docs/briefing/huochai-briefing.pptx
@@ -121,13 +121,13 @@
   <p:extLst>
     <p:ext uri="{521415D9-36F7-43E2-AB2F-B90AF26B5E84}">
       <p14:sectionLst xmlns:p14="http://schemas.microsoft.com/office/powerpoint/2010/main">
-        <p14:section name="開場" id="{768dc3d8-b964-953a-2a8f-d895e74d34b2}">
+        <p14:section name="開場" id="{1d4c95a8-7f9c-b788-d869-0b50b16471df}">
           <p14:sldIdLst>
             <p14:sldId id="256"/>
             <p14:sldId id="257"/>
           </p14:sldIdLst>
         </p14:section>
-        <p14:section name="邀約怎麼運作" id="{8f903521-ded6-517d-757f-04cc46faa325}">
+        <p14:section name="邀約怎麼運作" id="{e71e55e5-e4eb-2dd5-ad23-272ae8d6f226}">
           <p14:sldIdLst>
             <p14:sldId id="258"/>
             <p14:sldId id="259"/>
@@ -137,21 +137,21 @@
             <p14:sldId id="263"/>
           </p14:sldIdLst>
         </p14:section>
-        <p14:section name="火柴與系統的默契" id="{ba231a1b-8678-0c93-cb29-a1d09b1630c4}">
+        <p14:section name="火柴與系統的默契" id="{f43dff29-bbbb-18a3-c67c-874b64e4a700}">
           <p14:sldIdLst>
             <p14:sldId id="264"/>
             <p14:sldId id="265"/>
             <p14:sldId id="266"/>
           </p14:sldIdLst>
         </p14:section>
-        <p14:section name="取消、通知與看得到什麼" id="{3515bce9-cd1f-8f1f-333d-c55e3454f566}">
+        <p14:section name="取消、通知與看得到什麼" id="{44bd3afe-e5ab-2637-85ae-2c8e36b98a3f}">
           <p14:sldIdLst>
             <p14:sldId id="267"/>
             <p14:sldId id="268"/>
             <p14:sldId id="269"/>
           </p14:sldIdLst>
         </p14:section>
-        <p14:section name="結尾" id="{c223c021-5c08-879e-d25f-732554c459b9}">
+        <p14:section name="結尾" id="{8b96b85f-b7eb-1d65-8659-24703ae0b27e}">
           <p14:sldIdLst>
             <p14:sldId id="270"/>
           </p14:sldIdLst>
@@ -1275,7 +1275,12 @@
               <a:t>這是最重要的一個觀念：月曆上的數字是「估價參考」，不是邀約的門票。
 沒空的人可能只是休假、手機看得到；你的邀約有可能讓對方重新安排。
 野放才是真的回不了訊息，所以才有倒數延後。
-唯一硬擋的是「同一天已經確認別的班」，避免兩根火柴搶同一個人。</a:t>
+唯一硬擋的是「同一天已經確認別的班」，避免兩根火柴搶同一個人。
+【二次確認】邀請本身就是一次確認：
+・願意為你調整行程的人，按「確認出班」就算數。
+・其實已經有事、只是班表沒改的人，按「婉拒」就好，不用理由，系統馬上邀下一位。月曆標有空但實際有事的落差，也會在這時被挖出來。
+・分清楚兩種「已經有事」：事情已記在 App（確認別的班、或我也出班）→ 對方顯示灰色，選不了，硬確認也會被擋；事情在 App 外面（私人安排、LINE 談了沒記）→ App 看不到，靠對方收到邀請後按婉拒來確認。
+・對方一直不回也不會卡住：倒數結束後系統同時多問下一位，她之後仍可確認，先確認的先拿到。</a:t>
             </a:r>
             <a:endParaRPr lang="en-US" dirty="0"/>
           </a:p>

--- a/docs/briefing/huochai-briefing.pptx
+++ b/docs/briefing/huochai-briefing.pptx
@@ -121,13 +121,13 @@
   <p:extLst>
     <p:ext uri="{521415D9-36F7-43E2-AB2F-B90AF26B5E84}">
       <p14:sectionLst xmlns:p14="http://schemas.microsoft.com/office/powerpoint/2010/main">
-        <p14:section name="開場" id="{1d4c95a8-7f9c-b788-d869-0b50b16471df}">
+        <p14:section name="開場" id="{b70051ac-4d8a-6954-b065-60825f11e072}">
           <p14:sldIdLst>
             <p14:sldId id="256"/>
             <p14:sldId id="257"/>
           </p14:sldIdLst>
         </p14:section>
-        <p14:section name="邀約怎麼運作" id="{e71e55e5-e4eb-2dd5-ad23-272ae8d6f226}">
+        <p14:section name="邀約怎麼運作" id="{cf7e7527-e5be-580e-efa5-a4a3bdd8c035}">
           <p14:sldIdLst>
             <p14:sldId id="258"/>
             <p14:sldId id="259"/>
@@ -137,21 +137,21 @@
             <p14:sldId id="263"/>
           </p14:sldIdLst>
         </p14:section>
-        <p14:section name="火柴與系統的默契" id="{f43dff29-bbbb-18a3-c67c-874b64e4a700}">
+        <p14:section name="火柴與系統的默契" id="{678bc902-8a39-ce41-845f-906675292e11}">
           <p14:sldIdLst>
             <p14:sldId id="264"/>
             <p14:sldId id="265"/>
             <p14:sldId id="266"/>
           </p14:sldIdLst>
         </p14:section>
-        <p14:section name="取消、通知與看得到什麼" id="{44bd3afe-e5ab-2637-85ae-2c8e36b98a3f}">
+        <p14:section name="取消、通知與看得到什麼" id="{8a6dc942-308b-cd6b-fda7-40f934d82f62}">
           <p14:sldIdLst>
             <p14:sldId id="267"/>
             <p14:sldId id="268"/>
             <p14:sldId id="269"/>
           </p14:sldIdLst>
         </p14:section>
-        <p14:section name="結尾" id="{8b96b85f-b7eb-1d65-8659-24703ae0b27e}">
+        <p14:section name="結尾" id="{5d984fad-772d-b7f6-7953-7e1c91a6c419}">
           <p14:sldIdLst>
             <p14:sldId id="270"/>
           </p14:sldIdLst>
@@ -1730,7 +1730,11 @@
             <a:r>
               <a:rPr lang="en-US" dirty="0"/>
               <a:t>倒數是「活躍時間」：晚上 22:00 到早上 08:00 不扣。
-野放的人邀請時，若在 18:00 前收到，倒數從 18:00 才開始，不會因為在忙而錯過。
+「在忙」有兩種，用 App 之內／之外來講最好懂：
+・出班中＝事情在 App 之內。系統從她已確認的班自動判斷，不用她標。
+・野放＝事情在 App 之外（在別處工作、出去玩、不太能看手機）。她自己在月曆標的，邀請她的火柴看得到，其他夥伴看到的是「沒空」。
+兩種都一樣：邀請在當天 18:00 前送到，倒數從 18:00 才開始，不會因為在忙而錯過。
+注意別混淆：這裡的「出班中」是她收到邀請的『當天』有班；如果是『要排的那一天』她已有班，她會顯示灰色、選不了，是另一回事。
 急件會用比較多 LINE 訊息，後面會講。</a:t>
             </a:r>
             <a:endParaRPr lang="en-US" dirty="0"/>
@@ -10875,8 +10879,8 @@
         </p:nvSpPr>
         <p:spPr>
           <a:xfrm>
-            <a:off x="5349240" y="1234440"/>
-            <a:ext cx="3337560" cy="640080"/>
+            <a:off x="5349240" y="1170432"/>
+            <a:ext cx="3337560" cy="731520"/>
           </a:xfrm>
           <a:prstGeom prst="rect">
             <a:avLst/>
@@ -10960,8 +10964,8 @@
         </p:nvSpPr>
         <p:spPr>
           <a:xfrm>
-            <a:off x="5349240" y="2103120"/>
-            <a:ext cx="3337560" cy="640080"/>
+            <a:off x="5349240" y="2039112"/>
+            <a:ext cx="3337560" cy="731520"/>
           </a:xfrm>
           <a:prstGeom prst="rect">
             <a:avLst/>
@@ -10982,7 +10986,7 @@
                   <a:schemeClr val="tx1"/>
                 </a:solidFill>
               </a:rPr>
-              <a:t>對方當天出班或野放：到 18:00 才開始倒數</a:t>
+              <a:t>她收到邀請當天在忙：出班中（App 內）或野放（App 外），18:00 才開始倒數</a:t>
             </a:r>
             <a:endParaRPr lang="en-US" sz="1400" dirty="0"/>
           </a:p>
@@ -11045,8 +11049,8 @@
         </p:nvSpPr>
         <p:spPr>
           <a:xfrm>
-            <a:off x="5349240" y="2971800"/>
-            <a:ext cx="3337560" cy="640080"/>
+            <a:off x="5349240" y="2907792"/>
+            <a:ext cx="3337560" cy="731520"/>
           </a:xfrm>
           <a:prstGeom prst="rect">
             <a:avLst/>

--- a/docs/briefing/huochai-briefing.pptx
+++ b/docs/briefing/huochai-briefing.pptx
@@ -121,13 +121,13 @@
   <p:extLst>
     <p:ext uri="{521415D9-36F7-43E2-AB2F-B90AF26B5E84}">
       <p14:sectionLst xmlns:p14="http://schemas.microsoft.com/office/powerpoint/2010/main">
-        <p14:section name="開場" id="{b70051ac-4d8a-6954-b065-60825f11e072}">
+        <p14:section name="開場" id="{686e2aca-5ac9-564a-839f-b0d70241fb94}">
           <p14:sldIdLst>
             <p14:sldId id="256"/>
             <p14:sldId id="257"/>
           </p14:sldIdLst>
         </p14:section>
-        <p14:section name="邀約怎麼運作" id="{cf7e7527-e5be-580e-efa5-a4a3bdd8c035}">
+        <p14:section name="邀約怎麼運作" id="{800287ca-9b57-e586-e9a4-4e44f43052b9}">
           <p14:sldIdLst>
             <p14:sldId id="258"/>
             <p14:sldId id="259"/>
@@ -137,21 +137,21 @@
             <p14:sldId id="263"/>
           </p14:sldIdLst>
         </p14:section>
-        <p14:section name="火柴與系統的默契" id="{678bc902-8a39-ce41-845f-906675292e11}">
+        <p14:section name="火柴與系統的默契" id="{32ea052a-8d76-14d7-b209-ab0aa5debd25}">
           <p14:sldIdLst>
             <p14:sldId id="264"/>
             <p14:sldId id="265"/>
             <p14:sldId id="266"/>
           </p14:sldIdLst>
         </p14:section>
-        <p14:section name="取消、通知與看得到什麼" id="{8a6dc942-308b-cd6b-fda7-40f934d82f62}">
+        <p14:section name="取消、通知與看得到什麼" id="{243a5be2-311d-577c-2b8b-2d6a1ea5dc75}">
           <p14:sldIdLst>
             <p14:sldId id="267"/>
             <p14:sldId id="268"/>
             <p14:sldId id="269"/>
           </p14:sldIdLst>
         </p14:section>
-        <p14:section name="結尾" id="{5d984fad-772d-b7f6-7953-7e1c91a6c419}">
+        <p14:section name="結尾" id="{09dedef6-f7c1-7dac-a2be-74979f49bfed}">
           <p14:sldIdLst>
             <p14:sldId id="270"/>
           </p14:sldIdLst>
@@ -1280,7 +1280,15 @@
 ・願意為你調整行程的人，按「確認出班」就算數。
 ・其實已經有事、只是班表沒改的人，按「婉拒」就好，不用理由，系統馬上邀下一位。月曆標有空但實際有事的落差，也會在這時被挖出來。
 ・分清楚兩種「已經有事」：事情已記在 App（確認別的班、或我也出班）→ 對方顯示灰色，選不了，硬確認也會被擋；事情在 App 外面（私人安排、LINE 談了沒記）→ App 看不到，靠對方收到邀請後按婉拒來確認。
-・對方一直不回也不會卡住：倒數結束後系統同時多問下一位，她之後仍可確認，先確認的先拿到。</a:t>
+・對方一直不回也不會卡住：倒數結束後系統同時多問下一位，她之後仍可確認，先確認的先拿到。
+【不填班也收得到邀請，但還是鼓勵大家填】
+先回答最多人問的：沒填班，還是會收到邀請。因為不填通常不是不想接，是還不確定：只能確定未來一週、想看這個月已經出幾班再決定、或單純忘了。所以 App 不用「有沒有填」來擋邀請，你收到時再決定，接或婉拒都可以，婉拒不用理由。
+但是，請大家還是盡量填：
+1. 月曆上的人數才準：「還能約」只算標了有空的人。火柴估價時最怕看到有人、結果約不到；大家填得準，數字就準。
+2. 標有空的人，在火柴排順位時排在名單上方，比較容易被先想到；沒標的人在「其他成員」，要火柴特別去找。
+3. 標野放有保護：邀請當天她在別處忙，倒數等到 18:00 才開始，不會因為晚回而錯過。
+4. 不用一次填完：只能確定一週，就先填那一週，隨時可以改。每月 20 號前填下個月，也可以按「沿用上月習慣」一鍵帶入再微調。
+一句話收尾：不填，只是讓大家看不到你有空；填了，機會才會主動找上你。</a:t>
             </a:r>
             <a:endParaRPr lang="en-US" dirty="0"/>
           </a:p>

--- a/docs/briefing/huochai-briefing.pptx
+++ b/docs/briefing/huochai-briefing.pptx
@@ -121,13 +121,13 @@
   <p:extLst>
     <p:ext uri="{521415D9-36F7-43E2-AB2F-B90AF26B5E84}">
       <p14:sectionLst xmlns:p14="http://schemas.microsoft.com/office/powerpoint/2010/main">
-        <p14:section name="開場" id="{686e2aca-5ac9-564a-839f-b0d70241fb94}">
+        <p14:section name="開場" id="{e7c5888d-767b-e49c-22f4-ec6e67307635}">
           <p14:sldIdLst>
             <p14:sldId id="256"/>
             <p14:sldId id="257"/>
           </p14:sldIdLst>
         </p14:section>
-        <p14:section name="邀約怎麼運作" id="{800287ca-9b57-e586-e9a4-4e44f43052b9}">
+        <p14:section name="邀約怎麼運作" id="{28887fe1-eaed-1b8a-2b36-b6ed387bc4b1}">
           <p14:sldIdLst>
             <p14:sldId id="258"/>
             <p14:sldId id="259"/>
@@ -137,21 +137,21 @@
             <p14:sldId id="263"/>
           </p14:sldIdLst>
         </p14:section>
-        <p14:section name="火柴與系統的默契" id="{32ea052a-8d76-14d7-b209-ab0aa5debd25}">
+        <p14:section name="火柴與系統的默契" id="{e2e40dab-f972-41a9-fd34-212d9b150af1}">
           <p14:sldIdLst>
             <p14:sldId id="264"/>
             <p14:sldId id="265"/>
             <p14:sldId id="266"/>
           </p14:sldIdLst>
         </p14:section>
-        <p14:section name="取消、通知與看得到什麼" id="{243a5be2-311d-577c-2b8b-2d6a1ea5dc75}">
+        <p14:section name="取消、通知與看得到什麼" id="{0344d2f3-f610-b08a-d766-938c68cf5d9d}">
           <p14:sldIdLst>
             <p14:sldId id="267"/>
             <p14:sldId id="268"/>
             <p14:sldId id="269"/>
           </p14:sldIdLst>
         </p14:section>
-        <p14:section name="結尾" id="{09dedef6-f7c1-7dac-a2be-74979f49bfed}">
+        <p14:section name="結尾" id="{543bf615-14f7-77af-b7d8-4807254a1b65}">
           <p14:sldIdLst>
             <p14:sldId id="270"/>
           </p14:sldIdLst>
@@ -1281,14 +1281,15 @@
 ・其實已經有事、只是班表沒改的人，按「婉拒」就好，不用理由，系統馬上邀下一位。月曆標有空但實際有事的落差，也會在這時被挖出來。
 ・分清楚兩種「已經有事」：事情已記在 App（確認別的班、或我也出班）→ 對方顯示灰色，選不了，硬確認也會被擋；事情在 App 外面（私人安排、LINE 談了沒記）→ App 看不到，靠對方收到邀請後按婉拒來確認。
 ・對方一直不回也不會卡住：倒數結束後系統同時多問下一位，她之後仍可確認，先確認的先拿到。
-【不填班也收得到邀請，但還是鼓勵大家填】
-先回答最多人問的：沒填班，還是會收到邀請。因為不填通常不是不想接，是還不確定：只能確定未來一週、想看這個月已經出幾班再決定、或單純忘了。所以 App 不用「有沒有填」來擋邀請，你收到時再決定，接或婉拒都可以，婉拒不用理由。
-但是，請大家還是盡量填：
-1. 月曆上的人數才準：「還能約」只算標了有空的人。火柴估價時最怕看到有人、結果約不到；大家填得準，數字就準。
-2. 標有空的人，在火柴排順位時排在名單上方，比較容易被先想到；沒標的人在「其他成員」，要火柴特別去找。
-3. 標野放有保護：邀請當天她在別處忙，倒數等到 18:00 才開始，不會因為晚回而錯過。
-4. 不用一次填完：只能確定一週，就先填那一週，隨時可以改。每月 20 號前填下個月，也可以按「沿用上月習慣」一鍵帶入再微調。
-一句話收尾：不填，只是讓大家看不到你有空；填了，機會才會主動找上你。</a:t>
+【不填班也收得到邀請，但請大家盡量填】
+先回答最多人問的：沒填班，還是會收到邀請。
+不填通常不是不想接，是還不確定：只能確定未來一週、想看這個月已經出幾班再決定，或單純忘了。所以 App 不拿「有沒有填」擋邀請：你收到時再決定，接或婉拒都行，婉拒不用理由。
+那為什麼還要填？
+1. 月曆才準：「還能約」只算標了有空的人。填得準，火柴估價時才不會看到有人、結果約不到。
+2. 機會先找上你：標有空的人，在火柴排順位時排在名單上方；沒標的在「其他成員」，火柴要特地去找。
+3. 野放有保護：邀請當天你在別處忙，倒數等到 18:00 才開始，不怕晚回就錯過。
+4. 填起來不難：只能確定一週，就先填一週，隨時可改；每月 20 號前填下個月，也可按「沿用上月習慣」一鍵帶入。
+收尾一句：不填，只是讓大家看不到你有空；填了，機會才會主動找上你。</a:t>
             </a:r>
             <a:endParaRPr lang="en-US" dirty="0"/>
           </a:p>
